--- a/slides/pptx/lecture14_agents.pptx
+++ b/slides/pptx/lecture14_agents.pptx
@@ -731,7 +731,7 @@
           <a:lstStyle/>
           <a:p>
             <a:r>
-              <a:t>The three guardrails from the outcomes, each tied to the specific failure it prevents (rule 3 — every guardrail and failure is taught HERE, before the Q2 match). FAILURE 1: the agent writes a confident summary containing a fabricated number or citation (the Lecture 13 hallucination, in an agent) → GUARDRAIL: HUMAN REVIEW — a qualified person verifies every number and flag before anything is released. FAILURE 2: the agent takes a destructive or irreversible action — deletes/overwrites the raw data file, or orders reagents — on its own → GUARDRAIL: RESTRICTED TOOLS — give it read-only access and a limited toolset; no write, delete, or purchase without explicit approval. FAILURE 3: a wrong result ships and no one can tell what the agent did or reproduce it → GUARDRAIL: LOGGING — record every reason→act step so the run is auditable and reproducible. Say the pairing pattern aloud, then the room matches them itself next slide (Quiz 14 Q2).</a:t>
+              <a:t>The three guardrails from the outcomes, each tied to the specific failure it prevents (rule 3 — every guardrail and failure is taught HERE, before the Q2 match). FAILURE 1: the agent writes a confident summary containing a fabricated number or citation (the Lecture 13 hallucination, in an agent) → GUARDRAIL: HUMAN REVIEW — a qualified person verifies every number and flag before anything is released. FAILURE 2: the agent takes a destructive or irreversible action — deletes/overwrites the raw data file, or orders reagents — on its own → GUARDRAIL: RESTRICTED TOOLS — give it read-only access and a limited toolset; no write, delete, or purchase without explicit approval. FAILURE 3: a wrong result ships and no one can tell what the agent did or reproduce it → GUARDRAIL: LOGGING — record every reason→act step so the run is auditable and reproducible. Say the pairing PATTERN aloud (what each guardrail is FOR), because next slide the room matches three NEW, differently-worded failures — reasoning from purpose, not copying this chart (Quiz 14 Q2).</a:t>
             </a:r>
           </a:p>
           <a:p/>
@@ -802,7 +802,7 @@
           <a:lstStyle/>
           <a:p>
             <a:r>
-              <a:t>YOU-DO = Quiz 14 Q2 (match guardrail to failure; assesses the guardrails outcome). Answers, identical to the Quiz 14 Q2 key and straight off the previous slide: (1) fabricated number/citation in a summary → HUMAN REVIEW (a person verifies every number/flag before release); (2) the agent deletes/overwrites raw data or orders reagents on its own → RESTRICTED TOOLS (read-only; no write/delete/purchase without approval); (3) a wrong result ships and no one can tell what the agent did or reproduce it → LOGGING (record every reason→act step; auditable, reproducible). Each guardrail used once. Take one match from the floor, confirm, then have the room fill Q2.</a:t>
+              <a:t>YOU-DO = Quiz 14 Q2 (now a TRANSFER: three disguised failures the room must reason about, not the three lines from the I-do chart). Answers: (a) the draft cites a reference range in no SOP → HUMAN REVIEW (a person verifies every number/citation against a source before release); (b) told to "tidy old files," it overwrites last month's .raw files → RESTRICTED TOOLS (read-only; no write/delete without approval — the destructive-action failure in disguise); (c) a wrong result shipped and the lab can't reconstruct which files it used → LOGGING (every reason→act step recorded, auditable). Each guardrail once. Q2(d), the catch-vs-prevent twist: human review is a CATCH-AFTER control (works only if the reviewer checks); to make fabrications rarer UP FRONT, ground the agent in real retrieved sources (RAG, Lecture 13) and/or restrict it to a vetted reference database so it can only cite documents that exist — prevention layered on detection. Take one match and one prevention idea from the floor, then have the room fill Q2.</a:t>
             </a:r>
           </a:p>
           <a:p/>
@@ -873,7 +873,7 @@
           <a:lstStyle/>
           <a:p>
             <a:r>
-              <a:t>YOU-DO = Quiz 14 Q3 (what must stay human-reviewed in a clinical workflow; assesses the guardrail/where-agents-fit outcome). Answer (identical to the Quiz 14 Q3 key): steps (c) releasing the patient report / signing results and (d) the final resistance (R/S) call MUST stay human-reviewed and signed — they become a released clinical result or a patient-affecting decision, so a qualified person must verify and sign, no matter how good the agent's draft. Steps (a) merge/reformat QC tables, (b) draft the QC summary text, and (e) summarise method papers are fine for an agent to DO as a helper — still checked (spot-check + log; verify citations; verify the draft before release), but they don't directly affect a patient without a human. The rule of thumb: anything that becomes a released result or a patient-affecting decision needs the human gate. Take one answer, then have the room fill Q3 — that's all three Quiz 14 items worked live.</a:t>
+              <a:t>YOU-DO = Quiz 14 Q3 (decide + articulate the rule, on FRESH scenarios — with a deliberate near-miss pair). Answer (identical to the Quiz 14 Q3 key): (b) AUTO-RELEASING results and (c) the final resistance (R/S) call must stay human-reviewed and signed — each becomes a released clinical result or a patient-affecting decision. The key discrimination is (a) vs (b): (a) HOLDING/flagging a suspect run for review is CONSERVATIVE — it only routes work to a human, never releases anything — so an agent may do it freely, whereas (b) auto-releasing decides a patient result and needs the gate. (d) reformatting the QC table and (e) drafting an explanatory note are agent-friendly helpers (still spot-checked and logged), because they don't release a result or decide anything about a patient. Rule of thumb: anything that RELEASES a result or makes a PATIENT-AFFECTING decision needs the human gate — flagging, drafting, and reformatting do not. Take one answer plus the rule, then have the room fill Q3 — that's all three Quiz 14 items worked live.</a:t>
             </a:r>
           </a:p>
           <a:p/>
@@ -1370,7 +1370,7 @@
           <a:lstStyle/>
           <a:p>
             <a:r>
-              <a:t>YOU-DO = Quiz 14 Q1 (label reason vs act on a transcript — the hour's spine, assessing the ReAct outcome). Same ReAct shape, a different task (summarise this week's peptide-ID counts and note any underperforming run) and different numbers, so it's transfer not recall. The transcript is reproduced verbatim on the Quiz 14 sheet, so the room answers straight off it. The correct labels, fixed by the ReAct definition on the previous slide: Step 1 (plan: load results.csv and see its columns) = REASON; Step 2 (read_csv("results.csv")) = ACT; Step 3 (plan: compute the average to see which runs fall below) = REASON; Step 4 (compute the mean of peptide_ids) = ACT; Step 5 (interpret: B-04 at 420 is far below the mean of 1,850 → underperformed) = REASON; Step 6 (write_summary(flag="B-04")) = ACT. So: 1 R, 2 A, 3 R, 4 A, 5 R, 6 A — reasoning/interpreting is reason; every step that calls a tool (read, compute, write) is act; the grey lines are observations, not steps. Take a couple of labels from the floor, confirm against the pattern, then have the room fill Q1.</a:t>
+              <a:t>YOU-DO = Quiz 14 Q1 (label reason vs act on a transcript AND diagnose a fabricated claim — the hour's spine, now with a hallucination-spotting twist that ties the ReAct loop to the guardrails to come). Same ReAct shape, a different task (summarise this week's peptide-ID counts and note any underperforming run) and different numbers, reproduced verbatim on the Quiz 14 sheet. (a) Labels, fixed by the ReAct definition on the previous slide: Step 1 (plan: load results.csv, see its columns) = REASON; Step 2 (read_csv("results.csv")) = ACT; Step 3 (plan: compute the average to see which runs fall below) = REASON; Step 4 (compute the mean of peptide_ids) = ACT; Step 5 (interpret: B-04 at 420 ≪ mean 1,850 → underperformed) = REASON; Step 6 (write_summary(flag="B-04")) = ACT. So: 1 R, 2 A, 3 R, 4 A, 5 R, 6 A — interpreting/planning is reason; every step that calls a tool is act; the grey lines are observations. (b) The ANSWER claims "the cause is a clogged emitter" — that is UNSUPPORTED: no tool ever diagnosed a cause; the observations show only that B-04's count is low, not WHY. The agent should have stopped after flagging the low run (step 6) and left any root-cause claim — and any repair action — to a human; asserting an unverified cause is exactly the hallucination the next section's guardrails exist to stop. Take a few labels and the spotted claim from the floor, then have the room fill Q1.</a:t>
             </a:r>
           </a:p>
           <a:p/>
@@ -5633,8 +5633,8 @@
         </p:blipFill>
         <p:spPr>
           <a:xfrm>
-            <a:off x="1572555" y="1828800"/>
-            <a:ext cx="9016409" cy="3877056"/>
+            <a:off x="2175066" y="1828800"/>
+            <a:ext cx="7811388" cy="3358897"/>
           </a:xfrm>
           <a:prstGeom prst="rect">
             <a:avLst/>
@@ -5649,8 +5649,8 @@
         </p:nvSpPr>
         <p:spPr>
           <a:xfrm>
-            <a:off x="548640" y="5797296"/>
-            <a:ext cx="10515600" cy="923544"/>
+            <a:off x="548640" y="5279137"/>
+            <a:ext cx="10515600" cy="1441703"/>
           </a:xfrm>
           <a:prstGeom prst="rect">
             <a:avLst/>
@@ -5700,7 +5700,7 @@
                 </a:solidFill>
                 <a:latin typeface="Avenir Next"/>
               </a:rPr>
-              <a:t>Your turn → Quiz 14, Q2. Match each failure mode to the ONE guardrail that prevents it, using the word bank: HUMAN REVIEW · RESTRICTED TOOLS · LOGGING. Worked answer in the notes.</a:t>
+              <a:t>Your turn → Quiz 14, Q2. Three NEW failures — different wording from the chart above. Match each to the ONE guardrail that prevents it (word bank: HUMAN REVIEW · RESTRICTED TOOLS · LOGGING). Then Q2(d): human review CATCHES a fabricated citation — what would make such fabrications RARER in the first place? Worked answer in the notes.</a:t>
             </a:r>
           </a:p>
         </p:txBody>
@@ -5851,8 +5851,8 @@
         </p:blipFill>
         <p:spPr>
           <a:xfrm>
-            <a:off x="1450809" y="1828800"/>
-            <a:ext cx="9259902" cy="3617976"/>
+            <a:off x="1782354" y="1828800"/>
+            <a:ext cx="8596811" cy="3358897"/>
           </a:xfrm>
           <a:prstGeom prst="rect">
             <a:avLst/>
@@ -5867,8 +5867,8 @@
         </p:nvSpPr>
         <p:spPr>
           <a:xfrm>
-            <a:off x="548640" y="5538216"/>
-            <a:ext cx="10515600" cy="1182624"/>
+            <a:off x="548640" y="5279137"/>
+            <a:ext cx="10515600" cy="1441703"/>
           </a:xfrm>
           <a:prstGeom prst="rect">
             <a:avLst/>
@@ -5918,7 +5918,7 @@
                 </a:solidFill>
                 <a:latin typeface="Avenir Next"/>
               </a:rPr>
-              <a:t>Your turn → Quiz 14, Q3. In a clinical workflow, which of these steps must a qualified human review and sign before it reaches a patient? (a) merge/reformat QC tables (b) draft the QC summary (c) release the patient report (d) the final R/S call (e) summarise 3 papers. Worked answer in the notes.</a:t>
+              <a:t>Your turn → Quiz 14, Q3. Five steps an agent could help with — some look alike but differ. Circle the ones a qualified human must review and sign before they affect a patient: (a) HOLD a suspect run for review (b) AUTO-RELEASE runs it judges in-range (c) file the final R/S call (d) reformat the QC table (e) draft a note explaining a result. Then state the rule you used. Worked answer in the notes.</a:t>
             </a:r>
           </a:p>
         </p:txBody>
@@ -7670,7 +7670,7 @@
         <p:spPr>
           <a:xfrm>
             <a:off x="548640" y="731520"/>
-            <a:ext cx="11064240" cy="1005840"/>
+            <a:ext cx="11064240" cy="1127760"/>
           </a:xfrm>
           <a:prstGeom prst="rect">
             <a:avLst/>
@@ -7690,7 +7690,7 @@
                 </a:solidFill>
                 <a:latin typeface="Avenir Next"/>
               </a:rPr>
-              <a:t>Your turn — label each step: reason or act?</a:t>
+              <a:t>Your turn — label the steps, then spot the claim no tool showed</a:t>
             </a:r>
           </a:p>
         </p:txBody>
@@ -7711,8 +7711,8 @@
         </p:blipFill>
         <p:spPr>
           <a:xfrm>
-            <a:off x="1860015" y="1828800"/>
-            <a:ext cx="8441490" cy="3877056"/>
+            <a:off x="2424107" y="1828800"/>
+            <a:ext cx="7313306" cy="3358897"/>
           </a:xfrm>
           <a:prstGeom prst="rect">
             <a:avLst/>
@@ -7727,8 +7727,8 @@
         </p:nvSpPr>
         <p:spPr>
           <a:xfrm>
-            <a:off x="548640" y="5797296"/>
-            <a:ext cx="10515600" cy="923544"/>
+            <a:off x="548640" y="5279137"/>
+            <a:ext cx="10515600" cy="1441703"/>
           </a:xfrm>
           <a:prstGeom prst="rect">
             <a:avLst/>
@@ -7778,7 +7778,7 @@
                 </a:solidFill>
                 <a:latin typeface="Avenir Next"/>
               </a:rPr>
-              <a:t>Your turn → Quiz 14, Q1. A new transcript (same ReAct shape). Label each numbered step R (reason = a Thought) or A (act = calling a tool). The observations (grey) are given context, not steps. Worked answer in the notes.</a:t>
+              <a:t>Your turn → Quiz 14, Q1. A new transcript (same ReAct shape). (a) Label each numbered step R (reason = a Thought) or A (act = a tool call); the grey observations are context, not steps. (b) The final ANSWER states one thing NO tool ever showed — spot it, and say where the agent should have stopped for a human. Worked answer in the notes.</a:t>
             </a:r>
           </a:p>
         </p:txBody>

--- a/slides/pptx/lecture14_agents.pptx
+++ b/slides/pptx/lecture14_agents.pptx
@@ -1654,7 +1654,7 @@
           <a:lstStyle/>
           <a:p>
             <a:r>
-              <a:t>The storyboard so the room knows what's coming and can map each step to the ReAct loop. Five beats: READ (open the CSV — an Action; the Thought before it: "I need the data first"), ANALYZE (run the limit checks and stats), PLOT (draw the spectra or QC trends), FLAG (mark the out-of-range run), and DRAFT (write a QC summary for a human to review). Narrate each as reason→act as the agent runs. Keep the room's hands in it: just before the FLAG beat, pause 30 seconds and have everyone PREDICT which run the agent will flag (they've already seen the QC-04 row on the follow-along handout), then run it and check the prediction — a quick hands-on beat inside the demo stretch. Emphasise two things the room should watch for: the agent shows its reasoning before each tool call (that's the ReAct transcript, live), and its final output is a DRAFT for review, never a released result — which sets up the guardrails stop. Restate the tooling plan: primary Claude Code, alternative Bedrock, fallback recording. Next slide, the flag→draft beat made concrete on the QC numbers.</a:t>
+              <a:t>The storyboard so the room knows what's coming and can map each step to the ReAct loop. Five beats: READ (open the CSV — an Action; the Thought before it: "I need the data first"), ANALYZE (run the limit checks and stats), PLOT (draw the spectra or QC trends), FLAG (mark the out-of-range run), and DRAFT (write a QC summary for a human to review). Narrate each as reason→act as the agent runs. Keep the room's hands in it: just before the FLAG beat, pause 30 seconds and have everyone PREDICT which run the agent will flag (they've already seen the QC-04 row on the follow-along handout), then run it and check the prediction — a quick hands-on beat inside the demo stretch. Emphasise two things the room should watch for: the agent shows its reasoning before each tool call (that's the ReAct transcript, live), and its final output is a DRAFT for review, never a released result — which sets up the guardrails stop. Restate the tooling plan: primary Claude Code, alternative Bedrock, fallback recording. Next slide, the flag→draft beat made concrete on the QC numbers. INSTRUCTOR NOTE — a ready-made, framework-free version of this exact demo (a ~30-line ReAct loop + plain-function tools, on the same QC-04 numbers) lives in demos/lecture14_agent/ (run `python3 qc_agent.py`). It runs OFFLINE with no API key as the guaranteed fallback, or against a real/local LLM with `--llm openai`. Its printed reason→act→observe transcript IS the pre-recorded run; open qc_agent.py on screen to show the room that an agent is just LLM + tools + a loop, no magic.</a:t>
             </a:r>
           </a:p>
           <a:p/>

--- a/slides/pptx/lecture14_agents.pptx
+++ b/slides/pptx/lecture14_agents.pptx
@@ -1654,7 +1654,7 @@
           <a:lstStyle/>
           <a:p>
             <a:r>
-              <a:t>The storyboard so the room knows what's coming and can map each step to the ReAct loop. Five beats: READ (open the CSV — an Action; the Thought before it: "I need the data first"), ANALYZE (run the limit checks and stats), PLOT (draw the spectra or QC trends), FLAG (mark the out-of-range run), and DRAFT (write a QC summary for a human to review). Narrate each as reason→act as the agent runs. Keep the room's hands in it: just before the FLAG beat, pause 30 seconds and have everyone PREDICT which run the agent will flag (they've already seen the QC-04 row on the follow-along handout), then run it and check the prediction — a quick hands-on beat inside the demo stretch. Emphasise two things the room should watch for: the agent shows its reasoning before each tool call (that's the ReAct transcript, live), and its final output is a DRAFT for review, never a released result — which sets up the guardrails stop. Restate the tooling plan: primary Claude Code, alternative Bedrock, fallback recording. Next slide, the flag→draft beat made concrete on the QC numbers. INSTRUCTOR NOTE — a ready-made, framework-free version of this exact demo (a ~30-line ReAct loop + plain-function tools, on the same QC-04 numbers) lives in demos/lecture14_agent/ (run `python3 qc_agent.py`). It runs OFFLINE with no API key as the guaranteed fallback, or against a real/local LLM with `--llm openai`. Its printed reason→act→observe transcript IS the pre-recorded run; open qc_agent.py on screen to show the room that an agent is just LLM + tools + a loop, no magic.</a:t>
+              <a:t>The storyboard so the room knows what's coming and can map each step to the ReAct loop. Five beats: READ (open the CSV — an Action; the Thought before it: "I need the data first"), ANALYZE (run the limit checks and stats), PLOT (draw the spectra or QC trends), FLAG (mark the out-of-range run), and DRAFT (write a QC summary for a human to review). Narrate each as reason→act as the agent runs. Keep the room's hands in it: just before the FLAG beat, pause 30 seconds and have everyone PREDICT which run the agent will flag (they've already seen the QC-04 row on the follow-along handout), then run it and check the prediction — a quick hands-on beat inside the demo stretch. Emphasise two things the room should watch for: the agent shows its reasoning before each tool call (that's the ReAct transcript, live), and its final output is a DRAFT for review, never a released result — which sets up the guardrails stop. Restate the tooling plan: primary Claude Code, alternative Bedrock, fallback recording. Next slide, the flag→draft beat made concrete on the QC numbers. INSTRUCTOR NOTE — a ready-made, framework-free version of this demo lives in demos/lecture14_agent/. It builds the agent in THREE stages so the room sees why each piece matters: `python3 agent.py 1` (chatbot — can't see the data), `2` (adds memory — fluent but INVENTS QC numbers, a live hallucination), `3` (adds tools/ReAct — reads the file and answers with the real QC-04 numbers, hallucination gone). One small loop with two switches (memory, tools); tools and the LLM backend are in separate files. Runs OFFLINE with no API key as the guaranteed fallback, or against a real/local LLM with `--openai`. Open agent.py on screen: an agent is just LLM + tools + a loop, no magic.</a:t>
             </a:r>
           </a:p>
           <a:p/>
@@ -8555,8 +8555,8 @@
         </p:blipFill>
         <p:spPr>
           <a:xfrm>
-            <a:off x="1340381" y="1828800"/>
-            <a:ext cx="9480757" cy="3358897"/>
+            <a:off x="1706020" y="1828800"/>
+            <a:ext cx="8749480" cy="3099816"/>
           </a:xfrm>
           <a:prstGeom prst="rect">
             <a:avLst/>
@@ -8571,8 +8571,8 @@
         </p:nvSpPr>
         <p:spPr>
           <a:xfrm>
-            <a:off x="548640" y="5279137"/>
-            <a:ext cx="10515600" cy="1441703"/>
+            <a:off x="548640" y="5020056"/>
+            <a:ext cx="10515600" cy="1700784"/>
           </a:xfrm>
           <a:prstGeom prst="rect">
             <a:avLst/>
@@ -8622,7 +8622,7 @@
                 </a:solidFill>
                 <a:latin typeface="Avenir Next"/>
               </a:rPr>
-              <a:t>The demo as five beats, each one reason→act: READ the QC/spectra CSV → ANALYZE (limits, stats) → PLOT the spectra/trends → FLAG the out-of-range run → DRAFT the QC summary for review. 💬 Before the FLAG beat, take 30 s: predict which run the agent will flag. Primary: instructor's Claude Code · alt: Bedrock API · fallback: pre-recorded run — the demo never fails live.</a:t>
+              <a:t>The demo as five beats, each one reason→act: READ the QC/spectra CSV → ANALYZE (limits, stats) → PLOT the spectra/trends → FLAG the out-of-range run → DRAFT the QC summary for review. 💬 Before the FLAG beat, take 30 s: predict which run the agent will flag. Primary: instructor's Claude Code (or demos/lecture14_agent/agent.py, staged 1→2→3) · fallback: offline run — the demo never fails live.</a:t>
             </a:r>
           </a:p>
         </p:txBody>

--- a/slides/pptx/lecture14_agents.pptx
+++ b/slides/pptx/lecture14_agents.pptx
@@ -1654,7 +1654,7 @@
           <a:lstStyle/>
           <a:p>
             <a:r>
-              <a:t>The storyboard so the room knows what's coming and can map each step to the ReAct loop. Five beats: READ (open the CSV — an Action; the Thought before it: "I need the data first"), ANALYZE (run the limit checks and stats), PLOT (draw the spectra or QC trends), FLAG (mark the out-of-range run), and DRAFT (write a QC summary for a human to review). Narrate each as reason→act as the agent runs. Keep the room's hands in it: just before the FLAG beat, pause 30 seconds and have everyone PREDICT which run the agent will flag (they've already seen the QC-04 row on the follow-along handout), then run it and check the prediction — a quick hands-on beat inside the demo stretch. Emphasise two things the room should watch for: the agent shows its reasoning before each tool call (that's the ReAct transcript, live), and its final output is a DRAFT for review, never a released result — which sets up the guardrails stop. Restate the tooling plan: primary Claude Code, alternative Bedrock, fallback recording. Next slide, the flag→draft beat made concrete on the QC numbers. INSTRUCTOR NOTE — a ready-made, framework-free version of this demo lives in demos/lecture14_agent/. It builds the agent in THREE stages so the room sees why each piece matters: `python3 agent.py 1` (chatbot — can't see the data), `2` (adds memory — fluent but INVENTS QC numbers, a live hallucination), `3` (adds tools/ReAct — reads the file and answers with the real QC-04 numbers, hallucination gone). One small loop with two switches (memory, tools); tools and the LLM backend are in separate files. Runs OFFLINE with no API key as the guaranteed fallback, or against a real/local LLM with `--openai`. Open agent.py on screen: an agent is just LLM + tools + a loop, no magic.</a:t>
+              <a:t>The storyboard so the room knows what's coming and can map each step to the ReAct loop. Five beats: READ (open the CSV — an Action; the Thought before it: "I need the data first"), ANALYZE (run the limit checks and stats), PLOT (draw the spectra or QC trends), FLAG (mark the out-of-range run), and DRAFT (write a QC summary for a human to review). Narrate each as reason→act as the agent runs. Keep the room's hands in it: just before the FLAG beat, pause 30 seconds and have everyone PREDICT which run the agent will flag (they've already seen the QC-04 row on the follow-along handout), then run it and check the prediction — a quick hands-on beat inside the demo stretch. Emphasise two things the room should watch for: the agent shows its reasoning before each tool call (that's the ReAct transcript, live), and its final output is a DRAFT for review, never a released result — which sets up the guardrails stop. Restate the tooling plan: primary Claude Code, alternative Bedrock, fallback recording. Next slide, the flag→draft beat made concrete on the QC numbers. INSTRUCTOR NOTE — a ready-made, framework-free version of this demo lives in demos/lecture14_agent/. It builds the agent in THREE stages so the room sees why each piece matters: `python3 agent.py 1` (chatbot — can't see the data), `2` (adds memory — fluent but INVENTS QC numbers, a live hallucination), `3` (adds tools/ReAct — reads the file and answers with the real QC-04 numbers, hallucination gone). One small loop with two switches (memory, tools); tools and the LLM backend are in separate files. Runs OFFLINE with no API key as the guaranteed fallback, or against the real Claude API with `--claude`. Open agent.py on screen: an agent is just LLM + tools + a loop, no magic.</a:t>
             </a:r>
           </a:p>
           <a:p/>

--- a/slides/pptx/lecture14_agents.pptx
+++ b/slides/pptx/lecture14_agents.pptx
@@ -1654,7 +1654,7 @@
           <a:lstStyle/>
           <a:p>
             <a:r>
-              <a:t>The storyboard so the room knows what's coming and can map each step to the ReAct loop. Five beats: READ (open the CSV — an Action; the Thought before it: "I need the data first"), ANALYZE (run the limit checks and stats), PLOT (draw the spectra or QC trends), FLAG (mark the out-of-range run), and DRAFT (write a QC summary for a human to review). Narrate each as reason→act as the agent runs. Keep the room's hands in it: just before the FLAG beat, pause 30 seconds and have everyone PREDICT which run the agent will flag (they've already seen the QC-04 row on the follow-along handout), then run it and check the prediction — a quick hands-on beat inside the demo stretch. Emphasise two things the room should watch for: the agent shows its reasoning before each tool call (that's the ReAct transcript, live), and its final output is a DRAFT for review, never a released result — which sets up the guardrails stop. Restate the tooling plan: primary Claude Code, alternative Bedrock, fallback recording. Next slide, the flag→draft beat made concrete on the QC numbers. INSTRUCTOR NOTE — a ready-made, framework-free version of this demo lives in demos/lecture14_agent/. It builds the agent in THREE stages so the room sees why each piece matters: `python3 agent.py 1` (chatbot — can't see the data), `2` (adds memory — fluent but INVENTS QC numbers, a live hallucination), `3` (adds tools/ReAct — reads the file and answers with the real QC-04 numbers, hallucination gone). One small loop with two switches (memory, tools); tools and the LLM backend are in separate files. Runs OFFLINE with no API key as the guaranteed fallback, or against the real Claude API with `--claude`. Open agent.py on screen: an agent is just LLM + tools + a loop, no magic.</a:t>
+              <a:t>The storyboard so the room knows what's coming and can map each step to the ReAct loop. Five beats: READ (open the CSV — an Action; the Thought before it: "I need the data first"), ANALYZE (run the limit checks and stats), PLOT (draw the spectra or QC trends), FLAG (mark the out-of-range run), and DRAFT (write a QC summary for a human to review). Narrate each as reason→act as the agent runs. Keep the room's hands in it: just before the FLAG beat, pause 30 seconds and have everyone PREDICT which run the agent will flag (they've already seen the QC-04 row on the follow-along handout), then run it and check the prediction — a quick hands-on beat inside the demo stretch. Emphasise two things the room should watch for: the agent shows its reasoning before each tool call (that's the ReAct transcript, live), and its final output is a DRAFT for review, never a released result — which sets up the guardrails stop. Restate the tooling plan: primary Claude Code, alternative Bedrock, fallback recording. Next slide, the flag→draft beat made concrete on the QC numbers. INSTRUCTOR NOTE — a ready-made, framework-free version of this demo lives in demos/lecture14_agent/, built as THREE small scripts run in order so the room sees why each piece matters: `python3 stage1_chatbot.py` (bare LLM — forgets the run we just named), `stage2_memory.py` (adds a running history — now it remembers, but INVENTS a QC number and passes a run that actually fails), and `stage3_react.py` (adds tools/ReAct — reads the file and correctly flags QC-04 OUT OF SPEC). Each file adds exactly one idea; open them side by side and diff. Uses the real Claude API (ANTHROPIC_API_KEY); the shared call is in llm.py and the tools in tools.py. An agent is just LLM + memory + tools + a loop, no magic.</a:t>
             </a:r>
           </a:p>
           <a:p/>
@@ -8555,8 +8555,8 @@
         </p:blipFill>
         <p:spPr>
           <a:xfrm>
-            <a:off x="1706020" y="1828800"/>
-            <a:ext cx="8749480" cy="3099816"/>
+            <a:off x="1340381" y="1828800"/>
+            <a:ext cx="9480757" cy="3358897"/>
           </a:xfrm>
           <a:prstGeom prst="rect">
             <a:avLst/>
@@ -8571,8 +8571,8 @@
         </p:nvSpPr>
         <p:spPr>
           <a:xfrm>
-            <a:off x="548640" y="5020056"/>
-            <a:ext cx="10515600" cy="1700784"/>
+            <a:off x="548640" y="5279137"/>
+            <a:ext cx="10515600" cy="1441703"/>
           </a:xfrm>
           <a:prstGeom prst="rect">
             <a:avLst/>
@@ -8622,7 +8622,7 @@
                 </a:solidFill>
                 <a:latin typeface="Avenir Next"/>
               </a:rPr>
-              <a:t>The demo as five beats, each one reason→act: READ the QC/spectra CSV → ANALYZE (limits, stats) → PLOT the spectra/trends → FLAG the out-of-range run → DRAFT the QC summary for review. 💬 Before the FLAG beat, take 30 s: predict which run the agent will flag. Primary: instructor's Claude Code (or demos/lecture14_agent/agent.py, staged 1→2→3) · fallback: offline run — the demo never fails live.</a:t>
+              <a:t>The demo as five beats, each one reason→act: READ the QC/spectra CSV → ANALYZE (limits, stats) → PLOT the spectra/trends → FLAG the out-of-range run → DRAFT the QC summary for review. 💬 Before the FLAG beat, take 30 s: predict which run the agent will flag. Primary: instructor's Claude Code (or demos/lecture14_agent/, run stage1→stage2→stage3) · fallback: a saved transcript — the demo never fails live.</a:t>
             </a:r>
           </a:p>
         </p:txBody>

--- a/slides/pptx/lecture14_agents.pptx
+++ b/slides/pptx/lecture14_agents.pptx
@@ -2,7 +2,7 @@
 <file path=ppt/presentation.xml><?xml version="1.0" encoding="utf-8"?>
 <p:presentation xmlns:a="http://schemas.openxmlformats.org/drawingml/2006/main" xmlns:r="http://schemas.openxmlformats.org/officeDocument/2006/relationships" xmlns:p="http://schemas.openxmlformats.org/presentationml/2006/main" saveSubsetFonts="1" autoCompressPictures="0">
   <p:sldMasterIdLst>
-    <p:sldMasterId id="2147483648" r:id="rId1"/>
+    <p:sldMasterId id="2147483658" r:id="rId1"/>
   </p:sldMasterIdLst>
   <p:sldIdLst>
     <p:sldId id="256" r:id="rId7"/>
@@ -1680,7 +1680,7 @@
 </p:notes>
 </file>
 
-<file path=ppt/slideLayouts/slideLayout1.xml><?xml version="1.0" encoding="utf-8"?>
+<file path=ppt/slideLayouts/slideLayout18.xml><?xml version="1.0" encoding="utf-8"?>
 <p:sldLayout xmlns:a="http://schemas.openxmlformats.org/drawingml/2006/main" xmlns:r="http://schemas.openxmlformats.org/officeDocument/2006/relationships" xmlns:p="http://schemas.openxmlformats.org/presentationml/2006/main" type="title" preserve="1">
   <p:cSld name="Title Slide">
     <p:spTree>
@@ -1709,13 +1709,23 @@
         </p:nvSpPr>
         <p:spPr>
           <a:xfrm>
-            <a:off x="685800" y="2130425"/>
-            <a:ext cx="7772400" cy="1470025"/>
-          </a:xfrm>
-        </p:spPr>
-        <p:txBody>
-          <a:bodyPr/>
-          <a:lstStyle/>
+            <a:off x="548640" y="2286000"/>
+            <a:ext cx="11091672" cy="1371600"/>
+          </a:xfrm>
+        </p:spPr>
+        <p:txBody>
+          <a:bodyPr wrap="square" anchor="t"/>
+          <a:lstStyle>
+            <a:lvl1pPr marL="0" indent="0" algn="l">
+              <a:buNone/>
+              <a:defRPr sz="4400" b="1">
+                <a:solidFill>
+                  <a:schemeClr val="tx1"/>
+                </a:solidFill>
+                <a:latin typeface="+mn-lt"/>
+              </a:defRPr>
+            </a:lvl1pPr>
+          </a:lstStyle>
           <a:p>
             <a:r>
               <a:rPr lang="en-US" smtClean="0"/>
@@ -1737,176 +1747,96 @@
         </p:nvSpPr>
         <p:spPr>
           <a:xfrm>
-            <a:off x="1371600" y="3886200"/>
-            <a:ext cx="6400800" cy="1752600"/>
-          </a:xfrm>
-        </p:spPr>
-        <p:txBody>
-          <a:bodyPr/>
+            <a:off x="548640" y="3840480"/>
+            <a:ext cx="11091672" cy="914400"/>
+          </a:xfrm>
+        </p:spPr>
+        <p:txBody>
+          <a:bodyPr wrap="square" anchor="t"/>
           <a:lstStyle>
-            <a:lvl1pPr marL="0" indent="0" algn="ctr">
+            <a:lvl1pPr marL="0" indent="0" algn="l">
               <a:buNone/>
-              <a:defRPr>
-                <a:solidFill>
-                  <a:schemeClr val="tx1">
-                    <a:tint val="75000"/>
-                  </a:schemeClr>
-                </a:solidFill>
+              <a:defRPr sz="2200">
+                <a:solidFill>
+                  <a:schemeClr val="accent1"/>
+                </a:solidFill>
+                <a:latin typeface="+mn-lt"/>
               </a:defRPr>
             </a:lvl1pPr>
-            <a:lvl2pPr marL="457200" indent="0" algn="ctr">
-              <a:buNone/>
-              <a:defRPr>
-                <a:solidFill>
-                  <a:schemeClr val="tx1">
-                    <a:tint val="75000"/>
-                  </a:schemeClr>
-                </a:solidFill>
-              </a:defRPr>
-            </a:lvl2pPr>
-            <a:lvl3pPr marL="914400" indent="0" algn="ctr">
-              <a:buNone/>
-              <a:defRPr>
-                <a:solidFill>
-                  <a:schemeClr val="tx1">
-                    <a:tint val="75000"/>
-                  </a:schemeClr>
-                </a:solidFill>
-              </a:defRPr>
-            </a:lvl3pPr>
-            <a:lvl4pPr marL="1371600" indent="0" algn="ctr">
-              <a:buNone/>
-              <a:defRPr>
-                <a:solidFill>
-                  <a:schemeClr val="tx1">
-                    <a:tint val="75000"/>
-                  </a:schemeClr>
-                </a:solidFill>
-              </a:defRPr>
-            </a:lvl4pPr>
-            <a:lvl5pPr marL="1828800" indent="0" algn="ctr">
-              <a:buNone/>
-              <a:defRPr>
-                <a:solidFill>
-                  <a:schemeClr val="tx1">
-                    <a:tint val="75000"/>
-                  </a:schemeClr>
-                </a:solidFill>
-              </a:defRPr>
-            </a:lvl5pPr>
-            <a:lvl6pPr marL="2286000" indent="0" algn="ctr">
-              <a:buNone/>
-              <a:defRPr>
-                <a:solidFill>
-                  <a:schemeClr val="tx1">
-                    <a:tint val="75000"/>
-                  </a:schemeClr>
-                </a:solidFill>
-              </a:defRPr>
-            </a:lvl6pPr>
-            <a:lvl7pPr marL="2743200" indent="0" algn="ctr">
-              <a:buNone/>
-              <a:defRPr>
-                <a:solidFill>
-                  <a:schemeClr val="tx1">
-                    <a:tint val="75000"/>
-                  </a:schemeClr>
-                </a:solidFill>
-              </a:defRPr>
-            </a:lvl7pPr>
-            <a:lvl8pPr marL="3200400" indent="0" algn="ctr">
-              <a:buNone/>
-              <a:defRPr>
-                <a:solidFill>
-                  <a:schemeClr val="tx1">
-                    <a:tint val="75000"/>
-                  </a:schemeClr>
-                </a:solidFill>
-              </a:defRPr>
-            </a:lvl8pPr>
-            <a:lvl9pPr marL="3657600" indent="0" algn="ctr">
-              <a:buNone/>
-              <a:defRPr>
-                <a:solidFill>
-                  <a:schemeClr val="tx1">
-                    <a:tint val="75000"/>
-                  </a:schemeClr>
-                </a:solidFill>
-              </a:defRPr>
-            </a:lvl9pPr>
           </a:lstStyle>
           <a:p>
             <a:r>
-              <a:rPr lang="en-US" smtClean="0"/>
-              <a:t>Click to edit Master subtitle style</a:t>
-            </a:r>
-            <a:endParaRPr lang="en-US"/>
-          </a:p>
-        </p:txBody>
-      </p:sp>
-      <p:sp>
-        <p:nvSpPr>
-          <p:cNvPr id="4" name="Date Placeholder 3"/>
+              <a:rPr lang="en-US"/>
+              <a:t>Click to add a one-line subtitle</a:t>
+            </a:r>
+          </a:p>
+        </p:txBody>
+      </p:sp>
+      <p:sp>
+        <p:nvSpPr>
+          <p:cNvPr id="4" name="Eyebrow Placeholder"/>
           <p:cNvSpPr>
             <a:spLocks noGrp="1"/>
           </p:cNvSpPr>
           <p:nvPr>
-            <p:ph type="dt" sz="half" idx="10"/>
+            <p:ph type="body" sz="quarter" idx="13"/>
           </p:nvPr>
         </p:nvSpPr>
-        <p:spPr/>
+        <p:spPr>
+          <a:xfrm>
+            <a:off x="548640" y="320040"/>
+            <a:ext cx="11091672" cy="365760"/>
+          </a:xfrm>
+          <a:prstGeom prst="rect">
+            <a:avLst/>
+          </a:prstGeom>
+        </p:spPr>
+        <p:txBody>
+          <a:bodyPr wrap="square" anchor="t"/>
+          <a:lstStyle>
+            <a:lvl1pPr marL="0" indent="0">
+              <a:buNone/>
+              <a:defRPr sz="1300" b="1" cap="all">
+                <a:solidFill>
+                  <a:schemeClr val="accent4"/>
+                </a:solidFill>
+                <a:latin typeface="Menlo"/>
+              </a:defRPr>
+            </a:lvl1pPr>
+          </a:lstStyle>
+          <a:p>
+            <a:r>
+              <a:rPr lang="en-US"/>
+              <a:t>MSACL · DS301 Deep Learning · Segment n · Lecture n</a:t>
+            </a:r>
+          </a:p>
+        </p:txBody>
+      </p:sp>
+      <p:sp>
+        <p:nvSpPr>
+          <p:cNvPr id="5" name="Amber bar"/>
+          <p:cNvSpPr/>
+          <p:nvPr/>
+        </p:nvSpPr>
+        <p:spPr>
+          <a:xfrm>
+            <a:off x="548640" y="2057400"/>
+            <a:ext cx="1280160" cy="54864"/>
+          </a:xfrm>
+          <a:prstGeom prst="rect">
+            <a:avLst/>
+          </a:prstGeom>
+          <a:solidFill>
+            <a:schemeClr val="accent2"/>
+          </a:solidFill>
+          <a:ln>
+            <a:noFill/>
+          </a:ln>
+        </p:spPr>
         <p:txBody>
           <a:bodyPr/>
           <a:lstStyle/>
-          <a:p>
-            <a:fld id="{5BCAD085-E8A6-8845-BD4E-CB4CCA059FC4}" type="datetimeFigureOut">
-              <a:rPr lang="en-US" smtClean="0"/>
-              <a:t>1/27/13</a:t>
-            </a:fld>
-            <a:endParaRPr lang="en-US"/>
-          </a:p>
-        </p:txBody>
-      </p:sp>
-      <p:sp>
-        <p:nvSpPr>
-          <p:cNvPr id="5" name="Footer Placeholder 4"/>
-          <p:cNvSpPr>
-            <a:spLocks noGrp="1"/>
-          </p:cNvSpPr>
-          <p:nvPr>
-            <p:ph type="ftr" sz="quarter" idx="11"/>
-          </p:nvPr>
-        </p:nvSpPr>
-        <p:spPr/>
-        <p:txBody>
-          <a:bodyPr/>
-          <a:lstStyle/>
-          <a:p>
-            <a:endParaRPr lang="en-US"/>
-          </a:p>
-        </p:txBody>
-      </p:sp>
-      <p:sp>
-        <p:nvSpPr>
-          <p:cNvPr id="6" name="Slide Number Placeholder 5"/>
-          <p:cNvSpPr>
-            <a:spLocks noGrp="1"/>
-          </p:cNvSpPr>
-          <p:nvPr>
-            <p:ph type="sldNum" sz="quarter" idx="12"/>
-          </p:nvPr>
-        </p:nvSpPr>
-        <p:spPr/>
-        <p:txBody>
-          <a:bodyPr/>
-          <a:lstStyle/>
-          <a:p>
-            <a:fld id="{C1FF6DA9-008F-8B48-92A6-B652298478BF}" type="slidenum">
-              <a:rPr lang="en-US" smtClean="0"/>
-              <a:t>‹#›</a:t>
-            </a:fld>
-            <a:endParaRPr lang="en-US"/>
-          </a:p>
+          <a:p/>
         </p:txBody>
       </p:sp>
     </p:spTree>
@@ -1922,9 +1852,9 @@
 </p:sldLayout>
 </file>
 
-<file path=ppt/slideLayouts/slideLayout10.xml><?xml version="1.0" encoding="utf-8"?>
-<p:sldLayout xmlns:a="http://schemas.openxmlformats.org/drawingml/2006/main" xmlns:r="http://schemas.openxmlformats.org/officeDocument/2006/relationships" xmlns:p="http://schemas.openxmlformats.org/presentationml/2006/main" type="vertTx" preserve="1">
-  <p:cSld name="Title and Vertical Text">
+<file path=ppt/slideLayouts/slideLayout19.xml><?xml version="1.0" encoding="utf-8"?>
+<p:sldLayout xmlns:a="http://schemas.openxmlformats.org/drawingml/2006/main" xmlns:r="http://schemas.openxmlformats.org/officeDocument/2006/relationships" xmlns:p="http://schemas.openxmlformats.org/presentationml/2006/main" type="obj" preserve="1">
+  <p:cSld name="Title and Body">
     <p:spTree>
       <p:nvGrpSpPr>
         <p:cNvPr id="1" name=""/>
@@ -1949,9 +1879,14 @@
             <p:ph type="title"/>
           </p:nvPr>
         </p:nvSpPr>
-        <p:spPr/>
-        <p:txBody>
-          <a:bodyPr/>
+        <p:spPr>
+          <a:xfrm>
+            <a:off x="548640" y="731520"/>
+            <a:ext cx="11091672" cy="1005840"/>
+          </a:xfrm>
+        </p:spPr>
+        <p:txBody>
+          <a:bodyPr wrap="square" anchor="t"/>
           <a:lstStyle/>
           <a:p>
             <a:r>
@@ -1964,17 +1899,22 @@
       </p:sp>
       <p:sp>
         <p:nvSpPr>
-          <p:cNvPr id="3" name="Vertical Text Placeholder 2"/>
+          <p:cNvPr id="3" name="Content Placeholder 2"/>
           <p:cNvSpPr>
             <a:spLocks noGrp="1"/>
           </p:cNvSpPr>
           <p:nvPr>
-            <p:ph type="body" orient="vert" idx="1"/>
+            <p:ph idx="1"/>
           </p:nvPr>
         </p:nvSpPr>
-        <p:spPr/>
-        <p:txBody>
-          <a:bodyPr vert="eaVert"/>
+        <p:spPr>
+          <a:xfrm>
+            <a:off x="548640" y="1920240"/>
+            <a:ext cx="11091672" cy="4434840"/>
+          </a:xfrm>
+        </p:spPr>
+        <p:txBody>
+          <a:bodyPr wrap="square" anchor="t"/>
           <a:lstStyle/>
           <a:p>
             <a:pPr lvl="0"/>
@@ -2016,73 +1956,48 @@
       </p:sp>
       <p:sp>
         <p:nvSpPr>
-          <p:cNvPr id="4" name="Date Placeholder 3"/>
+          <p:cNvPr id="4" name="Eyebrow Placeholder"/>
           <p:cNvSpPr>
             <a:spLocks noGrp="1"/>
           </p:cNvSpPr>
           <p:nvPr>
-            <p:ph type="dt" sz="half" idx="10"/>
+            <p:ph type="body" sz="quarter" idx="13"/>
           </p:nvPr>
         </p:nvSpPr>
-        <p:spPr/>
-        <p:txBody>
-          <a:bodyPr/>
-          <a:lstStyle/>
-          <a:p>
-            <a:fld id="{5BCAD085-E8A6-8845-BD4E-CB4CCA059FC4}" type="datetimeFigureOut">
-              <a:rPr lang="en-US" smtClean="0"/>
-              <a:t>1/27/13</a:t>
-            </a:fld>
-            <a:endParaRPr lang="en-US"/>
-          </a:p>
-        </p:txBody>
-      </p:sp>
-      <p:sp>
-        <p:nvSpPr>
-          <p:cNvPr id="5" name="Footer Placeholder 4"/>
-          <p:cNvSpPr>
-            <a:spLocks noGrp="1"/>
-          </p:cNvSpPr>
-          <p:nvPr>
-            <p:ph type="ftr" sz="quarter" idx="11"/>
-          </p:nvPr>
-        </p:nvSpPr>
-        <p:spPr/>
-        <p:txBody>
-          <a:bodyPr/>
-          <a:lstStyle/>
-          <a:p>
-            <a:endParaRPr lang="en-US"/>
-          </a:p>
-        </p:txBody>
-      </p:sp>
-      <p:sp>
-        <p:nvSpPr>
-          <p:cNvPr id="6" name="Slide Number Placeholder 5"/>
-          <p:cNvSpPr>
-            <a:spLocks noGrp="1"/>
-          </p:cNvSpPr>
-          <p:nvPr>
-            <p:ph type="sldNum" sz="quarter" idx="12"/>
-          </p:nvPr>
-        </p:nvSpPr>
-        <p:spPr/>
-        <p:txBody>
-          <a:bodyPr/>
-          <a:lstStyle/>
-          <a:p>
-            <a:fld id="{C1FF6DA9-008F-8B48-92A6-B652298478BF}" type="slidenum">
-              <a:rPr lang="en-US" smtClean="0"/>
-              <a:t>‹#›</a:t>
-            </a:fld>
-            <a:endParaRPr lang="en-US"/>
+        <p:spPr>
+          <a:xfrm>
+            <a:off x="548640" y="320040"/>
+            <a:ext cx="11091672" cy="365760"/>
+          </a:xfrm>
+          <a:prstGeom prst="rect">
+            <a:avLst/>
+          </a:prstGeom>
+        </p:spPr>
+        <p:txBody>
+          <a:bodyPr wrap="square" anchor="t"/>
+          <a:lstStyle>
+            <a:lvl1pPr marL="0" indent="0">
+              <a:buNone/>
+              <a:defRPr sz="1300" b="1" cap="all">
+                <a:solidFill>
+                  <a:schemeClr val="accent4"/>
+                </a:solidFill>
+                <a:latin typeface="Menlo"/>
+              </a:defRPr>
+            </a:lvl1pPr>
+          </a:lstStyle>
+          <a:p>
+            <a:r>
+              <a:rPr lang="en-US"/>
+              <a:t>MSACL · DS301 Deep Learning · Segment n · Lecture n</a:t>
+            </a:r>
           </a:p>
         </p:txBody>
       </p:sp>
     </p:spTree>
     <p:extLst>
       <p:ext uri="{BB962C8B-B14F-4D97-AF65-F5344CB8AC3E}">
-        <p14:creationId xmlns:p14="http://schemas.microsoft.com/office/powerpoint/2010/main" val="2910927964"/>
+        <p14:creationId xmlns:p14="http://schemas.microsoft.com/office/powerpoint/2010/main" val="2614314258"/>
       </p:ext>
     </p:extLst>
   </p:cSld>
@@ -2092,9 +2007,9 @@
 </p:sldLayout>
 </file>
 
-<file path=ppt/slideLayouts/slideLayout11.xml><?xml version="1.0" encoding="utf-8"?>
-<p:sldLayout xmlns:a="http://schemas.openxmlformats.org/drawingml/2006/main" xmlns:r="http://schemas.openxmlformats.org/officeDocument/2006/relationships" xmlns:p="http://schemas.openxmlformats.org/presentationml/2006/main" type="vertTitleAndTx" preserve="1">
-  <p:cSld name="Vertical Title and Text">
+<file path=ppt/slideLayouts/slideLayout20.xml><?xml version="1.0" encoding="utf-8"?>
+<p:sldLayout xmlns:a="http://schemas.openxmlformats.org/drawingml/2006/main" xmlns:r="http://schemas.openxmlformats.org/officeDocument/2006/relationships" xmlns:p="http://schemas.openxmlformats.org/presentationml/2006/main" type="twoObj" preserve="1">
+  <p:cSld name="Two Column">
     <p:spTree>
       <p:nvGrpSpPr>
         <p:cNvPr id="1" name=""/>
@@ -2111,22 +2026,22 @@
       </p:grpSpPr>
       <p:sp>
         <p:nvSpPr>
-          <p:cNvPr id="2" name="Vertical Title 1"/>
+          <p:cNvPr id="2" name="Title 1"/>
           <p:cNvSpPr>
             <a:spLocks noGrp="1"/>
           </p:cNvSpPr>
           <p:nvPr>
-            <p:ph type="title" orient="vert"/>
+            <p:ph type="title"/>
           </p:nvPr>
         </p:nvSpPr>
         <p:spPr>
           <a:xfrm>
-            <a:off x="6629400" y="274638"/>
-            <a:ext cx="2057400" cy="5851525"/>
-          </a:xfrm>
-        </p:spPr>
-        <p:txBody>
-          <a:bodyPr vert="eaVert"/>
+            <a:off x="548640" y="731520"/>
+            <a:ext cx="11091672" cy="1005840"/>
+          </a:xfrm>
+        </p:spPr>
+        <p:txBody>
+          <a:bodyPr wrap="square" anchor="t"/>
           <a:lstStyle/>
           <a:p>
             <a:r>
@@ -2139,23 +2054,40 @@
       </p:sp>
       <p:sp>
         <p:nvSpPr>
-          <p:cNvPr id="3" name="Vertical Text Placeholder 2"/>
+          <p:cNvPr id="3" name="Content Placeholder 2"/>
           <p:cNvSpPr>
             <a:spLocks noGrp="1"/>
           </p:cNvSpPr>
           <p:nvPr>
-            <p:ph type="body" orient="vert" idx="1"/>
+            <p:ph sz="half" idx="1"/>
           </p:nvPr>
         </p:nvSpPr>
         <p:spPr>
           <a:xfrm>
-            <a:off x="457200" y="274638"/>
-            <a:ext cx="6019800" cy="5851525"/>
-          </a:xfrm>
-        </p:spPr>
-        <p:txBody>
-          <a:bodyPr vert="eaVert"/>
-          <a:lstStyle/>
+            <a:off x="548640" y="1920240"/>
+            <a:ext cx="5367528" cy="4434840"/>
+          </a:xfrm>
+        </p:spPr>
+        <p:txBody>
+          <a:bodyPr wrap="square" anchor="t"/>
+          <a:lstStyle>
+            <a:lvl1pPr marL="274638" indent="-274638">
+              <a:spcAft>
+                <a:spcPts val="1400"/>
+              </a:spcAft>
+              <a:buClr>
+                <a:schemeClr val="accent1"/>
+              </a:buClr>
+              <a:buFont typeface="Arial"/>
+              <a:buChar char="•"/>
+              <a:defRPr sz="2200">
+                <a:solidFill>
+                  <a:schemeClr val="tx1"/>
+                </a:solidFill>
+                <a:latin typeface="+mn-lt"/>
+              </a:defRPr>
+            </a:lvl1pPr>
+          </a:lstStyle>
           <a:p>
             <a:pPr lvl="0"/>
             <a:r>
@@ -2196,73 +2128,122 @@
       </p:sp>
       <p:sp>
         <p:nvSpPr>
-          <p:cNvPr id="4" name="Date Placeholder 3"/>
+          <p:cNvPr id="4" name="Content Placeholder 3"/>
           <p:cNvSpPr>
             <a:spLocks noGrp="1"/>
           </p:cNvSpPr>
           <p:nvPr>
-            <p:ph type="dt" sz="half" idx="10"/>
+            <p:ph sz="half" idx="2"/>
           </p:nvPr>
         </p:nvSpPr>
-        <p:spPr/>
-        <p:txBody>
-          <a:bodyPr/>
-          <a:lstStyle/>
-          <a:p>
-            <a:fld id="{5BCAD085-E8A6-8845-BD4E-CB4CCA059FC4}" type="datetimeFigureOut">
+        <p:spPr>
+          <a:xfrm>
+            <a:off x="6281928" y="1920240"/>
+            <a:ext cx="5367528" cy="4434840"/>
+          </a:xfrm>
+        </p:spPr>
+        <p:txBody>
+          <a:bodyPr wrap="square" anchor="t"/>
+          <a:lstStyle>
+            <a:lvl1pPr marL="274638" indent="-274638">
+              <a:spcAft>
+                <a:spcPts val="1400"/>
+              </a:spcAft>
+              <a:buClr>
+                <a:schemeClr val="accent1"/>
+              </a:buClr>
+              <a:buFont typeface="Arial"/>
+              <a:buChar char="•"/>
+              <a:defRPr sz="2200">
+                <a:solidFill>
+                  <a:schemeClr val="tx1"/>
+                </a:solidFill>
+                <a:latin typeface="+mn-lt"/>
+              </a:defRPr>
+            </a:lvl1pPr>
+          </a:lstStyle>
+          <a:p>
+            <a:pPr lvl="0"/>
+            <a:r>
               <a:rPr lang="en-US" smtClean="0"/>
-              <a:t>1/27/13</a:t>
-            </a:fld>
+              <a:t>Click to edit Master text styles</a:t>
+            </a:r>
+          </a:p>
+          <a:p>
+            <a:pPr lvl="1"/>
+            <a:r>
+              <a:rPr lang="en-US" smtClean="0"/>
+              <a:t>Second level</a:t>
+            </a:r>
+          </a:p>
+          <a:p>
+            <a:pPr lvl="2"/>
+            <a:r>
+              <a:rPr lang="en-US" smtClean="0"/>
+              <a:t>Third level</a:t>
+            </a:r>
+          </a:p>
+          <a:p>
+            <a:pPr lvl="3"/>
+            <a:r>
+              <a:rPr lang="en-US" smtClean="0"/>
+              <a:t>Fourth level</a:t>
+            </a:r>
+          </a:p>
+          <a:p>
+            <a:pPr lvl="4"/>
+            <a:r>
+              <a:rPr lang="en-US" smtClean="0"/>
+              <a:t>Fifth level</a:t>
+            </a:r>
             <a:endParaRPr lang="en-US"/>
           </a:p>
         </p:txBody>
       </p:sp>
       <p:sp>
         <p:nvSpPr>
-          <p:cNvPr id="5" name="Footer Placeholder 4"/>
+          <p:cNvPr id="5" name="Eyebrow Placeholder"/>
           <p:cNvSpPr>
             <a:spLocks noGrp="1"/>
           </p:cNvSpPr>
           <p:nvPr>
-            <p:ph type="ftr" sz="quarter" idx="11"/>
+            <p:ph type="body" sz="quarter" idx="13"/>
           </p:nvPr>
         </p:nvSpPr>
-        <p:spPr/>
-        <p:txBody>
-          <a:bodyPr/>
-          <a:lstStyle/>
-          <a:p>
-            <a:endParaRPr lang="en-US"/>
-          </a:p>
-        </p:txBody>
-      </p:sp>
-      <p:sp>
-        <p:nvSpPr>
-          <p:cNvPr id="6" name="Slide Number Placeholder 5"/>
-          <p:cNvSpPr>
-            <a:spLocks noGrp="1"/>
-          </p:cNvSpPr>
-          <p:nvPr>
-            <p:ph type="sldNum" sz="quarter" idx="12"/>
-          </p:nvPr>
-        </p:nvSpPr>
-        <p:spPr/>
-        <p:txBody>
-          <a:bodyPr/>
-          <a:lstStyle/>
-          <a:p>
-            <a:fld id="{C1FF6DA9-008F-8B48-92A6-B652298478BF}" type="slidenum">
-              <a:rPr lang="en-US" smtClean="0"/>
-              <a:t>‹#›</a:t>
-            </a:fld>
-            <a:endParaRPr lang="en-US"/>
+        <p:spPr>
+          <a:xfrm>
+            <a:off x="548640" y="320040"/>
+            <a:ext cx="11091672" cy="365760"/>
+          </a:xfrm>
+          <a:prstGeom prst="rect">
+            <a:avLst/>
+          </a:prstGeom>
+        </p:spPr>
+        <p:txBody>
+          <a:bodyPr wrap="square" anchor="t"/>
+          <a:lstStyle>
+            <a:lvl1pPr marL="0" indent="0">
+              <a:buNone/>
+              <a:defRPr sz="1300" b="1" cap="all">
+                <a:solidFill>
+                  <a:schemeClr val="accent4"/>
+                </a:solidFill>
+                <a:latin typeface="Menlo"/>
+              </a:defRPr>
+            </a:lvl1pPr>
+          </a:lstStyle>
+          <a:p>
+            <a:r>
+              <a:rPr lang="en-US"/>
+              <a:t>MSACL · DS301 Deep Learning · Segment n · Lecture n</a:t>
+            </a:r>
           </a:p>
         </p:txBody>
       </p:sp>
     </p:spTree>
     <p:extLst>
       <p:ext uri="{BB962C8B-B14F-4D97-AF65-F5344CB8AC3E}">
-        <p14:creationId xmlns:p14="http://schemas.microsoft.com/office/powerpoint/2010/main" val="3612223792"/>
+        <p14:creationId xmlns:p14="http://schemas.microsoft.com/office/powerpoint/2010/main" val="2782244947"/>
       </p:ext>
     </p:extLst>
   </p:cSld>
@@ -2272,9 +2253,9 @@
 </p:sldLayout>
 </file>
 
-<file path=ppt/slideLayouts/slideLayout2.xml><?xml version="1.0" encoding="utf-8"?>
-<p:sldLayout xmlns:a="http://schemas.openxmlformats.org/drawingml/2006/main" xmlns:r="http://schemas.openxmlformats.org/officeDocument/2006/relationships" xmlns:p="http://schemas.openxmlformats.org/presentationml/2006/main" type="obj" preserve="1">
-  <p:cSld name="Title and Content">
+<file path=ppt/slideLayouts/slideLayout21.xml><?xml version="1.0" encoding="utf-8"?>
+<p:sldLayout xmlns:a="http://schemas.openxmlformats.org/drawingml/2006/main" xmlns:r="http://schemas.openxmlformats.org/officeDocument/2006/relationships" xmlns:p="http://schemas.openxmlformats.org/presentationml/2006/main" type="picTx" preserve="1">
+  <p:cSld name="Screenshot + Caption">
     <p:spTree>
       <p:nvGrpSpPr>
         <p:cNvPr id="1" name=""/>
@@ -2299,1630 +2280,14 @@
             <p:ph type="title"/>
           </p:nvPr>
         </p:nvSpPr>
-        <p:spPr/>
-        <p:txBody>
-          <a:bodyPr/>
-          <a:lstStyle/>
-          <a:p>
-            <a:r>
-              <a:rPr lang="en-US" smtClean="0"/>
-              <a:t>Click to edit Master title style</a:t>
-            </a:r>
-            <a:endParaRPr lang="en-US"/>
-          </a:p>
-        </p:txBody>
-      </p:sp>
-      <p:sp>
-        <p:nvSpPr>
-          <p:cNvPr id="3" name="Content Placeholder 2"/>
-          <p:cNvSpPr>
-            <a:spLocks noGrp="1"/>
-          </p:cNvSpPr>
-          <p:nvPr>
-            <p:ph idx="1"/>
-          </p:nvPr>
-        </p:nvSpPr>
-        <p:spPr/>
-        <p:txBody>
-          <a:bodyPr/>
-          <a:lstStyle/>
-          <a:p>
-            <a:pPr lvl="0"/>
-            <a:r>
-              <a:rPr lang="en-US" smtClean="0"/>
-              <a:t>Click to edit Master text styles</a:t>
-            </a:r>
-          </a:p>
-          <a:p>
-            <a:pPr lvl="1"/>
-            <a:r>
-              <a:rPr lang="en-US" smtClean="0"/>
-              <a:t>Second level</a:t>
-            </a:r>
-          </a:p>
-          <a:p>
-            <a:pPr lvl="2"/>
-            <a:r>
-              <a:rPr lang="en-US" smtClean="0"/>
-              <a:t>Third level</a:t>
-            </a:r>
-          </a:p>
-          <a:p>
-            <a:pPr lvl="3"/>
-            <a:r>
-              <a:rPr lang="en-US" smtClean="0"/>
-              <a:t>Fourth level</a:t>
-            </a:r>
-          </a:p>
-          <a:p>
-            <a:pPr lvl="4"/>
-            <a:r>
-              <a:rPr lang="en-US" smtClean="0"/>
-              <a:t>Fifth level</a:t>
-            </a:r>
-            <a:endParaRPr lang="en-US"/>
-          </a:p>
-        </p:txBody>
-      </p:sp>
-      <p:sp>
-        <p:nvSpPr>
-          <p:cNvPr id="4" name="Date Placeholder 3"/>
-          <p:cNvSpPr>
-            <a:spLocks noGrp="1"/>
-          </p:cNvSpPr>
-          <p:nvPr>
-            <p:ph type="dt" sz="half" idx="10"/>
-          </p:nvPr>
-        </p:nvSpPr>
-        <p:spPr/>
-        <p:txBody>
-          <a:bodyPr/>
-          <a:lstStyle/>
-          <a:p>
-            <a:fld id="{5BCAD085-E8A6-8845-BD4E-CB4CCA059FC4}" type="datetimeFigureOut">
-              <a:rPr lang="en-US" smtClean="0"/>
-              <a:t>1/27/13</a:t>
-            </a:fld>
-            <a:endParaRPr lang="en-US"/>
-          </a:p>
-        </p:txBody>
-      </p:sp>
-      <p:sp>
-        <p:nvSpPr>
-          <p:cNvPr id="5" name="Footer Placeholder 4"/>
-          <p:cNvSpPr>
-            <a:spLocks noGrp="1"/>
-          </p:cNvSpPr>
-          <p:nvPr>
-            <p:ph type="ftr" sz="quarter" idx="11"/>
-          </p:nvPr>
-        </p:nvSpPr>
-        <p:spPr/>
-        <p:txBody>
-          <a:bodyPr/>
-          <a:lstStyle/>
-          <a:p>
-            <a:endParaRPr lang="en-US"/>
-          </a:p>
-        </p:txBody>
-      </p:sp>
-      <p:sp>
-        <p:nvSpPr>
-          <p:cNvPr id="6" name="Slide Number Placeholder 5"/>
-          <p:cNvSpPr>
-            <a:spLocks noGrp="1"/>
-          </p:cNvSpPr>
-          <p:nvPr>
-            <p:ph type="sldNum" sz="quarter" idx="12"/>
-          </p:nvPr>
-        </p:nvSpPr>
-        <p:spPr/>
-        <p:txBody>
-          <a:bodyPr/>
-          <a:lstStyle/>
-          <a:p>
-            <a:fld id="{C1FF6DA9-008F-8B48-92A6-B652298478BF}" type="slidenum">
-              <a:rPr lang="en-US" smtClean="0"/>
-              <a:t>‹#›</a:t>
-            </a:fld>
-            <a:endParaRPr lang="en-US"/>
-          </a:p>
-        </p:txBody>
-      </p:sp>
-    </p:spTree>
-    <p:extLst>
-      <p:ext uri="{BB962C8B-B14F-4D97-AF65-F5344CB8AC3E}">
-        <p14:creationId xmlns:p14="http://schemas.microsoft.com/office/powerpoint/2010/main" val="2614314258"/>
-      </p:ext>
-    </p:extLst>
-  </p:cSld>
-  <p:clrMapOvr>
-    <a:masterClrMapping/>
-  </p:clrMapOvr>
-</p:sldLayout>
-</file>
-
-<file path=ppt/slideLayouts/slideLayout3.xml><?xml version="1.0" encoding="utf-8"?>
-<p:sldLayout xmlns:a="http://schemas.openxmlformats.org/drawingml/2006/main" xmlns:r="http://schemas.openxmlformats.org/officeDocument/2006/relationships" xmlns:p="http://schemas.openxmlformats.org/presentationml/2006/main" type="secHead" preserve="1">
-  <p:cSld name="Section Header">
-    <p:spTree>
-      <p:nvGrpSpPr>
-        <p:cNvPr id="1" name=""/>
-        <p:cNvGrpSpPr/>
-        <p:nvPr/>
-      </p:nvGrpSpPr>
-      <p:grpSpPr>
-        <a:xfrm>
-          <a:off x="0" y="0"/>
-          <a:ext cx="0" cy="0"/>
-          <a:chOff x="0" y="0"/>
-          <a:chExt cx="0" cy="0"/>
-        </a:xfrm>
-      </p:grpSpPr>
-      <p:sp>
-        <p:nvSpPr>
-          <p:cNvPr id="2" name="Title 1"/>
-          <p:cNvSpPr>
-            <a:spLocks noGrp="1"/>
-          </p:cNvSpPr>
-          <p:nvPr>
-            <p:ph type="title"/>
-          </p:nvPr>
-        </p:nvSpPr>
-        <p:spPr>
-          <a:xfrm>
-            <a:off x="722313" y="4406900"/>
-            <a:ext cx="7772400" cy="1362075"/>
-          </a:xfrm>
-        </p:spPr>
-        <p:txBody>
-          <a:bodyPr anchor="t"/>
-          <a:lstStyle>
-            <a:lvl1pPr algn="l">
-              <a:defRPr sz="4000" b="1" cap="all"/>
-            </a:lvl1pPr>
-          </a:lstStyle>
-          <a:p>
-            <a:r>
-              <a:rPr lang="en-US" smtClean="0"/>
-              <a:t>Click to edit Master title style</a:t>
-            </a:r>
-            <a:endParaRPr lang="en-US"/>
-          </a:p>
-        </p:txBody>
-      </p:sp>
-      <p:sp>
-        <p:nvSpPr>
-          <p:cNvPr id="3" name="Text Placeholder 2"/>
-          <p:cNvSpPr>
-            <a:spLocks noGrp="1"/>
-          </p:cNvSpPr>
-          <p:nvPr>
-            <p:ph type="body" idx="1"/>
-          </p:nvPr>
-        </p:nvSpPr>
-        <p:spPr>
-          <a:xfrm>
-            <a:off x="722313" y="2906713"/>
-            <a:ext cx="7772400" cy="1500187"/>
-          </a:xfrm>
-        </p:spPr>
-        <p:txBody>
-          <a:bodyPr anchor="b"/>
-          <a:lstStyle>
-            <a:lvl1pPr marL="0" indent="0">
-              <a:buNone/>
-              <a:defRPr sz="2000">
-                <a:solidFill>
-                  <a:schemeClr val="tx1">
-                    <a:tint val="75000"/>
-                  </a:schemeClr>
-                </a:solidFill>
-              </a:defRPr>
-            </a:lvl1pPr>
-            <a:lvl2pPr marL="457200" indent="0">
-              <a:buNone/>
-              <a:defRPr sz="1800">
-                <a:solidFill>
-                  <a:schemeClr val="tx1">
-                    <a:tint val="75000"/>
-                  </a:schemeClr>
-                </a:solidFill>
-              </a:defRPr>
-            </a:lvl2pPr>
-            <a:lvl3pPr marL="914400" indent="0">
-              <a:buNone/>
-              <a:defRPr sz="1600">
-                <a:solidFill>
-                  <a:schemeClr val="tx1">
-                    <a:tint val="75000"/>
-                  </a:schemeClr>
-                </a:solidFill>
-              </a:defRPr>
-            </a:lvl3pPr>
-            <a:lvl4pPr marL="1371600" indent="0">
-              <a:buNone/>
-              <a:defRPr sz="1400">
-                <a:solidFill>
-                  <a:schemeClr val="tx1">
-                    <a:tint val="75000"/>
-                  </a:schemeClr>
-                </a:solidFill>
-              </a:defRPr>
-            </a:lvl4pPr>
-            <a:lvl5pPr marL="1828800" indent="0">
-              <a:buNone/>
-              <a:defRPr sz="1400">
-                <a:solidFill>
-                  <a:schemeClr val="tx1">
-                    <a:tint val="75000"/>
-                  </a:schemeClr>
-                </a:solidFill>
-              </a:defRPr>
-            </a:lvl5pPr>
-            <a:lvl6pPr marL="2286000" indent="0">
-              <a:buNone/>
-              <a:defRPr sz="1400">
-                <a:solidFill>
-                  <a:schemeClr val="tx1">
-                    <a:tint val="75000"/>
-                  </a:schemeClr>
-                </a:solidFill>
-              </a:defRPr>
-            </a:lvl6pPr>
-            <a:lvl7pPr marL="2743200" indent="0">
-              <a:buNone/>
-              <a:defRPr sz="1400">
-                <a:solidFill>
-                  <a:schemeClr val="tx1">
-                    <a:tint val="75000"/>
-                  </a:schemeClr>
-                </a:solidFill>
-              </a:defRPr>
-            </a:lvl7pPr>
-            <a:lvl8pPr marL="3200400" indent="0">
-              <a:buNone/>
-              <a:defRPr sz="1400">
-                <a:solidFill>
-                  <a:schemeClr val="tx1">
-                    <a:tint val="75000"/>
-                  </a:schemeClr>
-                </a:solidFill>
-              </a:defRPr>
-            </a:lvl8pPr>
-            <a:lvl9pPr marL="3657600" indent="0">
-              <a:buNone/>
-              <a:defRPr sz="1400">
-                <a:solidFill>
-                  <a:schemeClr val="tx1">
-                    <a:tint val="75000"/>
-                  </a:schemeClr>
-                </a:solidFill>
-              </a:defRPr>
-            </a:lvl9pPr>
-          </a:lstStyle>
-          <a:p>
-            <a:pPr lvl="0"/>
-            <a:r>
-              <a:rPr lang="en-US" smtClean="0"/>
-              <a:t>Click to edit Master text styles</a:t>
-            </a:r>
-          </a:p>
-        </p:txBody>
-      </p:sp>
-      <p:sp>
-        <p:nvSpPr>
-          <p:cNvPr id="4" name="Date Placeholder 3"/>
-          <p:cNvSpPr>
-            <a:spLocks noGrp="1"/>
-          </p:cNvSpPr>
-          <p:nvPr>
-            <p:ph type="dt" sz="half" idx="10"/>
-          </p:nvPr>
-        </p:nvSpPr>
-        <p:spPr/>
-        <p:txBody>
-          <a:bodyPr/>
-          <a:lstStyle/>
-          <a:p>
-            <a:fld id="{5BCAD085-E8A6-8845-BD4E-CB4CCA059FC4}" type="datetimeFigureOut">
-              <a:rPr lang="en-US" smtClean="0"/>
-              <a:t>1/27/13</a:t>
-            </a:fld>
-            <a:endParaRPr lang="en-US"/>
-          </a:p>
-        </p:txBody>
-      </p:sp>
-      <p:sp>
-        <p:nvSpPr>
-          <p:cNvPr id="5" name="Footer Placeholder 4"/>
-          <p:cNvSpPr>
-            <a:spLocks noGrp="1"/>
-          </p:cNvSpPr>
-          <p:nvPr>
-            <p:ph type="ftr" sz="quarter" idx="11"/>
-          </p:nvPr>
-        </p:nvSpPr>
-        <p:spPr/>
-        <p:txBody>
-          <a:bodyPr/>
-          <a:lstStyle/>
-          <a:p>
-            <a:endParaRPr lang="en-US"/>
-          </a:p>
-        </p:txBody>
-      </p:sp>
-      <p:sp>
-        <p:nvSpPr>
-          <p:cNvPr id="6" name="Slide Number Placeholder 5"/>
-          <p:cNvSpPr>
-            <a:spLocks noGrp="1"/>
-          </p:cNvSpPr>
-          <p:nvPr>
-            <p:ph type="sldNum" sz="quarter" idx="12"/>
-          </p:nvPr>
-        </p:nvSpPr>
-        <p:spPr/>
-        <p:txBody>
-          <a:bodyPr/>
-          <a:lstStyle/>
-          <a:p>
-            <a:fld id="{C1FF6DA9-008F-8B48-92A6-B652298478BF}" type="slidenum">
-              <a:rPr lang="en-US" smtClean="0"/>
-              <a:t>‹#›</a:t>
-            </a:fld>
-            <a:endParaRPr lang="en-US"/>
-          </a:p>
-        </p:txBody>
-      </p:sp>
-    </p:spTree>
-    <p:extLst>
-      <p:ext uri="{BB962C8B-B14F-4D97-AF65-F5344CB8AC3E}">
-        <p14:creationId xmlns:p14="http://schemas.microsoft.com/office/powerpoint/2010/main" val="960648375"/>
-      </p:ext>
-    </p:extLst>
-  </p:cSld>
-  <p:clrMapOvr>
-    <a:masterClrMapping/>
-  </p:clrMapOvr>
-</p:sldLayout>
-</file>
-
-<file path=ppt/slideLayouts/slideLayout4.xml><?xml version="1.0" encoding="utf-8"?>
-<p:sldLayout xmlns:a="http://schemas.openxmlformats.org/drawingml/2006/main" xmlns:r="http://schemas.openxmlformats.org/officeDocument/2006/relationships" xmlns:p="http://schemas.openxmlformats.org/presentationml/2006/main" type="twoObj" preserve="1">
-  <p:cSld name="Two Content">
-    <p:spTree>
-      <p:nvGrpSpPr>
-        <p:cNvPr id="1" name=""/>
-        <p:cNvGrpSpPr/>
-        <p:nvPr/>
-      </p:nvGrpSpPr>
-      <p:grpSpPr>
-        <a:xfrm>
-          <a:off x="0" y="0"/>
-          <a:ext cx="0" cy="0"/>
-          <a:chOff x="0" y="0"/>
-          <a:chExt cx="0" cy="0"/>
-        </a:xfrm>
-      </p:grpSpPr>
-      <p:sp>
-        <p:nvSpPr>
-          <p:cNvPr id="2" name="Title 1"/>
-          <p:cNvSpPr>
-            <a:spLocks noGrp="1"/>
-          </p:cNvSpPr>
-          <p:nvPr>
-            <p:ph type="title"/>
-          </p:nvPr>
-        </p:nvSpPr>
-        <p:spPr/>
-        <p:txBody>
-          <a:bodyPr/>
-          <a:lstStyle/>
-          <a:p>
-            <a:r>
-              <a:rPr lang="en-US" smtClean="0"/>
-              <a:t>Click to edit Master title style</a:t>
-            </a:r>
-            <a:endParaRPr lang="en-US"/>
-          </a:p>
-        </p:txBody>
-      </p:sp>
-      <p:sp>
-        <p:nvSpPr>
-          <p:cNvPr id="3" name="Content Placeholder 2"/>
-          <p:cNvSpPr>
-            <a:spLocks noGrp="1"/>
-          </p:cNvSpPr>
-          <p:nvPr>
-            <p:ph sz="half" idx="1"/>
-          </p:nvPr>
-        </p:nvSpPr>
-        <p:spPr>
-          <a:xfrm>
-            <a:off x="457200" y="1600200"/>
-            <a:ext cx="4038600" cy="4525963"/>
-          </a:xfrm>
-        </p:spPr>
-        <p:txBody>
-          <a:bodyPr/>
-          <a:lstStyle>
-            <a:lvl1pPr>
-              <a:defRPr sz="2800"/>
-            </a:lvl1pPr>
-            <a:lvl2pPr>
-              <a:defRPr sz="2400"/>
-            </a:lvl2pPr>
-            <a:lvl3pPr>
-              <a:defRPr sz="2000"/>
-            </a:lvl3pPr>
-            <a:lvl4pPr>
-              <a:defRPr sz="1800"/>
-            </a:lvl4pPr>
-            <a:lvl5pPr>
-              <a:defRPr sz="1800"/>
-            </a:lvl5pPr>
-            <a:lvl6pPr>
-              <a:defRPr sz="1800"/>
-            </a:lvl6pPr>
-            <a:lvl7pPr>
-              <a:defRPr sz="1800"/>
-            </a:lvl7pPr>
-            <a:lvl8pPr>
-              <a:defRPr sz="1800"/>
-            </a:lvl8pPr>
-            <a:lvl9pPr>
-              <a:defRPr sz="1800"/>
-            </a:lvl9pPr>
-          </a:lstStyle>
-          <a:p>
-            <a:pPr lvl="0"/>
-            <a:r>
-              <a:rPr lang="en-US" smtClean="0"/>
-              <a:t>Click to edit Master text styles</a:t>
-            </a:r>
-          </a:p>
-          <a:p>
-            <a:pPr lvl="1"/>
-            <a:r>
-              <a:rPr lang="en-US" smtClean="0"/>
-              <a:t>Second level</a:t>
-            </a:r>
-          </a:p>
-          <a:p>
-            <a:pPr lvl="2"/>
-            <a:r>
-              <a:rPr lang="en-US" smtClean="0"/>
-              <a:t>Third level</a:t>
-            </a:r>
-          </a:p>
-          <a:p>
-            <a:pPr lvl="3"/>
-            <a:r>
-              <a:rPr lang="en-US" smtClean="0"/>
-              <a:t>Fourth level</a:t>
-            </a:r>
-          </a:p>
-          <a:p>
-            <a:pPr lvl="4"/>
-            <a:r>
-              <a:rPr lang="en-US" smtClean="0"/>
-              <a:t>Fifth level</a:t>
-            </a:r>
-            <a:endParaRPr lang="en-US"/>
-          </a:p>
-        </p:txBody>
-      </p:sp>
-      <p:sp>
-        <p:nvSpPr>
-          <p:cNvPr id="4" name="Content Placeholder 3"/>
-          <p:cNvSpPr>
-            <a:spLocks noGrp="1"/>
-          </p:cNvSpPr>
-          <p:nvPr>
-            <p:ph sz="half" idx="2"/>
-          </p:nvPr>
-        </p:nvSpPr>
-        <p:spPr>
-          <a:xfrm>
-            <a:off x="4648200" y="1600200"/>
-            <a:ext cx="4038600" cy="4525963"/>
-          </a:xfrm>
-        </p:spPr>
-        <p:txBody>
-          <a:bodyPr/>
-          <a:lstStyle>
-            <a:lvl1pPr>
-              <a:defRPr sz="2800"/>
-            </a:lvl1pPr>
-            <a:lvl2pPr>
-              <a:defRPr sz="2400"/>
-            </a:lvl2pPr>
-            <a:lvl3pPr>
-              <a:defRPr sz="2000"/>
-            </a:lvl3pPr>
-            <a:lvl4pPr>
-              <a:defRPr sz="1800"/>
-            </a:lvl4pPr>
-            <a:lvl5pPr>
-              <a:defRPr sz="1800"/>
-            </a:lvl5pPr>
-            <a:lvl6pPr>
-              <a:defRPr sz="1800"/>
-            </a:lvl6pPr>
-            <a:lvl7pPr>
-              <a:defRPr sz="1800"/>
-            </a:lvl7pPr>
-            <a:lvl8pPr>
-              <a:defRPr sz="1800"/>
-            </a:lvl8pPr>
-            <a:lvl9pPr>
-              <a:defRPr sz="1800"/>
-            </a:lvl9pPr>
-          </a:lstStyle>
-          <a:p>
-            <a:pPr lvl="0"/>
-            <a:r>
-              <a:rPr lang="en-US" smtClean="0"/>
-              <a:t>Click to edit Master text styles</a:t>
-            </a:r>
-          </a:p>
-          <a:p>
-            <a:pPr lvl="1"/>
-            <a:r>
-              <a:rPr lang="en-US" smtClean="0"/>
-              <a:t>Second level</a:t>
-            </a:r>
-          </a:p>
-          <a:p>
-            <a:pPr lvl="2"/>
-            <a:r>
-              <a:rPr lang="en-US" smtClean="0"/>
-              <a:t>Third level</a:t>
-            </a:r>
-          </a:p>
-          <a:p>
-            <a:pPr lvl="3"/>
-            <a:r>
-              <a:rPr lang="en-US" smtClean="0"/>
-              <a:t>Fourth level</a:t>
-            </a:r>
-          </a:p>
-          <a:p>
-            <a:pPr lvl="4"/>
-            <a:r>
-              <a:rPr lang="en-US" smtClean="0"/>
-              <a:t>Fifth level</a:t>
-            </a:r>
-            <a:endParaRPr lang="en-US"/>
-          </a:p>
-        </p:txBody>
-      </p:sp>
-      <p:sp>
-        <p:nvSpPr>
-          <p:cNvPr id="5" name="Date Placeholder 4"/>
-          <p:cNvSpPr>
-            <a:spLocks noGrp="1"/>
-          </p:cNvSpPr>
-          <p:nvPr>
-            <p:ph type="dt" sz="half" idx="10"/>
-          </p:nvPr>
-        </p:nvSpPr>
-        <p:spPr/>
-        <p:txBody>
-          <a:bodyPr/>
-          <a:lstStyle/>
-          <a:p>
-            <a:fld id="{5BCAD085-E8A6-8845-BD4E-CB4CCA059FC4}" type="datetimeFigureOut">
-              <a:rPr lang="en-US" smtClean="0"/>
-              <a:t>1/27/13</a:t>
-            </a:fld>
-            <a:endParaRPr lang="en-US"/>
-          </a:p>
-        </p:txBody>
-      </p:sp>
-      <p:sp>
-        <p:nvSpPr>
-          <p:cNvPr id="6" name="Footer Placeholder 5"/>
-          <p:cNvSpPr>
-            <a:spLocks noGrp="1"/>
-          </p:cNvSpPr>
-          <p:nvPr>
-            <p:ph type="ftr" sz="quarter" idx="11"/>
-          </p:nvPr>
-        </p:nvSpPr>
-        <p:spPr/>
-        <p:txBody>
-          <a:bodyPr/>
-          <a:lstStyle/>
-          <a:p>
-            <a:endParaRPr lang="en-US"/>
-          </a:p>
-        </p:txBody>
-      </p:sp>
-      <p:sp>
-        <p:nvSpPr>
-          <p:cNvPr id="7" name="Slide Number Placeholder 6"/>
-          <p:cNvSpPr>
-            <a:spLocks noGrp="1"/>
-          </p:cNvSpPr>
-          <p:nvPr>
-            <p:ph type="sldNum" sz="quarter" idx="12"/>
-          </p:nvPr>
-        </p:nvSpPr>
-        <p:spPr/>
-        <p:txBody>
-          <a:bodyPr/>
-          <a:lstStyle/>
-          <a:p>
-            <a:fld id="{C1FF6DA9-008F-8B48-92A6-B652298478BF}" type="slidenum">
-              <a:rPr lang="en-US" smtClean="0"/>
-              <a:t>‹#›</a:t>
-            </a:fld>
-            <a:endParaRPr lang="en-US"/>
-          </a:p>
-        </p:txBody>
-      </p:sp>
-    </p:spTree>
-    <p:extLst>
-      <p:ext uri="{BB962C8B-B14F-4D97-AF65-F5344CB8AC3E}">
-        <p14:creationId xmlns:p14="http://schemas.microsoft.com/office/powerpoint/2010/main" val="2782244947"/>
-      </p:ext>
-    </p:extLst>
-  </p:cSld>
-  <p:clrMapOvr>
-    <a:masterClrMapping/>
-  </p:clrMapOvr>
-</p:sldLayout>
-</file>
-
-<file path=ppt/slideLayouts/slideLayout5.xml><?xml version="1.0" encoding="utf-8"?>
-<p:sldLayout xmlns:a="http://schemas.openxmlformats.org/drawingml/2006/main" xmlns:r="http://schemas.openxmlformats.org/officeDocument/2006/relationships" xmlns:p="http://schemas.openxmlformats.org/presentationml/2006/main" type="twoTxTwoObj" preserve="1">
-  <p:cSld name="Comparison">
-    <p:spTree>
-      <p:nvGrpSpPr>
-        <p:cNvPr id="1" name=""/>
-        <p:cNvGrpSpPr/>
-        <p:nvPr/>
-      </p:nvGrpSpPr>
-      <p:grpSpPr>
-        <a:xfrm>
-          <a:off x="0" y="0"/>
-          <a:ext cx="0" cy="0"/>
-          <a:chOff x="0" y="0"/>
-          <a:chExt cx="0" cy="0"/>
-        </a:xfrm>
-      </p:grpSpPr>
-      <p:sp>
-        <p:nvSpPr>
-          <p:cNvPr id="2" name="Title 1"/>
-          <p:cNvSpPr>
-            <a:spLocks noGrp="1"/>
-          </p:cNvSpPr>
-          <p:nvPr>
-            <p:ph type="title"/>
-          </p:nvPr>
-        </p:nvSpPr>
-        <p:spPr/>
-        <p:txBody>
-          <a:bodyPr/>
-          <a:lstStyle>
-            <a:lvl1pPr>
-              <a:defRPr/>
-            </a:lvl1pPr>
-          </a:lstStyle>
-          <a:p>
-            <a:r>
-              <a:rPr lang="en-US" smtClean="0"/>
-              <a:t>Click to edit Master title style</a:t>
-            </a:r>
-            <a:endParaRPr lang="en-US"/>
-          </a:p>
-        </p:txBody>
-      </p:sp>
-      <p:sp>
-        <p:nvSpPr>
-          <p:cNvPr id="3" name="Text Placeholder 2"/>
-          <p:cNvSpPr>
-            <a:spLocks noGrp="1"/>
-          </p:cNvSpPr>
-          <p:nvPr>
-            <p:ph type="body" idx="1"/>
-          </p:nvPr>
-        </p:nvSpPr>
-        <p:spPr>
-          <a:xfrm>
-            <a:off x="457200" y="1535113"/>
-            <a:ext cx="4040188" cy="639762"/>
-          </a:xfrm>
-        </p:spPr>
-        <p:txBody>
-          <a:bodyPr anchor="b"/>
-          <a:lstStyle>
-            <a:lvl1pPr marL="0" indent="0">
-              <a:buNone/>
-              <a:defRPr sz="2400" b="1"/>
-            </a:lvl1pPr>
-            <a:lvl2pPr marL="457200" indent="0">
-              <a:buNone/>
-              <a:defRPr sz="2000" b="1"/>
-            </a:lvl2pPr>
-            <a:lvl3pPr marL="914400" indent="0">
-              <a:buNone/>
-              <a:defRPr sz="1800" b="1"/>
-            </a:lvl3pPr>
-            <a:lvl4pPr marL="1371600" indent="0">
-              <a:buNone/>
-              <a:defRPr sz="1600" b="1"/>
-            </a:lvl4pPr>
-            <a:lvl5pPr marL="1828800" indent="0">
-              <a:buNone/>
-              <a:defRPr sz="1600" b="1"/>
-            </a:lvl5pPr>
-            <a:lvl6pPr marL="2286000" indent="0">
-              <a:buNone/>
-              <a:defRPr sz="1600" b="1"/>
-            </a:lvl6pPr>
-            <a:lvl7pPr marL="2743200" indent="0">
-              <a:buNone/>
-              <a:defRPr sz="1600" b="1"/>
-            </a:lvl7pPr>
-            <a:lvl8pPr marL="3200400" indent="0">
-              <a:buNone/>
-              <a:defRPr sz="1600" b="1"/>
-            </a:lvl8pPr>
-            <a:lvl9pPr marL="3657600" indent="0">
-              <a:buNone/>
-              <a:defRPr sz="1600" b="1"/>
-            </a:lvl9pPr>
-          </a:lstStyle>
-          <a:p>
-            <a:pPr lvl="0"/>
-            <a:r>
-              <a:rPr lang="en-US" smtClean="0"/>
-              <a:t>Click to edit Master text styles</a:t>
-            </a:r>
-          </a:p>
-        </p:txBody>
-      </p:sp>
-      <p:sp>
-        <p:nvSpPr>
-          <p:cNvPr id="4" name="Content Placeholder 3"/>
-          <p:cNvSpPr>
-            <a:spLocks noGrp="1"/>
-          </p:cNvSpPr>
-          <p:nvPr>
-            <p:ph sz="half" idx="2"/>
-          </p:nvPr>
-        </p:nvSpPr>
-        <p:spPr>
-          <a:xfrm>
-            <a:off x="457200" y="2174875"/>
-            <a:ext cx="4040188" cy="3951288"/>
-          </a:xfrm>
-        </p:spPr>
-        <p:txBody>
-          <a:bodyPr/>
-          <a:lstStyle>
-            <a:lvl1pPr>
-              <a:defRPr sz="2400"/>
-            </a:lvl1pPr>
-            <a:lvl2pPr>
-              <a:defRPr sz="2000"/>
-            </a:lvl2pPr>
-            <a:lvl3pPr>
-              <a:defRPr sz="1800"/>
-            </a:lvl3pPr>
-            <a:lvl4pPr>
-              <a:defRPr sz="1600"/>
-            </a:lvl4pPr>
-            <a:lvl5pPr>
-              <a:defRPr sz="1600"/>
-            </a:lvl5pPr>
-            <a:lvl6pPr>
-              <a:defRPr sz="1600"/>
-            </a:lvl6pPr>
-            <a:lvl7pPr>
-              <a:defRPr sz="1600"/>
-            </a:lvl7pPr>
-            <a:lvl8pPr>
-              <a:defRPr sz="1600"/>
-            </a:lvl8pPr>
-            <a:lvl9pPr>
-              <a:defRPr sz="1600"/>
-            </a:lvl9pPr>
-          </a:lstStyle>
-          <a:p>
-            <a:pPr lvl="0"/>
-            <a:r>
-              <a:rPr lang="en-US" smtClean="0"/>
-              <a:t>Click to edit Master text styles</a:t>
-            </a:r>
-          </a:p>
-          <a:p>
-            <a:pPr lvl="1"/>
-            <a:r>
-              <a:rPr lang="en-US" smtClean="0"/>
-              <a:t>Second level</a:t>
-            </a:r>
-          </a:p>
-          <a:p>
-            <a:pPr lvl="2"/>
-            <a:r>
-              <a:rPr lang="en-US" smtClean="0"/>
-              <a:t>Third level</a:t>
-            </a:r>
-          </a:p>
-          <a:p>
-            <a:pPr lvl="3"/>
-            <a:r>
-              <a:rPr lang="en-US" smtClean="0"/>
-              <a:t>Fourth level</a:t>
-            </a:r>
-          </a:p>
-          <a:p>
-            <a:pPr lvl="4"/>
-            <a:r>
-              <a:rPr lang="en-US" smtClean="0"/>
-              <a:t>Fifth level</a:t>
-            </a:r>
-            <a:endParaRPr lang="en-US"/>
-          </a:p>
-        </p:txBody>
-      </p:sp>
-      <p:sp>
-        <p:nvSpPr>
-          <p:cNvPr id="5" name="Text Placeholder 4"/>
-          <p:cNvSpPr>
-            <a:spLocks noGrp="1"/>
-          </p:cNvSpPr>
-          <p:nvPr>
-            <p:ph type="body" sz="quarter" idx="3"/>
-          </p:nvPr>
-        </p:nvSpPr>
-        <p:spPr>
-          <a:xfrm>
-            <a:off x="4645025" y="1535113"/>
-            <a:ext cx="4041775" cy="639762"/>
-          </a:xfrm>
-        </p:spPr>
-        <p:txBody>
-          <a:bodyPr anchor="b"/>
-          <a:lstStyle>
-            <a:lvl1pPr marL="0" indent="0">
-              <a:buNone/>
-              <a:defRPr sz="2400" b="1"/>
-            </a:lvl1pPr>
-            <a:lvl2pPr marL="457200" indent="0">
-              <a:buNone/>
-              <a:defRPr sz="2000" b="1"/>
-            </a:lvl2pPr>
-            <a:lvl3pPr marL="914400" indent="0">
-              <a:buNone/>
-              <a:defRPr sz="1800" b="1"/>
-            </a:lvl3pPr>
-            <a:lvl4pPr marL="1371600" indent="0">
-              <a:buNone/>
-              <a:defRPr sz="1600" b="1"/>
-            </a:lvl4pPr>
-            <a:lvl5pPr marL="1828800" indent="0">
-              <a:buNone/>
-              <a:defRPr sz="1600" b="1"/>
-            </a:lvl5pPr>
-            <a:lvl6pPr marL="2286000" indent="0">
-              <a:buNone/>
-              <a:defRPr sz="1600" b="1"/>
-            </a:lvl6pPr>
-            <a:lvl7pPr marL="2743200" indent="0">
-              <a:buNone/>
-              <a:defRPr sz="1600" b="1"/>
-            </a:lvl7pPr>
-            <a:lvl8pPr marL="3200400" indent="0">
-              <a:buNone/>
-              <a:defRPr sz="1600" b="1"/>
-            </a:lvl8pPr>
-            <a:lvl9pPr marL="3657600" indent="0">
-              <a:buNone/>
-              <a:defRPr sz="1600" b="1"/>
-            </a:lvl9pPr>
-          </a:lstStyle>
-          <a:p>
-            <a:pPr lvl="0"/>
-            <a:r>
-              <a:rPr lang="en-US" smtClean="0"/>
-              <a:t>Click to edit Master text styles</a:t>
-            </a:r>
-          </a:p>
-        </p:txBody>
-      </p:sp>
-      <p:sp>
-        <p:nvSpPr>
-          <p:cNvPr id="6" name="Content Placeholder 5"/>
-          <p:cNvSpPr>
-            <a:spLocks noGrp="1"/>
-          </p:cNvSpPr>
-          <p:nvPr>
-            <p:ph sz="quarter" idx="4"/>
-          </p:nvPr>
-        </p:nvSpPr>
-        <p:spPr>
-          <a:xfrm>
-            <a:off x="4645025" y="2174875"/>
-            <a:ext cx="4041775" cy="3951288"/>
-          </a:xfrm>
-        </p:spPr>
-        <p:txBody>
-          <a:bodyPr/>
-          <a:lstStyle>
-            <a:lvl1pPr>
-              <a:defRPr sz="2400"/>
-            </a:lvl1pPr>
-            <a:lvl2pPr>
-              <a:defRPr sz="2000"/>
-            </a:lvl2pPr>
-            <a:lvl3pPr>
-              <a:defRPr sz="1800"/>
-            </a:lvl3pPr>
-            <a:lvl4pPr>
-              <a:defRPr sz="1600"/>
-            </a:lvl4pPr>
-            <a:lvl5pPr>
-              <a:defRPr sz="1600"/>
-            </a:lvl5pPr>
-            <a:lvl6pPr>
-              <a:defRPr sz="1600"/>
-            </a:lvl6pPr>
-            <a:lvl7pPr>
-              <a:defRPr sz="1600"/>
-            </a:lvl7pPr>
-            <a:lvl8pPr>
-              <a:defRPr sz="1600"/>
-            </a:lvl8pPr>
-            <a:lvl9pPr>
-              <a:defRPr sz="1600"/>
-            </a:lvl9pPr>
-          </a:lstStyle>
-          <a:p>
-            <a:pPr lvl="0"/>
-            <a:r>
-              <a:rPr lang="en-US" smtClean="0"/>
-              <a:t>Click to edit Master text styles</a:t>
-            </a:r>
-          </a:p>
-          <a:p>
-            <a:pPr lvl="1"/>
-            <a:r>
-              <a:rPr lang="en-US" smtClean="0"/>
-              <a:t>Second level</a:t>
-            </a:r>
-          </a:p>
-          <a:p>
-            <a:pPr lvl="2"/>
-            <a:r>
-              <a:rPr lang="en-US" smtClean="0"/>
-              <a:t>Third level</a:t>
-            </a:r>
-          </a:p>
-          <a:p>
-            <a:pPr lvl="3"/>
-            <a:r>
-              <a:rPr lang="en-US" smtClean="0"/>
-              <a:t>Fourth level</a:t>
-            </a:r>
-          </a:p>
-          <a:p>
-            <a:pPr lvl="4"/>
-            <a:r>
-              <a:rPr lang="en-US" smtClean="0"/>
-              <a:t>Fifth level</a:t>
-            </a:r>
-            <a:endParaRPr lang="en-US"/>
-          </a:p>
-        </p:txBody>
-      </p:sp>
-      <p:sp>
-        <p:nvSpPr>
-          <p:cNvPr id="7" name="Date Placeholder 6"/>
-          <p:cNvSpPr>
-            <a:spLocks noGrp="1"/>
-          </p:cNvSpPr>
-          <p:nvPr>
-            <p:ph type="dt" sz="half" idx="10"/>
-          </p:nvPr>
-        </p:nvSpPr>
-        <p:spPr/>
-        <p:txBody>
-          <a:bodyPr/>
-          <a:lstStyle/>
-          <a:p>
-            <a:fld id="{5BCAD085-E8A6-8845-BD4E-CB4CCA059FC4}" type="datetimeFigureOut">
-              <a:rPr lang="en-US" smtClean="0"/>
-              <a:t>1/27/13</a:t>
-            </a:fld>
-            <a:endParaRPr lang="en-US"/>
-          </a:p>
-        </p:txBody>
-      </p:sp>
-      <p:sp>
-        <p:nvSpPr>
-          <p:cNvPr id="8" name="Footer Placeholder 7"/>
-          <p:cNvSpPr>
-            <a:spLocks noGrp="1"/>
-          </p:cNvSpPr>
-          <p:nvPr>
-            <p:ph type="ftr" sz="quarter" idx="11"/>
-          </p:nvPr>
-        </p:nvSpPr>
-        <p:spPr/>
-        <p:txBody>
-          <a:bodyPr/>
-          <a:lstStyle/>
-          <a:p>
-            <a:endParaRPr lang="en-US"/>
-          </a:p>
-        </p:txBody>
-      </p:sp>
-      <p:sp>
-        <p:nvSpPr>
-          <p:cNvPr id="9" name="Slide Number Placeholder 8"/>
-          <p:cNvSpPr>
-            <a:spLocks noGrp="1"/>
-          </p:cNvSpPr>
-          <p:nvPr>
-            <p:ph type="sldNum" sz="quarter" idx="12"/>
-          </p:nvPr>
-        </p:nvSpPr>
-        <p:spPr/>
-        <p:txBody>
-          <a:bodyPr/>
-          <a:lstStyle/>
-          <a:p>
-            <a:fld id="{C1FF6DA9-008F-8B48-92A6-B652298478BF}" type="slidenum">
-              <a:rPr lang="en-US" smtClean="0"/>
-              <a:t>‹#›</a:t>
-            </a:fld>
-            <a:endParaRPr lang="en-US"/>
-          </a:p>
-        </p:txBody>
-      </p:sp>
-    </p:spTree>
-    <p:extLst>
-      <p:ext uri="{BB962C8B-B14F-4D97-AF65-F5344CB8AC3E}">
-        <p14:creationId xmlns:p14="http://schemas.microsoft.com/office/powerpoint/2010/main" val="990158736"/>
-      </p:ext>
-    </p:extLst>
-  </p:cSld>
-  <p:clrMapOvr>
-    <a:masterClrMapping/>
-  </p:clrMapOvr>
-</p:sldLayout>
-</file>
-
-<file path=ppt/slideLayouts/slideLayout6.xml><?xml version="1.0" encoding="utf-8"?>
-<p:sldLayout xmlns:a="http://schemas.openxmlformats.org/drawingml/2006/main" xmlns:r="http://schemas.openxmlformats.org/officeDocument/2006/relationships" xmlns:p="http://schemas.openxmlformats.org/presentationml/2006/main" type="titleOnly" preserve="1">
-  <p:cSld name="Title Only">
-    <p:spTree>
-      <p:nvGrpSpPr>
-        <p:cNvPr id="1" name=""/>
-        <p:cNvGrpSpPr/>
-        <p:nvPr/>
-      </p:nvGrpSpPr>
-      <p:grpSpPr>
-        <a:xfrm>
-          <a:off x="0" y="0"/>
-          <a:ext cx="0" cy="0"/>
-          <a:chOff x="0" y="0"/>
-          <a:chExt cx="0" cy="0"/>
-        </a:xfrm>
-      </p:grpSpPr>
-      <p:sp>
-        <p:nvSpPr>
-          <p:cNvPr id="2" name="Title 1"/>
-          <p:cNvSpPr>
-            <a:spLocks noGrp="1"/>
-          </p:cNvSpPr>
-          <p:nvPr>
-            <p:ph type="title"/>
-          </p:nvPr>
-        </p:nvSpPr>
-        <p:spPr/>
-        <p:txBody>
-          <a:bodyPr/>
-          <a:lstStyle/>
-          <a:p>
-            <a:r>
-              <a:rPr lang="en-US" smtClean="0"/>
-              <a:t>Click to edit Master title style</a:t>
-            </a:r>
-            <a:endParaRPr lang="en-US"/>
-          </a:p>
-        </p:txBody>
-      </p:sp>
-      <p:sp>
-        <p:nvSpPr>
-          <p:cNvPr id="3" name="Date Placeholder 2"/>
-          <p:cNvSpPr>
-            <a:spLocks noGrp="1"/>
-          </p:cNvSpPr>
-          <p:nvPr>
-            <p:ph type="dt" sz="half" idx="10"/>
-          </p:nvPr>
-        </p:nvSpPr>
-        <p:spPr/>
-        <p:txBody>
-          <a:bodyPr/>
-          <a:lstStyle/>
-          <a:p>
-            <a:fld id="{5BCAD085-E8A6-8845-BD4E-CB4CCA059FC4}" type="datetimeFigureOut">
-              <a:rPr lang="en-US" smtClean="0"/>
-              <a:t>1/27/13</a:t>
-            </a:fld>
-            <a:endParaRPr lang="en-US"/>
-          </a:p>
-        </p:txBody>
-      </p:sp>
-      <p:sp>
-        <p:nvSpPr>
-          <p:cNvPr id="4" name="Footer Placeholder 3"/>
-          <p:cNvSpPr>
-            <a:spLocks noGrp="1"/>
-          </p:cNvSpPr>
-          <p:nvPr>
-            <p:ph type="ftr" sz="quarter" idx="11"/>
-          </p:nvPr>
-        </p:nvSpPr>
-        <p:spPr/>
-        <p:txBody>
-          <a:bodyPr/>
-          <a:lstStyle/>
-          <a:p>
-            <a:endParaRPr lang="en-US"/>
-          </a:p>
-        </p:txBody>
-      </p:sp>
-      <p:sp>
-        <p:nvSpPr>
-          <p:cNvPr id="5" name="Slide Number Placeholder 4"/>
-          <p:cNvSpPr>
-            <a:spLocks noGrp="1"/>
-          </p:cNvSpPr>
-          <p:nvPr>
-            <p:ph type="sldNum" sz="quarter" idx="12"/>
-          </p:nvPr>
-        </p:nvSpPr>
-        <p:spPr/>
-        <p:txBody>
-          <a:bodyPr/>
-          <a:lstStyle/>
-          <a:p>
-            <a:fld id="{C1FF6DA9-008F-8B48-92A6-B652298478BF}" type="slidenum">
-              <a:rPr lang="en-US" smtClean="0"/>
-              <a:t>‹#›</a:t>
-            </a:fld>
-            <a:endParaRPr lang="en-US"/>
-          </a:p>
-        </p:txBody>
-      </p:sp>
-    </p:spTree>
-    <p:extLst>
-      <p:ext uri="{BB962C8B-B14F-4D97-AF65-F5344CB8AC3E}">
-        <p14:creationId xmlns:p14="http://schemas.microsoft.com/office/powerpoint/2010/main" val="727027711"/>
-      </p:ext>
-    </p:extLst>
-  </p:cSld>
-  <p:clrMapOvr>
-    <a:masterClrMapping/>
-  </p:clrMapOvr>
-</p:sldLayout>
-</file>
-
-<file path=ppt/slideLayouts/slideLayout7.xml><?xml version="1.0" encoding="utf-8"?>
-<p:sldLayout xmlns:a="http://schemas.openxmlformats.org/drawingml/2006/main" xmlns:r="http://schemas.openxmlformats.org/officeDocument/2006/relationships" xmlns:p="http://schemas.openxmlformats.org/presentationml/2006/main" type="blank" preserve="1">
-  <p:cSld name="Blank">
-    <p:spTree>
-      <p:nvGrpSpPr>
-        <p:cNvPr id="1" name=""/>
-        <p:cNvGrpSpPr/>
-        <p:nvPr/>
-      </p:nvGrpSpPr>
-      <p:grpSpPr>
-        <a:xfrm>
-          <a:off x="0" y="0"/>
-          <a:ext cx="0" cy="0"/>
-          <a:chOff x="0" y="0"/>
-          <a:chExt cx="0" cy="0"/>
-        </a:xfrm>
-      </p:grpSpPr>
-      <p:sp>
-        <p:nvSpPr>
-          <p:cNvPr id="2" name="Date Placeholder 1"/>
-          <p:cNvSpPr>
-            <a:spLocks noGrp="1"/>
-          </p:cNvSpPr>
-          <p:nvPr>
-            <p:ph type="dt" sz="half" idx="10"/>
-          </p:nvPr>
-        </p:nvSpPr>
-        <p:spPr/>
-        <p:txBody>
-          <a:bodyPr/>
-          <a:lstStyle/>
-          <a:p>
-            <a:fld id="{5BCAD085-E8A6-8845-BD4E-CB4CCA059FC4}" type="datetimeFigureOut">
-              <a:rPr lang="en-US" smtClean="0"/>
-              <a:t>1/27/13</a:t>
-            </a:fld>
-            <a:endParaRPr lang="en-US"/>
-          </a:p>
-        </p:txBody>
-      </p:sp>
-      <p:sp>
-        <p:nvSpPr>
-          <p:cNvPr id="3" name="Footer Placeholder 2"/>
-          <p:cNvSpPr>
-            <a:spLocks noGrp="1"/>
-          </p:cNvSpPr>
-          <p:nvPr>
-            <p:ph type="ftr" sz="quarter" idx="11"/>
-          </p:nvPr>
-        </p:nvSpPr>
-        <p:spPr/>
-        <p:txBody>
-          <a:bodyPr/>
-          <a:lstStyle/>
-          <a:p>
-            <a:endParaRPr lang="en-US"/>
-          </a:p>
-        </p:txBody>
-      </p:sp>
-      <p:sp>
-        <p:nvSpPr>
-          <p:cNvPr id="4" name="Slide Number Placeholder 3"/>
-          <p:cNvSpPr>
-            <a:spLocks noGrp="1"/>
-          </p:cNvSpPr>
-          <p:nvPr>
-            <p:ph type="sldNum" sz="quarter" idx="12"/>
-          </p:nvPr>
-        </p:nvSpPr>
-        <p:spPr/>
-        <p:txBody>
-          <a:bodyPr/>
-          <a:lstStyle/>
-          <a:p>
-            <a:fld id="{C1FF6DA9-008F-8B48-92A6-B652298478BF}" type="slidenum">
-              <a:rPr lang="en-US" smtClean="0"/>
-              <a:t>‹#›</a:t>
-            </a:fld>
-            <a:endParaRPr lang="en-US"/>
-          </a:p>
-        </p:txBody>
-      </p:sp>
-    </p:spTree>
-    <p:extLst>
-      <p:ext uri="{BB962C8B-B14F-4D97-AF65-F5344CB8AC3E}">
-        <p14:creationId xmlns:p14="http://schemas.microsoft.com/office/powerpoint/2010/main" val="1212999818"/>
-      </p:ext>
-    </p:extLst>
-  </p:cSld>
-  <p:clrMapOvr>
-    <a:masterClrMapping/>
-  </p:clrMapOvr>
-</p:sldLayout>
-</file>
-
-<file path=ppt/slideLayouts/slideLayout8.xml><?xml version="1.0" encoding="utf-8"?>
-<p:sldLayout xmlns:a="http://schemas.openxmlformats.org/drawingml/2006/main" xmlns:r="http://schemas.openxmlformats.org/officeDocument/2006/relationships" xmlns:p="http://schemas.openxmlformats.org/presentationml/2006/main" type="objTx" preserve="1">
-  <p:cSld name="Content with Caption">
-    <p:spTree>
-      <p:nvGrpSpPr>
-        <p:cNvPr id="1" name=""/>
-        <p:cNvGrpSpPr/>
-        <p:nvPr/>
-      </p:nvGrpSpPr>
-      <p:grpSpPr>
-        <a:xfrm>
-          <a:off x="0" y="0"/>
-          <a:ext cx="0" cy="0"/>
-          <a:chOff x="0" y="0"/>
-          <a:chExt cx="0" cy="0"/>
-        </a:xfrm>
-      </p:grpSpPr>
-      <p:sp>
-        <p:nvSpPr>
-          <p:cNvPr id="2" name="Title 1"/>
-          <p:cNvSpPr>
-            <a:spLocks noGrp="1"/>
-          </p:cNvSpPr>
-          <p:nvPr>
-            <p:ph type="title"/>
-          </p:nvPr>
-        </p:nvSpPr>
-        <p:spPr>
-          <a:xfrm>
-            <a:off x="457200" y="273050"/>
-            <a:ext cx="3008313" cy="1162050"/>
-          </a:xfrm>
-        </p:spPr>
-        <p:txBody>
-          <a:bodyPr anchor="b"/>
-          <a:lstStyle>
-            <a:lvl1pPr algn="l">
-              <a:defRPr sz="2000" b="1"/>
-            </a:lvl1pPr>
-          </a:lstStyle>
-          <a:p>
-            <a:r>
-              <a:rPr lang="en-US" smtClean="0"/>
-              <a:t>Click to edit Master title style</a:t>
-            </a:r>
-            <a:endParaRPr lang="en-US"/>
-          </a:p>
-        </p:txBody>
-      </p:sp>
-      <p:sp>
-        <p:nvSpPr>
-          <p:cNvPr id="3" name="Content Placeholder 2"/>
-          <p:cNvSpPr>
-            <a:spLocks noGrp="1"/>
-          </p:cNvSpPr>
-          <p:nvPr>
-            <p:ph idx="1"/>
-          </p:nvPr>
-        </p:nvSpPr>
-        <p:spPr>
-          <a:xfrm>
-            <a:off x="3575050" y="273050"/>
-            <a:ext cx="5111750" cy="5853113"/>
-          </a:xfrm>
-        </p:spPr>
-        <p:txBody>
-          <a:bodyPr/>
-          <a:lstStyle>
-            <a:lvl1pPr>
-              <a:defRPr sz="3200"/>
-            </a:lvl1pPr>
-            <a:lvl2pPr>
-              <a:defRPr sz="2800"/>
-            </a:lvl2pPr>
-            <a:lvl3pPr>
-              <a:defRPr sz="2400"/>
-            </a:lvl3pPr>
-            <a:lvl4pPr>
-              <a:defRPr sz="2000"/>
-            </a:lvl4pPr>
-            <a:lvl5pPr>
-              <a:defRPr sz="2000"/>
-            </a:lvl5pPr>
-            <a:lvl6pPr>
-              <a:defRPr sz="2000"/>
-            </a:lvl6pPr>
-            <a:lvl7pPr>
-              <a:defRPr sz="2000"/>
-            </a:lvl7pPr>
-            <a:lvl8pPr>
-              <a:defRPr sz="2000"/>
-            </a:lvl8pPr>
-            <a:lvl9pPr>
-              <a:defRPr sz="2000"/>
-            </a:lvl9pPr>
-          </a:lstStyle>
-          <a:p>
-            <a:pPr lvl="0"/>
-            <a:r>
-              <a:rPr lang="en-US" smtClean="0"/>
-              <a:t>Click to edit Master text styles</a:t>
-            </a:r>
-          </a:p>
-          <a:p>
-            <a:pPr lvl="1"/>
-            <a:r>
-              <a:rPr lang="en-US" smtClean="0"/>
-              <a:t>Second level</a:t>
-            </a:r>
-          </a:p>
-          <a:p>
-            <a:pPr lvl="2"/>
-            <a:r>
-              <a:rPr lang="en-US" smtClean="0"/>
-              <a:t>Third level</a:t>
-            </a:r>
-          </a:p>
-          <a:p>
-            <a:pPr lvl="3"/>
-            <a:r>
-              <a:rPr lang="en-US" smtClean="0"/>
-              <a:t>Fourth level</a:t>
-            </a:r>
-          </a:p>
-          <a:p>
-            <a:pPr lvl="4"/>
-            <a:r>
-              <a:rPr lang="en-US" smtClean="0"/>
-              <a:t>Fifth level</a:t>
-            </a:r>
-            <a:endParaRPr lang="en-US"/>
-          </a:p>
-        </p:txBody>
-      </p:sp>
-      <p:sp>
-        <p:nvSpPr>
-          <p:cNvPr id="4" name="Text Placeholder 3"/>
-          <p:cNvSpPr>
-            <a:spLocks noGrp="1"/>
-          </p:cNvSpPr>
-          <p:nvPr>
-            <p:ph type="body" sz="half" idx="2"/>
-          </p:nvPr>
-        </p:nvSpPr>
-        <p:spPr>
-          <a:xfrm>
-            <a:off x="457200" y="1435100"/>
-            <a:ext cx="3008313" cy="4691063"/>
-          </a:xfrm>
-        </p:spPr>
-        <p:txBody>
-          <a:bodyPr/>
-          <a:lstStyle>
-            <a:lvl1pPr marL="0" indent="0">
-              <a:buNone/>
-              <a:defRPr sz="1400"/>
-            </a:lvl1pPr>
-            <a:lvl2pPr marL="457200" indent="0">
-              <a:buNone/>
-              <a:defRPr sz="1200"/>
-            </a:lvl2pPr>
-            <a:lvl3pPr marL="914400" indent="0">
-              <a:buNone/>
-              <a:defRPr sz="1000"/>
-            </a:lvl3pPr>
-            <a:lvl4pPr marL="1371600" indent="0">
-              <a:buNone/>
-              <a:defRPr sz="900"/>
-            </a:lvl4pPr>
-            <a:lvl5pPr marL="1828800" indent="0">
-              <a:buNone/>
-              <a:defRPr sz="900"/>
-            </a:lvl5pPr>
-            <a:lvl6pPr marL="2286000" indent="0">
-              <a:buNone/>
-              <a:defRPr sz="900"/>
-            </a:lvl6pPr>
-            <a:lvl7pPr marL="2743200" indent="0">
-              <a:buNone/>
-              <a:defRPr sz="900"/>
-            </a:lvl7pPr>
-            <a:lvl8pPr marL="3200400" indent="0">
-              <a:buNone/>
-              <a:defRPr sz="900"/>
-            </a:lvl8pPr>
-            <a:lvl9pPr marL="3657600" indent="0">
-              <a:buNone/>
-              <a:defRPr sz="900"/>
-            </a:lvl9pPr>
-          </a:lstStyle>
-          <a:p>
-            <a:pPr lvl="0"/>
-            <a:r>
-              <a:rPr lang="en-US" smtClean="0"/>
-              <a:t>Click to edit Master text styles</a:t>
-            </a:r>
-          </a:p>
-        </p:txBody>
-      </p:sp>
-      <p:sp>
-        <p:nvSpPr>
-          <p:cNvPr id="5" name="Date Placeholder 4"/>
-          <p:cNvSpPr>
-            <a:spLocks noGrp="1"/>
-          </p:cNvSpPr>
-          <p:nvPr>
-            <p:ph type="dt" sz="half" idx="10"/>
-          </p:nvPr>
-        </p:nvSpPr>
-        <p:spPr/>
-        <p:txBody>
-          <a:bodyPr/>
-          <a:lstStyle/>
-          <a:p>
-            <a:fld id="{5BCAD085-E8A6-8845-BD4E-CB4CCA059FC4}" type="datetimeFigureOut">
-              <a:rPr lang="en-US" smtClean="0"/>
-              <a:t>1/27/13</a:t>
-            </a:fld>
-            <a:endParaRPr lang="en-US"/>
-          </a:p>
-        </p:txBody>
-      </p:sp>
-      <p:sp>
-        <p:nvSpPr>
-          <p:cNvPr id="6" name="Footer Placeholder 5"/>
-          <p:cNvSpPr>
-            <a:spLocks noGrp="1"/>
-          </p:cNvSpPr>
-          <p:nvPr>
-            <p:ph type="ftr" sz="quarter" idx="11"/>
-          </p:nvPr>
-        </p:nvSpPr>
-        <p:spPr/>
-        <p:txBody>
-          <a:bodyPr/>
-          <a:lstStyle/>
-          <a:p>
-            <a:endParaRPr lang="en-US"/>
-          </a:p>
-        </p:txBody>
-      </p:sp>
-      <p:sp>
-        <p:nvSpPr>
-          <p:cNvPr id="7" name="Slide Number Placeholder 6"/>
-          <p:cNvSpPr>
-            <a:spLocks noGrp="1"/>
-          </p:cNvSpPr>
-          <p:nvPr>
-            <p:ph type="sldNum" sz="quarter" idx="12"/>
-          </p:nvPr>
-        </p:nvSpPr>
-        <p:spPr/>
-        <p:txBody>
-          <a:bodyPr/>
-          <a:lstStyle/>
-          <a:p>
-            <a:fld id="{C1FF6DA9-008F-8B48-92A6-B652298478BF}" type="slidenum">
-              <a:rPr lang="en-US" smtClean="0"/>
-              <a:t>‹#›</a:t>
-            </a:fld>
-            <a:endParaRPr lang="en-US"/>
-          </a:p>
-        </p:txBody>
-      </p:sp>
-    </p:spTree>
-    <p:extLst>
-      <p:ext uri="{BB962C8B-B14F-4D97-AF65-F5344CB8AC3E}">
-        <p14:creationId xmlns:p14="http://schemas.microsoft.com/office/powerpoint/2010/main" val="1840726560"/>
-      </p:ext>
-    </p:extLst>
-  </p:cSld>
-  <p:clrMapOvr>
-    <a:masterClrMapping/>
-  </p:clrMapOvr>
-</p:sldLayout>
-</file>
-
-<file path=ppt/slideLayouts/slideLayout9.xml><?xml version="1.0" encoding="utf-8"?>
-<p:sldLayout xmlns:a="http://schemas.openxmlformats.org/drawingml/2006/main" xmlns:r="http://schemas.openxmlformats.org/officeDocument/2006/relationships" xmlns:p="http://schemas.openxmlformats.org/presentationml/2006/main" type="picTx" preserve="1">
-  <p:cSld name="Picture with Caption">
-    <p:spTree>
-      <p:nvGrpSpPr>
-        <p:cNvPr id="1" name=""/>
-        <p:cNvGrpSpPr/>
-        <p:nvPr/>
-      </p:nvGrpSpPr>
-      <p:grpSpPr>
-        <a:xfrm>
-          <a:off x="0" y="0"/>
-          <a:ext cx="0" cy="0"/>
-          <a:chOff x="0" y="0"/>
-          <a:chExt cx="0" cy="0"/>
-        </a:xfrm>
-      </p:grpSpPr>
-      <p:sp>
-        <p:nvSpPr>
-          <p:cNvPr id="2" name="Title 1"/>
-          <p:cNvSpPr>
-            <a:spLocks noGrp="1"/>
-          </p:cNvSpPr>
-          <p:nvPr>
-            <p:ph type="title"/>
-          </p:nvPr>
-        </p:nvSpPr>
-        <p:spPr>
-          <a:xfrm>
-            <a:off x="1792288" y="4800600"/>
-            <a:ext cx="5486400" cy="566738"/>
-          </a:xfrm>
-        </p:spPr>
-        <p:txBody>
-          <a:bodyPr anchor="b"/>
+        <p:spPr>
+          <a:xfrm>
+            <a:off x="548640" y="731520"/>
+            <a:ext cx="11091672" cy="1005840"/>
+          </a:xfrm>
+        </p:spPr>
+        <p:txBody>
+          <a:bodyPr anchor="t" wrap="square"/>
           <a:lstStyle>
             <a:lvl1pPr algn="l">
               <a:defRPr sz="2000" b="1"/>
@@ -3949,12 +2314,12 @@
         </p:nvSpPr>
         <p:spPr>
           <a:xfrm>
-            <a:off x="1792288" y="612775"/>
-            <a:ext cx="5486400" cy="4114800"/>
-          </a:xfrm>
-        </p:spPr>
-        <p:txBody>
-          <a:bodyPr/>
+            <a:off x="548640" y="1828800"/>
+            <a:ext cx="11091672" cy="3977639"/>
+          </a:xfrm>
+        </p:spPr>
+        <p:txBody>
+          <a:bodyPr wrap="square" anchor="ctr"/>
           <a:lstStyle>
             <a:lvl1pPr marL="0" indent="0">
               <a:buNone/>
@@ -4010,121 +2375,68 @@
         </p:nvSpPr>
         <p:spPr>
           <a:xfrm>
-            <a:off x="1792288" y="5367338"/>
-            <a:ext cx="5486400" cy="804862"/>
-          </a:xfrm>
-        </p:spPr>
-        <p:txBody>
-          <a:bodyPr/>
+            <a:off x="548640" y="5943600"/>
+            <a:ext cx="11091672" cy="457200"/>
+          </a:xfrm>
+        </p:spPr>
+        <p:txBody>
+          <a:bodyPr wrap="square" anchor="t"/>
           <a:lstStyle>
-            <a:lvl1pPr marL="0" indent="0">
+            <a:lvl1pPr marL="0" indent="0" algn="ctr">
               <a:buNone/>
-              <a:defRPr sz="1400"/>
+              <a:defRPr sz="1300">
+                <a:solidFill>
+                  <a:schemeClr val="accent4"/>
+                </a:solidFill>
+                <a:latin typeface="+mn-lt"/>
+              </a:defRPr>
             </a:lvl1pPr>
-            <a:lvl2pPr marL="457200" indent="0">
-              <a:buNone/>
-              <a:defRPr sz="1200"/>
-            </a:lvl2pPr>
-            <a:lvl3pPr marL="914400" indent="0">
-              <a:buNone/>
-              <a:defRPr sz="1000"/>
-            </a:lvl3pPr>
-            <a:lvl4pPr marL="1371600" indent="0">
-              <a:buNone/>
-              <a:defRPr sz="900"/>
-            </a:lvl4pPr>
-            <a:lvl5pPr marL="1828800" indent="0">
-              <a:buNone/>
-              <a:defRPr sz="900"/>
-            </a:lvl5pPr>
-            <a:lvl6pPr marL="2286000" indent="0">
-              <a:buNone/>
-              <a:defRPr sz="900"/>
-            </a:lvl6pPr>
-            <a:lvl7pPr marL="2743200" indent="0">
-              <a:buNone/>
-              <a:defRPr sz="900"/>
-            </a:lvl7pPr>
-            <a:lvl8pPr marL="3200400" indent="0">
-              <a:buNone/>
-              <a:defRPr sz="900"/>
-            </a:lvl8pPr>
-            <a:lvl9pPr marL="3657600" indent="0">
-              <a:buNone/>
-              <a:defRPr sz="900"/>
-            </a:lvl9pPr>
           </a:lstStyle>
           <a:p>
-            <a:pPr lvl="0"/>
-            <a:r>
-              <a:rPr lang="en-US" smtClean="0"/>
-              <a:t>Click to edit Master text styles</a:t>
-            </a:r>
-          </a:p>
-        </p:txBody>
-      </p:sp>
-      <p:sp>
-        <p:nvSpPr>
-          <p:cNvPr id="5" name="Date Placeholder 4"/>
+            <a:r>
+              <a:rPr lang="en-US"/>
+              <a:t>Source · license — click to add caption</a:t>
+            </a:r>
+          </a:p>
+        </p:txBody>
+      </p:sp>
+      <p:sp>
+        <p:nvSpPr>
+          <p:cNvPr id="5" name="Eyebrow Placeholder"/>
           <p:cNvSpPr>
             <a:spLocks noGrp="1"/>
           </p:cNvSpPr>
           <p:nvPr>
-            <p:ph type="dt" sz="half" idx="10"/>
+            <p:ph type="body" sz="quarter" idx="13"/>
           </p:nvPr>
         </p:nvSpPr>
-        <p:spPr/>
-        <p:txBody>
-          <a:bodyPr/>
-          <a:lstStyle/>
-          <a:p>
-            <a:fld id="{5BCAD085-E8A6-8845-BD4E-CB4CCA059FC4}" type="datetimeFigureOut">
-              <a:rPr lang="en-US" smtClean="0"/>
-              <a:t>1/27/13</a:t>
-            </a:fld>
-            <a:endParaRPr lang="en-US"/>
-          </a:p>
-        </p:txBody>
-      </p:sp>
-      <p:sp>
-        <p:nvSpPr>
-          <p:cNvPr id="6" name="Footer Placeholder 5"/>
-          <p:cNvSpPr>
-            <a:spLocks noGrp="1"/>
-          </p:cNvSpPr>
-          <p:nvPr>
-            <p:ph type="ftr" sz="quarter" idx="11"/>
-          </p:nvPr>
-        </p:nvSpPr>
-        <p:spPr/>
-        <p:txBody>
-          <a:bodyPr/>
-          <a:lstStyle/>
-          <a:p>
-            <a:endParaRPr lang="en-US"/>
-          </a:p>
-        </p:txBody>
-      </p:sp>
-      <p:sp>
-        <p:nvSpPr>
-          <p:cNvPr id="7" name="Slide Number Placeholder 6"/>
-          <p:cNvSpPr>
-            <a:spLocks noGrp="1"/>
-          </p:cNvSpPr>
-          <p:nvPr>
-            <p:ph type="sldNum" sz="quarter" idx="12"/>
-          </p:nvPr>
-        </p:nvSpPr>
-        <p:spPr/>
-        <p:txBody>
-          <a:bodyPr/>
-          <a:lstStyle/>
-          <a:p>
-            <a:fld id="{C1FF6DA9-008F-8B48-92A6-B652298478BF}" type="slidenum">
-              <a:rPr lang="en-US" smtClean="0"/>
-              <a:t>‹#›</a:t>
-            </a:fld>
-            <a:endParaRPr lang="en-US"/>
+        <p:spPr>
+          <a:xfrm>
+            <a:off x="548640" y="320040"/>
+            <a:ext cx="11091672" cy="365760"/>
+          </a:xfrm>
+          <a:prstGeom prst="rect">
+            <a:avLst/>
+          </a:prstGeom>
+        </p:spPr>
+        <p:txBody>
+          <a:bodyPr wrap="square" anchor="t"/>
+          <a:lstStyle>
+            <a:lvl1pPr marL="0" indent="0">
+              <a:buNone/>
+              <a:defRPr sz="1300" b="1" cap="all">
+                <a:solidFill>
+                  <a:schemeClr val="accent4"/>
+                </a:solidFill>
+                <a:latin typeface="Menlo"/>
+              </a:defRPr>
+            </a:lvl1pPr>
+          </a:lstStyle>
+          <a:p>
+            <a:r>
+              <a:rPr lang="en-US"/>
+              <a:t>MSACL · DS301 Deep Learning · Segment n · Lecture n</a:t>
+            </a:r>
           </a:p>
         </p:txBody>
       </p:sp>
@@ -4141,13 +2453,144 @@
 </p:sldLayout>
 </file>
 
-<file path=ppt/slideMasters/slideMaster1.xml><?xml version="1.0" encoding="utf-8"?>
+<file path=ppt/slideLayouts/slideLayout22.xml><?xml version="1.0" encoding="utf-8"?>
+<p:sldLayout xmlns:a="http://schemas.openxmlformats.org/drawingml/2006/main" xmlns:r="http://schemas.openxmlformats.org/officeDocument/2006/relationships" xmlns:p="http://schemas.openxmlformats.org/presentationml/2006/main" type="titleOnly" preserve="1">
+  <p:cSld name="Title Only">
+    <p:spTree>
+      <p:nvGrpSpPr>
+        <p:cNvPr id="1" name=""/>
+        <p:cNvGrpSpPr/>
+        <p:nvPr/>
+      </p:nvGrpSpPr>
+      <p:grpSpPr>
+        <a:xfrm>
+          <a:off x="0" y="0"/>
+          <a:ext cx="0" cy="0"/>
+          <a:chOff x="0" y="0"/>
+          <a:chExt cx="0" cy="0"/>
+        </a:xfrm>
+      </p:grpSpPr>
+      <p:sp>
+        <p:nvSpPr>
+          <p:cNvPr id="2" name="Title 1"/>
+          <p:cNvSpPr>
+            <a:spLocks noGrp="1"/>
+          </p:cNvSpPr>
+          <p:nvPr>
+            <p:ph type="title"/>
+          </p:nvPr>
+        </p:nvSpPr>
+        <p:spPr>
+          <a:xfrm>
+            <a:off x="548640" y="731520"/>
+            <a:ext cx="11091672" cy="1005840"/>
+          </a:xfrm>
+        </p:spPr>
+        <p:txBody>
+          <a:bodyPr wrap="square" anchor="t"/>
+          <a:lstStyle/>
+          <a:p>
+            <a:r>
+              <a:rPr lang="en-US" smtClean="0"/>
+              <a:t>Click to edit Master title style</a:t>
+            </a:r>
+            <a:endParaRPr lang="en-US"/>
+          </a:p>
+        </p:txBody>
+      </p:sp>
+      <p:sp>
+        <p:nvSpPr>
+          <p:cNvPr id="3" name="Eyebrow Placeholder"/>
+          <p:cNvSpPr>
+            <a:spLocks noGrp="1"/>
+          </p:cNvSpPr>
+          <p:nvPr>
+            <p:ph type="body" sz="quarter" idx="13"/>
+          </p:nvPr>
+        </p:nvSpPr>
+        <p:spPr>
+          <a:xfrm>
+            <a:off x="548640" y="320040"/>
+            <a:ext cx="11091672" cy="365760"/>
+          </a:xfrm>
+          <a:prstGeom prst="rect">
+            <a:avLst/>
+          </a:prstGeom>
+        </p:spPr>
+        <p:txBody>
+          <a:bodyPr wrap="square" anchor="t"/>
+          <a:lstStyle>
+            <a:lvl1pPr marL="0" indent="0">
+              <a:buNone/>
+              <a:defRPr sz="1300" b="1" cap="all">
+                <a:solidFill>
+                  <a:schemeClr val="accent4"/>
+                </a:solidFill>
+                <a:latin typeface="Menlo"/>
+              </a:defRPr>
+            </a:lvl1pPr>
+          </a:lstStyle>
+          <a:p>
+            <a:r>
+              <a:rPr lang="en-US"/>
+              <a:t>MSACL · DS301 Deep Learning · Segment n · Lecture n</a:t>
+            </a:r>
+          </a:p>
+        </p:txBody>
+      </p:sp>
+    </p:spTree>
+    <p:extLst>
+      <p:ext uri="{BB962C8B-B14F-4D97-AF65-F5344CB8AC3E}">
+        <p14:creationId xmlns:p14="http://schemas.microsoft.com/office/powerpoint/2010/main" val="727027711"/>
+      </p:ext>
+    </p:extLst>
+  </p:cSld>
+  <p:clrMapOvr>
+    <a:masterClrMapping/>
+  </p:clrMapOvr>
+</p:sldLayout>
+</file>
+
+<file path=ppt/slideLayouts/slideLayout23.xml><?xml version="1.0" encoding="utf-8"?>
+<p:sldLayout xmlns:a="http://schemas.openxmlformats.org/drawingml/2006/main" xmlns:r="http://schemas.openxmlformats.org/officeDocument/2006/relationships" xmlns:p="http://schemas.openxmlformats.org/presentationml/2006/main" type="blank" preserve="1">
+  <p:cSld name="Blank">
+    <p:spTree>
+      <p:nvGrpSpPr>
+        <p:cNvPr id="1" name=""/>
+        <p:cNvGrpSpPr/>
+        <p:nvPr/>
+      </p:nvGrpSpPr>
+      <p:grpSpPr>
+        <a:xfrm>
+          <a:off x="0" y="0"/>
+          <a:ext cx="0" cy="0"/>
+          <a:chOff x="0" y="0"/>
+          <a:chExt cx="0" cy="0"/>
+        </a:xfrm>
+      </p:grpSpPr>
+    </p:spTree>
+    <p:extLst>
+      <p:ext uri="{BB962C8B-B14F-4D97-AF65-F5344CB8AC3E}">
+        <p14:creationId xmlns:p14="http://schemas.microsoft.com/office/powerpoint/2010/main" val="1212999818"/>
+      </p:ext>
+    </p:extLst>
+  </p:cSld>
+  <p:clrMapOvr>
+    <a:masterClrMapping/>
+  </p:clrMapOvr>
+</p:sldLayout>
+</file>
+
+<file path=ppt/slideMasters/slideMaster3.xml><?xml version="1.0" encoding="utf-8"?>
 <p:sldMaster xmlns:a="http://schemas.openxmlformats.org/drawingml/2006/main" xmlns:r="http://schemas.openxmlformats.org/officeDocument/2006/relationships" xmlns:p="http://schemas.openxmlformats.org/presentationml/2006/main">
-  <p:cSld>
+  <p:cSld name="MSACL DS301">
     <p:bg>
-      <p:bgRef idx="1001">
-        <a:schemeClr val="bg1"/>
-      </p:bgRef>
+      <p:bgPr>
+        <a:solidFill>
+          <a:schemeClr val="bg1"/>
+        </a:solidFill>
+        <a:effectLst/>
+      </p:bgPr>
     </p:bg>
     <p:spTree>
       <p:nvGrpSpPr>
@@ -4175,15 +2618,15 @@
         </p:nvSpPr>
         <p:spPr>
           <a:xfrm>
-            <a:off x="457200" y="274638"/>
-            <a:ext cx="8229600" cy="1143000"/>
-          </a:xfrm>
-          <a:prstGeom prst="rect">
-            <a:avLst/>
-          </a:prstGeom>
-        </p:spPr>
-        <p:txBody>
-          <a:bodyPr vert="horz" lIns="91440" tIns="45720" rIns="91440" bIns="45720" rtlCol="0" anchor="ctr">
+            <a:off x="548640" y="731520"/>
+            <a:ext cx="11091672" cy="1005840"/>
+          </a:xfrm>
+          <a:prstGeom prst="rect">
+            <a:avLst/>
+          </a:prstGeom>
+        </p:spPr>
+        <p:txBody>
+          <a:bodyPr vert="horz" lIns="91440" tIns="45720" rIns="91440" bIns="45720" rtlCol="0" anchor="t" wrap="square">
             <a:normAutofit/>
           </a:bodyPr>
           <a:lstStyle/>
@@ -4208,15 +2651,15 @@
         </p:nvSpPr>
         <p:spPr>
           <a:xfrm>
-            <a:off x="457200" y="1600200"/>
-            <a:ext cx="8229600" cy="4525963"/>
-          </a:xfrm>
-          <a:prstGeom prst="rect">
-            <a:avLst/>
-          </a:prstGeom>
-        </p:spPr>
-        <p:txBody>
-          <a:bodyPr vert="horz" lIns="91440" tIns="45720" rIns="91440" bIns="45720" rtlCol="0">
+            <a:off x="548640" y="1920240"/>
+            <a:ext cx="11091672" cy="4434840"/>
+          </a:xfrm>
+          <a:prstGeom prst="rect">
+            <a:avLst/>
+          </a:prstGeom>
+        </p:spPr>
+        <p:txBody>
+          <a:bodyPr vert="horz" lIns="91440" tIns="45720" rIns="91440" bIns="45720" rtlCol="0" wrap="square" anchor="t">
             <a:normAutofit/>
           </a:bodyPr>
           <a:lstStyle/>
@@ -4254,125 +2697,6 @@
               <a:rPr lang="en-US" smtClean="0"/>
               <a:t>Fifth level</a:t>
             </a:r>
-            <a:endParaRPr lang="en-US"/>
-          </a:p>
-        </p:txBody>
-      </p:sp>
-      <p:sp>
-        <p:nvSpPr>
-          <p:cNvPr id="4" name="Date Placeholder 3"/>
-          <p:cNvSpPr>
-            <a:spLocks noGrp="1"/>
-          </p:cNvSpPr>
-          <p:nvPr>
-            <p:ph type="dt" sz="half" idx="2"/>
-          </p:nvPr>
-        </p:nvSpPr>
-        <p:spPr>
-          <a:xfrm>
-            <a:off x="457200" y="6356350"/>
-            <a:ext cx="2133600" cy="365125"/>
-          </a:xfrm>
-          <a:prstGeom prst="rect">
-            <a:avLst/>
-          </a:prstGeom>
-        </p:spPr>
-        <p:txBody>
-          <a:bodyPr vert="horz" lIns="91440" tIns="45720" rIns="91440" bIns="45720" rtlCol="0" anchor="ctr"/>
-          <a:lstStyle>
-            <a:lvl1pPr algn="l">
-              <a:defRPr sz="1200">
-                <a:solidFill>
-                  <a:schemeClr val="tx1">
-                    <a:tint val="75000"/>
-                  </a:schemeClr>
-                </a:solidFill>
-              </a:defRPr>
-            </a:lvl1pPr>
-          </a:lstStyle>
-          <a:p>
-            <a:fld id="{5BCAD085-E8A6-8845-BD4E-CB4CCA059FC4}" type="datetimeFigureOut">
-              <a:rPr lang="en-US" smtClean="0"/>
-              <a:t>1/27/13</a:t>
-            </a:fld>
-            <a:endParaRPr lang="en-US"/>
-          </a:p>
-        </p:txBody>
-      </p:sp>
-      <p:sp>
-        <p:nvSpPr>
-          <p:cNvPr id="5" name="Footer Placeholder 4"/>
-          <p:cNvSpPr>
-            <a:spLocks noGrp="1"/>
-          </p:cNvSpPr>
-          <p:nvPr>
-            <p:ph type="ftr" sz="quarter" idx="3"/>
-          </p:nvPr>
-        </p:nvSpPr>
-        <p:spPr>
-          <a:xfrm>
-            <a:off x="3124200" y="6356350"/>
-            <a:ext cx="2895600" cy="365125"/>
-          </a:xfrm>
-          <a:prstGeom prst="rect">
-            <a:avLst/>
-          </a:prstGeom>
-        </p:spPr>
-        <p:txBody>
-          <a:bodyPr vert="horz" lIns="91440" tIns="45720" rIns="91440" bIns="45720" rtlCol="0" anchor="ctr"/>
-          <a:lstStyle>
-            <a:lvl1pPr algn="ctr">
-              <a:defRPr sz="1200">
-                <a:solidFill>
-                  <a:schemeClr val="tx1">
-                    <a:tint val="75000"/>
-                  </a:schemeClr>
-                </a:solidFill>
-              </a:defRPr>
-            </a:lvl1pPr>
-          </a:lstStyle>
-          <a:p>
-            <a:endParaRPr lang="en-US"/>
-          </a:p>
-        </p:txBody>
-      </p:sp>
-      <p:sp>
-        <p:nvSpPr>
-          <p:cNvPr id="6" name="Slide Number Placeholder 5"/>
-          <p:cNvSpPr>
-            <a:spLocks noGrp="1"/>
-          </p:cNvSpPr>
-          <p:nvPr>
-            <p:ph type="sldNum" sz="quarter" idx="4"/>
-          </p:nvPr>
-        </p:nvSpPr>
-        <p:spPr>
-          <a:xfrm>
-            <a:off x="6553200" y="6356350"/>
-            <a:ext cx="2133600" cy="365125"/>
-          </a:xfrm>
-          <a:prstGeom prst="rect">
-            <a:avLst/>
-          </a:prstGeom>
-        </p:spPr>
-        <p:txBody>
-          <a:bodyPr vert="horz" lIns="91440" tIns="45720" rIns="91440" bIns="45720" rtlCol="0" anchor="ctr"/>
-          <a:lstStyle>
-            <a:lvl1pPr algn="r">
-              <a:defRPr sz="1200">
-                <a:solidFill>
-                  <a:schemeClr val="tx1">
-                    <a:tint val="75000"/>
-                  </a:schemeClr>
-                </a:solidFill>
-              </a:defRPr>
-            </a:lvl1pPr>
-          </a:lstStyle>
-          <a:p>
-            <a:fld id="{C1FF6DA9-008F-8B48-92A6-B652298478BF}" type="slidenum">
-              <a:rPr lang="en-US" smtClean="0"/>
-              <a:t>‹#›</a:t>
-            </a:fld>
             <a:endParaRPr lang="en-US"/>
           </a:p>
         </p:txBody>
@@ -4388,264 +2712,79 @@
   <p:sldLayoutIdLst>
     <p:sldLayoutId id="2147483649" r:id="rId1"/>
     <p:sldLayoutId id="2147483650" r:id="rId2"/>
-    <p:sldLayoutId id="2147483651" r:id="rId3"/>
-    <p:sldLayoutId id="2147483652" r:id="rId4"/>
-    <p:sldLayoutId id="2147483653" r:id="rId5"/>
-    <p:sldLayoutId id="2147483654" r:id="rId6"/>
-    <p:sldLayoutId id="2147483655" r:id="rId7"/>
-    <p:sldLayoutId id="2147483656" r:id="rId8"/>
-    <p:sldLayoutId id="2147483657" r:id="rId9"/>
-    <p:sldLayoutId id="2147483658" r:id="rId10"/>
-    <p:sldLayoutId id="2147483659" r:id="rId11"/>
+    <p:sldLayoutId id="2147483652" r:id="rId3"/>
+    <p:sldLayoutId id="2147483657" r:id="rId4"/>
+    <p:sldLayoutId id="2147483654" r:id="rId5"/>
+    <p:sldLayoutId id="2147483655" r:id="rId6"/>
   </p:sldLayoutIdLst>
   <p:txStyles>
     <p:titleStyle>
-      <a:lvl1pPr algn="ctr" defTabSz="457200" rtl="0" eaLnBrk="1" latinLnBrk="0" hangingPunct="1">
-        <a:spcBef>
-          <a:spcPct val="0"/>
-        </a:spcBef>
+      <a:lvl1pPr marL="0" indent="0">
         <a:buNone/>
-        <a:defRPr sz="4400" kern="1200">
+        <a:defRPr sz="3400" b="1">
           <a:solidFill>
             <a:schemeClr val="tx1"/>
           </a:solidFill>
-          <a:latin typeface="+mj-lt"/>
-          <a:ea typeface="+mj-ea"/>
-          <a:cs typeface="+mj-cs"/>
+          <a:latin typeface="+mn-lt"/>
         </a:defRPr>
       </a:lvl1pPr>
     </p:titleStyle>
     <p:bodyStyle>
-      <a:lvl1pPr marL="342900" indent="-342900" algn="l" defTabSz="457200" rtl="0" eaLnBrk="1" latinLnBrk="0" hangingPunct="1">
-        <a:spcBef>
-          <a:spcPct val="20000"/>
-        </a:spcBef>
+      <a:lvl1pPr marL="274638" indent="-274638">
+        <a:spcAft>
+          <a:spcPts val="1800"/>
+        </a:spcAft>
+        <a:buClr>
+          <a:schemeClr val="accent1"/>
+        </a:buClr>
         <a:buFont typeface="Arial"/>
         <a:buChar char="•"/>
-        <a:defRPr sz="3200" kern="1200">
+        <a:defRPr sz="2600">
           <a:solidFill>
             <a:schemeClr val="tx1"/>
           </a:solidFill>
           <a:latin typeface="+mn-lt"/>
-          <a:ea typeface="+mn-ea"/>
-          <a:cs typeface="+mn-cs"/>
         </a:defRPr>
       </a:lvl1pPr>
-      <a:lvl2pPr marL="742950" indent="-285750" algn="l" defTabSz="457200" rtl="0" eaLnBrk="1" latinLnBrk="0" hangingPunct="1">
-        <a:spcBef>
-          <a:spcPct val="20000"/>
-        </a:spcBef>
+      <a:lvl2pPr marL="549275" indent="-274638">
+        <a:spcAft>
+          <a:spcPts val="1400"/>
+        </a:spcAft>
+        <a:buNone/>
+        <a:defRPr sz="2100">
+          <a:solidFill>
+            <a:schemeClr val="accent4"/>
+          </a:solidFill>
+          <a:latin typeface="+mn-lt"/>
+        </a:defRPr>
+      </a:lvl2pPr>
+      <a:lvl3pPr marL="823913" indent="-274638">
+        <a:spcAft>
+          <a:spcPts val="1200"/>
+        </a:spcAft>
+        <a:buClr>
+          <a:schemeClr val="accent4"/>
+        </a:buClr>
         <a:buFont typeface="Arial"/>
         <a:buChar char="–"/>
-        <a:defRPr sz="2800" kern="1200">
+        <a:defRPr sz="1800">
+          <a:solidFill>
+            <a:schemeClr val="tx2"/>
+          </a:solidFill>
+          <a:latin typeface="+mn-lt"/>
+        </a:defRPr>
+      </a:lvl3pPr>
+    </p:bodyStyle>
+    <p:otherStyle>
+      <a:lvl1pPr marL="0" indent="0">
+        <a:buNone/>
+        <a:defRPr sz="1800">
           <a:solidFill>
             <a:schemeClr val="tx1"/>
           </a:solidFill>
           <a:latin typeface="+mn-lt"/>
-          <a:ea typeface="+mn-ea"/>
-          <a:cs typeface="+mn-cs"/>
-        </a:defRPr>
-      </a:lvl2pPr>
-      <a:lvl3pPr marL="1143000" indent="-228600" algn="l" defTabSz="457200" rtl="0" eaLnBrk="1" latinLnBrk="0" hangingPunct="1">
-        <a:spcBef>
-          <a:spcPct val="20000"/>
-        </a:spcBef>
-        <a:buFont typeface="Arial"/>
-        <a:buChar char="•"/>
-        <a:defRPr sz="2400" kern="1200">
-          <a:solidFill>
-            <a:schemeClr val="tx1"/>
-          </a:solidFill>
-          <a:latin typeface="+mn-lt"/>
-          <a:ea typeface="+mn-ea"/>
-          <a:cs typeface="+mn-cs"/>
-        </a:defRPr>
-      </a:lvl3pPr>
-      <a:lvl4pPr marL="1600200" indent="-228600" algn="l" defTabSz="457200" rtl="0" eaLnBrk="1" latinLnBrk="0" hangingPunct="1">
-        <a:spcBef>
-          <a:spcPct val="20000"/>
-        </a:spcBef>
-        <a:buFont typeface="Arial"/>
-        <a:buChar char="–"/>
-        <a:defRPr sz="2000" kern="1200">
-          <a:solidFill>
-            <a:schemeClr val="tx1"/>
-          </a:solidFill>
-          <a:latin typeface="+mn-lt"/>
-          <a:ea typeface="+mn-ea"/>
-          <a:cs typeface="+mn-cs"/>
-        </a:defRPr>
-      </a:lvl4pPr>
-      <a:lvl5pPr marL="2057400" indent="-228600" algn="l" defTabSz="457200" rtl="0" eaLnBrk="1" latinLnBrk="0" hangingPunct="1">
-        <a:spcBef>
-          <a:spcPct val="20000"/>
-        </a:spcBef>
-        <a:buFont typeface="Arial"/>
-        <a:buChar char="»"/>
-        <a:defRPr sz="2000" kern="1200">
-          <a:solidFill>
-            <a:schemeClr val="tx1"/>
-          </a:solidFill>
-          <a:latin typeface="+mn-lt"/>
-          <a:ea typeface="+mn-ea"/>
-          <a:cs typeface="+mn-cs"/>
-        </a:defRPr>
-      </a:lvl5pPr>
-      <a:lvl6pPr marL="2514600" indent="-228600" algn="l" defTabSz="457200" rtl="0" eaLnBrk="1" latinLnBrk="0" hangingPunct="1">
-        <a:spcBef>
-          <a:spcPct val="20000"/>
-        </a:spcBef>
-        <a:buFont typeface="Arial"/>
-        <a:buChar char="•"/>
-        <a:defRPr sz="2000" kern="1200">
-          <a:solidFill>
-            <a:schemeClr val="tx1"/>
-          </a:solidFill>
-          <a:latin typeface="+mn-lt"/>
-          <a:ea typeface="+mn-ea"/>
-          <a:cs typeface="+mn-cs"/>
-        </a:defRPr>
-      </a:lvl6pPr>
-      <a:lvl7pPr marL="2971800" indent="-228600" algn="l" defTabSz="457200" rtl="0" eaLnBrk="1" latinLnBrk="0" hangingPunct="1">
-        <a:spcBef>
-          <a:spcPct val="20000"/>
-        </a:spcBef>
-        <a:buFont typeface="Arial"/>
-        <a:buChar char="•"/>
-        <a:defRPr sz="2000" kern="1200">
-          <a:solidFill>
-            <a:schemeClr val="tx1"/>
-          </a:solidFill>
-          <a:latin typeface="+mn-lt"/>
-          <a:ea typeface="+mn-ea"/>
-          <a:cs typeface="+mn-cs"/>
-        </a:defRPr>
-      </a:lvl7pPr>
-      <a:lvl8pPr marL="3429000" indent="-228600" algn="l" defTabSz="457200" rtl="0" eaLnBrk="1" latinLnBrk="0" hangingPunct="1">
-        <a:spcBef>
-          <a:spcPct val="20000"/>
-        </a:spcBef>
-        <a:buFont typeface="Arial"/>
-        <a:buChar char="•"/>
-        <a:defRPr sz="2000" kern="1200">
-          <a:solidFill>
-            <a:schemeClr val="tx1"/>
-          </a:solidFill>
-          <a:latin typeface="+mn-lt"/>
-          <a:ea typeface="+mn-ea"/>
-          <a:cs typeface="+mn-cs"/>
-        </a:defRPr>
-      </a:lvl8pPr>
-      <a:lvl9pPr marL="3886200" indent="-228600" algn="l" defTabSz="457200" rtl="0" eaLnBrk="1" latinLnBrk="0" hangingPunct="1">
-        <a:spcBef>
-          <a:spcPct val="20000"/>
-        </a:spcBef>
-        <a:buFont typeface="Arial"/>
-        <a:buChar char="•"/>
-        <a:defRPr sz="2000" kern="1200">
-          <a:solidFill>
-            <a:schemeClr val="tx1"/>
-          </a:solidFill>
-          <a:latin typeface="+mn-lt"/>
-          <a:ea typeface="+mn-ea"/>
-          <a:cs typeface="+mn-cs"/>
-        </a:defRPr>
-      </a:lvl9pPr>
-    </p:bodyStyle>
-    <p:otherStyle>
-      <a:defPPr>
-        <a:defRPr lang="en-US"/>
-      </a:defPPr>
-      <a:lvl1pPr marL="0" algn="l" defTabSz="457200" rtl="0" eaLnBrk="1" latinLnBrk="0" hangingPunct="1">
-        <a:defRPr sz="1800" kern="1200">
-          <a:solidFill>
-            <a:schemeClr val="tx1"/>
-          </a:solidFill>
-          <a:latin typeface="+mn-lt"/>
-          <a:ea typeface="+mn-ea"/>
-          <a:cs typeface="+mn-cs"/>
         </a:defRPr>
       </a:lvl1pPr>
-      <a:lvl2pPr marL="457200" algn="l" defTabSz="457200" rtl="0" eaLnBrk="1" latinLnBrk="0" hangingPunct="1">
-        <a:defRPr sz="1800" kern="1200">
-          <a:solidFill>
-            <a:schemeClr val="tx1"/>
-          </a:solidFill>
-          <a:latin typeface="+mn-lt"/>
-          <a:ea typeface="+mn-ea"/>
-          <a:cs typeface="+mn-cs"/>
-        </a:defRPr>
-      </a:lvl2pPr>
-      <a:lvl3pPr marL="914400" algn="l" defTabSz="457200" rtl="0" eaLnBrk="1" latinLnBrk="0" hangingPunct="1">
-        <a:defRPr sz="1800" kern="1200">
-          <a:solidFill>
-            <a:schemeClr val="tx1"/>
-          </a:solidFill>
-          <a:latin typeface="+mn-lt"/>
-          <a:ea typeface="+mn-ea"/>
-          <a:cs typeface="+mn-cs"/>
-        </a:defRPr>
-      </a:lvl3pPr>
-      <a:lvl4pPr marL="1371600" algn="l" defTabSz="457200" rtl="0" eaLnBrk="1" latinLnBrk="0" hangingPunct="1">
-        <a:defRPr sz="1800" kern="1200">
-          <a:solidFill>
-            <a:schemeClr val="tx1"/>
-          </a:solidFill>
-          <a:latin typeface="+mn-lt"/>
-          <a:ea typeface="+mn-ea"/>
-          <a:cs typeface="+mn-cs"/>
-        </a:defRPr>
-      </a:lvl4pPr>
-      <a:lvl5pPr marL="1828800" algn="l" defTabSz="457200" rtl="0" eaLnBrk="1" latinLnBrk="0" hangingPunct="1">
-        <a:defRPr sz="1800" kern="1200">
-          <a:solidFill>
-            <a:schemeClr val="tx1"/>
-          </a:solidFill>
-          <a:latin typeface="+mn-lt"/>
-          <a:ea typeface="+mn-ea"/>
-          <a:cs typeface="+mn-cs"/>
-        </a:defRPr>
-      </a:lvl5pPr>
-      <a:lvl6pPr marL="2286000" algn="l" defTabSz="457200" rtl="0" eaLnBrk="1" latinLnBrk="0" hangingPunct="1">
-        <a:defRPr sz="1800" kern="1200">
-          <a:solidFill>
-            <a:schemeClr val="tx1"/>
-          </a:solidFill>
-          <a:latin typeface="+mn-lt"/>
-          <a:ea typeface="+mn-ea"/>
-          <a:cs typeface="+mn-cs"/>
-        </a:defRPr>
-      </a:lvl6pPr>
-      <a:lvl7pPr marL="2743200" algn="l" defTabSz="457200" rtl="0" eaLnBrk="1" latinLnBrk="0" hangingPunct="1">
-        <a:defRPr sz="1800" kern="1200">
-          <a:solidFill>
-            <a:schemeClr val="tx1"/>
-          </a:solidFill>
-          <a:latin typeface="+mn-lt"/>
-          <a:ea typeface="+mn-ea"/>
-          <a:cs typeface="+mn-cs"/>
-        </a:defRPr>
-      </a:lvl7pPr>
-      <a:lvl8pPr marL="3200400" algn="l" defTabSz="457200" rtl="0" eaLnBrk="1" latinLnBrk="0" hangingPunct="1">
-        <a:defRPr sz="1800" kern="1200">
-          <a:solidFill>
-            <a:schemeClr val="tx1"/>
-          </a:solidFill>
-          <a:latin typeface="+mn-lt"/>
-          <a:ea typeface="+mn-ea"/>
-          <a:cs typeface="+mn-cs"/>
-        </a:defRPr>
-      </a:lvl8pPr>
-      <a:lvl9pPr marL="3657600" algn="l" defTabSz="457200" rtl="0" eaLnBrk="1" latinLnBrk="0" hangingPunct="1">
-        <a:defRPr sz="1800" kern="1200">
-          <a:solidFill>
-            <a:schemeClr val="tx1"/>
-          </a:solidFill>
-          <a:latin typeface="+mn-lt"/>
-          <a:ea typeface="+mn-ea"/>
-          <a:cs typeface="+mn-cs"/>
-        </a:defRPr>
-      </a:lvl9pPr>
     </p:otherStyle>
   </p:txStyles>
 </p:sldMaster>
@@ -8633,326 +6772,6 @@
     <a:masterClrMapping/>
   </p:clrMapOvr>
 </p:sld>
-</file>
-
-<file path=ppt/theme/theme1.xml><?xml version="1.0" encoding="utf-8"?>
-<a:theme xmlns:a="http://schemas.openxmlformats.org/drawingml/2006/main" name="Office Theme">
-  <a:themeElements>
-    <a:clrScheme name="Office">
-      <a:dk1>
-        <a:sysClr val="windowText" lastClr="000000"/>
-      </a:dk1>
-      <a:lt1>
-        <a:sysClr val="window" lastClr="FFFFFF"/>
-      </a:lt1>
-      <a:dk2>
-        <a:srgbClr val="1F497D"/>
-      </a:dk2>
-      <a:lt2>
-        <a:srgbClr val="EEECE1"/>
-      </a:lt2>
-      <a:accent1>
-        <a:srgbClr val="4F81BD"/>
-      </a:accent1>
-      <a:accent2>
-        <a:srgbClr val="C0504D"/>
-      </a:accent2>
-      <a:accent3>
-        <a:srgbClr val="9BBB59"/>
-      </a:accent3>
-      <a:accent4>
-        <a:srgbClr val="8064A2"/>
-      </a:accent4>
-      <a:accent5>
-        <a:srgbClr val="4BACC6"/>
-      </a:accent5>
-      <a:accent6>
-        <a:srgbClr val="F79646"/>
-      </a:accent6>
-      <a:hlink>
-        <a:srgbClr val="0000FF"/>
-      </a:hlink>
-      <a:folHlink>
-        <a:srgbClr val="800080"/>
-      </a:folHlink>
-    </a:clrScheme>
-    <a:fontScheme name="Office">
-      <a:majorFont>
-        <a:latin typeface="Calibri"/>
-        <a:ea typeface=""/>
-        <a:cs typeface=""/>
-        <a:font script="Jpan" typeface="ＭＳ Ｐゴシック"/>
-        <a:font script="Hang" typeface="맑은 고딕"/>
-        <a:font script="Hans" typeface="宋体"/>
-        <a:font script="Hant" typeface="新細明體"/>
-        <a:font script="Arab" typeface="Times New Roman"/>
-        <a:font script="Hebr" typeface="Times New Roman"/>
-        <a:font script="Thai" typeface="Angsana New"/>
-        <a:font script="Ethi" typeface="Nyala"/>
-        <a:font script="Beng" typeface="Vrinda"/>
-        <a:font script="Gujr" typeface="Shruti"/>
-        <a:font script="Khmr" typeface="MoolBoran"/>
-        <a:font script="Knda" typeface="Tunga"/>
-        <a:font script="Guru" typeface="Raavi"/>
-        <a:font script="Cans" typeface="Euphemia"/>
-        <a:font script="Cher" typeface="Plantagenet Cherokee"/>
-        <a:font script="Yiii" typeface="Microsoft Yi Baiti"/>
-        <a:font script="Tibt" typeface="Microsoft Himalaya"/>
-        <a:font script="Thaa" typeface="MV Boli"/>
-        <a:font script="Deva" typeface="Mangal"/>
-        <a:font script="Telu" typeface="Gautami"/>
-        <a:font script="Taml" typeface="Latha"/>
-        <a:font script="Syrc" typeface="Estrangelo Edessa"/>
-        <a:font script="Orya" typeface="Kalinga"/>
-        <a:font script="Mlym" typeface="Kartika"/>
-        <a:font script="Laoo" typeface="DokChampa"/>
-        <a:font script="Sinh" typeface="Iskoola Pota"/>
-        <a:font script="Mong" typeface="Mongolian Baiti"/>
-        <a:font script="Viet" typeface="Times New Roman"/>
-        <a:font script="Uigh" typeface="Microsoft Uighur"/>
-        <a:font script="Geor" typeface="Sylfaen"/>
-      </a:majorFont>
-      <a:minorFont>
-        <a:latin typeface="Calibri"/>
-        <a:ea typeface=""/>
-        <a:cs typeface=""/>
-        <a:font script="Jpan" typeface="ＭＳ Ｐゴシック"/>
-        <a:font script="Hang" typeface="맑은 고딕"/>
-        <a:font script="Hans" typeface="宋体"/>
-        <a:font script="Hant" typeface="新細明體"/>
-        <a:font script="Arab" typeface="Arial"/>
-        <a:font script="Hebr" typeface="Arial"/>
-        <a:font script="Thai" typeface="Cordia New"/>
-        <a:font script="Ethi" typeface="Nyala"/>
-        <a:font script="Beng" typeface="Vrinda"/>
-        <a:font script="Gujr" typeface="Shruti"/>
-        <a:font script="Khmr" typeface="DaunPenh"/>
-        <a:font script="Knda" typeface="Tunga"/>
-        <a:font script="Guru" typeface="Raavi"/>
-        <a:font script="Cans" typeface="Euphemia"/>
-        <a:font script="Cher" typeface="Plantagenet Cherokee"/>
-        <a:font script="Yiii" typeface="Microsoft Yi Baiti"/>
-        <a:font script="Tibt" typeface="Microsoft Himalaya"/>
-        <a:font script="Thaa" typeface="MV Boli"/>
-        <a:font script="Deva" typeface="Mangal"/>
-        <a:font script="Telu" typeface="Gautami"/>
-        <a:font script="Taml" typeface="Latha"/>
-        <a:font script="Syrc" typeface="Estrangelo Edessa"/>
-        <a:font script="Orya" typeface="Kalinga"/>
-        <a:font script="Mlym" typeface="Kartika"/>
-        <a:font script="Laoo" typeface="DokChampa"/>
-        <a:font script="Sinh" typeface="Iskoola Pota"/>
-        <a:font script="Mong" typeface="Mongolian Baiti"/>
-        <a:font script="Viet" typeface="Arial"/>
-        <a:font script="Uigh" typeface="Microsoft Uighur"/>
-        <a:font script="Geor" typeface="Sylfaen"/>
-      </a:minorFont>
-    </a:fontScheme>
-    <a:fmtScheme name="Office">
-      <a:fillStyleLst>
-        <a:solidFill>
-          <a:schemeClr val="phClr"/>
-        </a:solidFill>
-        <a:gradFill rotWithShape="1">
-          <a:gsLst>
-            <a:gs pos="0">
-              <a:schemeClr val="phClr">
-                <a:tint val="50000"/>
-                <a:satMod val="300000"/>
-              </a:schemeClr>
-            </a:gs>
-            <a:gs pos="35000">
-              <a:schemeClr val="phClr">
-                <a:tint val="37000"/>
-                <a:satMod val="300000"/>
-              </a:schemeClr>
-            </a:gs>
-            <a:gs pos="100000">
-              <a:schemeClr val="phClr">
-                <a:tint val="15000"/>
-                <a:satMod val="350000"/>
-              </a:schemeClr>
-            </a:gs>
-          </a:gsLst>
-          <a:lin ang="16200000" scaled="1"/>
-        </a:gradFill>
-        <a:gradFill rotWithShape="1">
-          <a:gsLst>
-            <a:gs pos="0">
-              <a:schemeClr val="phClr">
-                <a:tint val="100000"/>
-                <a:shade val="100000"/>
-                <a:satMod val="130000"/>
-              </a:schemeClr>
-            </a:gs>
-            <a:gs pos="100000">
-              <a:schemeClr val="phClr">
-                <a:tint val="50000"/>
-                <a:shade val="100000"/>
-                <a:satMod val="350000"/>
-              </a:schemeClr>
-            </a:gs>
-          </a:gsLst>
-          <a:lin ang="16200000" scaled="0"/>
-        </a:gradFill>
-      </a:fillStyleLst>
-      <a:lnStyleLst>
-        <a:ln w="9525" cap="flat" cmpd="sng" algn="ctr">
-          <a:solidFill>
-            <a:schemeClr val="phClr">
-              <a:shade val="95000"/>
-              <a:satMod val="105000"/>
-            </a:schemeClr>
-          </a:solidFill>
-          <a:prstDash val="solid"/>
-        </a:ln>
-        <a:ln w="25400" cap="flat" cmpd="sng" algn="ctr">
-          <a:solidFill>
-            <a:schemeClr val="phClr"/>
-          </a:solidFill>
-          <a:prstDash val="solid"/>
-        </a:ln>
-        <a:ln w="38100" cap="flat" cmpd="sng" algn="ctr">
-          <a:solidFill>
-            <a:schemeClr val="phClr"/>
-          </a:solidFill>
-          <a:prstDash val="solid"/>
-        </a:ln>
-      </a:lnStyleLst>
-      <a:effectStyleLst>
-        <a:effectStyle>
-          <a:effectLst>
-            <a:outerShdw blurRad="40000" dist="20000" dir="5400000" rotWithShape="0">
-              <a:srgbClr val="000000">
-                <a:alpha val="38000"/>
-              </a:srgbClr>
-            </a:outerShdw>
-          </a:effectLst>
-        </a:effectStyle>
-        <a:effectStyle>
-          <a:effectLst>
-            <a:outerShdw blurRad="40000" dist="23000" dir="5400000" rotWithShape="0">
-              <a:srgbClr val="000000">
-                <a:alpha val="35000"/>
-              </a:srgbClr>
-            </a:outerShdw>
-          </a:effectLst>
-        </a:effectStyle>
-        <a:effectStyle>
-          <a:effectLst>
-            <a:outerShdw blurRad="40000" dist="23000" dir="5400000" rotWithShape="0">
-              <a:srgbClr val="000000">
-                <a:alpha val="35000"/>
-              </a:srgbClr>
-            </a:outerShdw>
-          </a:effectLst>
-          <a:scene3d>
-            <a:camera prst="orthographicFront">
-              <a:rot lat="0" lon="0" rev="0"/>
-            </a:camera>
-            <a:lightRig rig="threePt" dir="t">
-              <a:rot lat="0" lon="0" rev="1200000"/>
-            </a:lightRig>
-          </a:scene3d>
-          <a:sp3d>
-            <a:bevelT w="63500" h="25400"/>
-          </a:sp3d>
-        </a:effectStyle>
-      </a:effectStyleLst>
-      <a:bgFillStyleLst>
-        <a:solidFill>
-          <a:schemeClr val="phClr"/>
-        </a:solidFill>
-        <a:gradFill rotWithShape="1">
-          <a:gsLst>
-            <a:gs pos="0">
-              <a:schemeClr val="phClr">
-                <a:tint val="40000"/>
-                <a:satMod val="350000"/>
-              </a:schemeClr>
-            </a:gs>
-            <a:gs pos="40000">
-              <a:schemeClr val="phClr">
-                <a:tint val="45000"/>
-                <a:shade val="99000"/>
-                <a:satMod val="350000"/>
-              </a:schemeClr>
-            </a:gs>
-            <a:gs pos="100000">
-              <a:schemeClr val="phClr">
-                <a:shade val="20000"/>
-                <a:satMod val="255000"/>
-              </a:schemeClr>
-            </a:gs>
-          </a:gsLst>
-          <a:path path="circle">
-            <a:fillToRect l="50000" t="-80000" r="50000" b="180000"/>
-          </a:path>
-        </a:gradFill>
-        <a:gradFill rotWithShape="1">
-          <a:gsLst>
-            <a:gs pos="0">
-              <a:schemeClr val="phClr">
-                <a:tint val="80000"/>
-                <a:satMod val="300000"/>
-              </a:schemeClr>
-            </a:gs>
-            <a:gs pos="100000">
-              <a:schemeClr val="phClr">
-                <a:shade val="30000"/>
-                <a:satMod val="200000"/>
-              </a:schemeClr>
-            </a:gs>
-          </a:gsLst>
-          <a:path path="circle">
-            <a:fillToRect l="50000" t="50000" r="50000" b="50000"/>
-          </a:path>
-        </a:gradFill>
-      </a:bgFillStyleLst>
-    </a:fmtScheme>
-  </a:themeElements>
-  <a:objectDefaults>
-    <a:spDef>
-      <a:spPr/>
-      <a:bodyPr/>
-      <a:lstStyle/>
-      <a:style>
-        <a:lnRef idx="1">
-          <a:schemeClr val="accent1"/>
-        </a:lnRef>
-        <a:fillRef idx="3">
-          <a:schemeClr val="accent1"/>
-        </a:fillRef>
-        <a:effectRef idx="2">
-          <a:schemeClr val="accent1"/>
-        </a:effectRef>
-        <a:fontRef idx="minor">
-          <a:schemeClr val="lt1"/>
-        </a:fontRef>
-      </a:style>
-    </a:spDef>
-    <a:lnDef>
-      <a:spPr/>
-      <a:bodyPr/>
-      <a:lstStyle/>
-      <a:style>
-        <a:lnRef idx="2">
-          <a:schemeClr val="accent1"/>
-        </a:lnRef>
-        <a:fillRef idx="0">
-          <a:schemeClr val="accent1"/>
-        </a:fillRef>
-        <a:effectRef idx="1">
-          <a:schemeClr val="accent1"/>
-        </a:effectRef>
-        <a:fontRef idx="minor">
-          <a:schemeClr val="tx1"/>
-        </a:fontRef>
-      </a:style>
-    </a:lnDef>
-  </a:objectDefaults>
-  <a:extraClrSchemeLst/>
-</a:theme>
 </file>
 
 <file path=ppt/theme/theme2.xml><?xml version="1.0" encoding="utf-8"?>
@@ -9273,4 +7092,324 @@
   </a:objectDefaults>
   <a:extraClrSchemeLst/>
 </a:theme>
+</file>
+
+<file path=ppt/theme/theme4.xml><?xml version="1.0" encoding="utf-8"?>
+<a:theme xmlns:a="http://schemas.openxmlformats.org/drawingml/2006/main" name="MSACL DS301">
+  <a:themeElements>
+    <a:clrScheme name="MSACL DS301">
+      <a:dk1>
+        <a:srgbClr val="1B2025"/>
+      </a:dk1>
+      <a:lt1>
+        <a:srgbClr val="FBFBF8"/>
+      </a:lt1>
+      <a:dk2>
+        <a:srgbClr val="3D444C"/>
+      </a:dk2>
+      <a:lt2>
+        <a:srgbClr val="E3F0EF"/>
+      </a:lt2>
+      <a:accent1>
+        <a:srgbClr val="0E7C7B"/>
+      </a:accent1>
+      <a:accent2>
+        <a:srgbClr val="E09E2F"/>
+      </a:accent2>
+      <a:accent3>
+        <a:srgbClr val="C4534F"/>
+      </a:accent3>
+      <a:accent4>
+        <a:srgbClr val="8A9099"/>
+      </a:accent4>
+      <a:accent5>
+        <a:srgbClr val="A9721A"/>
+      </a:accent5>
+      <a:accent6>
+        <a:srgbClr val="D9D9D2"/>
+      </a:accent6>
+      <a:hlink>
+        <a:srgbClr val="0E7C7B"/>
+      </a:hlink>
+      <a:folHlink>
+        <a:srgbClr val="A9721A"/>
+      </a:folHlink>
+    </a:clrScheme>
+    <a:fontScheme name="MSACL DS301">
+      <a:majorFont>
+        <a:latin typeface="Avenir Next"/>
+        <a:ea typeface=""/>
+        <a:cs typeface=""/>
+        <a:font script="Jpan" typeface="ＭＳ Ｐゴシック"/>
+        <a:font script="Hang" typeface="맑은 고딕"/>
+        <a:font script="Hans" typeface="宋体"/>
+        <a:font script="Hant" typeface="新細明體"/>
+        <a:font script="Arab" typeface="Times New Roman"/>
+        <a:font script="Hebr" typeface="Times New Roman"/>
+        <a:font script="Thai" typeface="Angsana New"/>
+        <a:font script="Ethi" typeface="Nyala"/>
+        <a:font script="Beng" typeface="Vrinda"/>
+        <a:font script="Gujr" typeface="Shruti"/>
+        <a:font script="Khmr" typeface="MoolBoran"/>
+        <a:font script="Knda" typeface="Tunga"/>
+        <a:font script="Guru" typeface="Raavi"/>
+        <a:font script="Cans" typeface="Euphemia"/>
+        <a:font script="Cher" typeface="Plantagenet Cherokee"/>
+        <a:font script="Yiii" typeface="Microsoft Yi Baiti"/>
+        <a:font script="Tibt" typeface="Microsoft Himalaya"/>
+        <a:font script="Thaa" typeface="MV Boli"/>
+        <a:font script="Deva" typeface="Mangal"/>
+        <a:font script="Telu" typeface="Gautami"/>
+        <a:font script="Taml" typeface="Latha"/>
+        <a:font script="Syrc" typeface="Estrangelo Edessa"/>
+        <a:font script="Orya" typeface="Kalinga"/>
+        <a:font script="Mlym" typeface="Kartika"/>
+        <a:font script="Laoo" typeface="DokChampa"/>
+        <a:font script="Sinh" typeface="Iskoola Pota"/>
+        <a:font script="Mong" typeface="Mongolian Baiti"/>
+        <a:font script="Viet" typeface="Times New Roman"/>
+        <a:font script="Uigh" typeface="Microsoft Uighur"/>
+        <a:font script="Geor" typeface="Sylfaen"/>
+      </a:majorFont>
+      <a:minorFont>
+        <a:latin typeface="Avenir Next"/>
+        <a:ea typeface=""/>
+        <a:cs typeface=""/>
+        <a:font script="Jpan" typeface="ＭＳ Ｐゴシック"/>
+        <a:font script="Hang" typeface="맑은 고딕"/>
+        <a:font script="Hans" typeface="宋体"/>
+        <a:font script="Hant" typeface="新細明體"/>
+        <a:font script="Arab" typeface="Arial"/>
+        <a:font script="Hebr" typeface="Arial"/>
+        <a:font script="Thai" typeface="Cordia New"/>
+        <a:font script="Ethi" typeface="Nyala"/>
+        <a:font script="Beng" typeface="Vrinda"/>
+        <a:font script="Gujr" typeface="Shruti"/>
+        <a:font script="Khmr" typeface="DaunPenh"/>
+        <a:font script="Knda" typeface="Tunga"/>
+        <a:font script="Guru" typeface="Raavi"/>
+        <a:font script="Cans" typeface="Euphemia"/>
+        <a:font script="Cher" typeface="Plantagenet Cherokee"/>
+        <a:font script="Yiii" typeface="Microsoft Yi Baiti"/>
+        <a:font script="Tibt" typeface="Microsoft Himalaya"/>
+        <a:font script="Thaa" typeface="MV Boli"/>
+        <a:font script="Deva" typeface="Mangal"/>
+        <a:font script="Telu" typeface="Gautami"/>
+        <a:font script="Taml" typeface="Latha"/>
+        <a:font script="Syrc" typeface="Estrangelo Edessa"/>
+        <a:font script="Orya" typeface="Kalinga"/>
+        <a:font script="Mlym" typeface="Kartika"/>
+        <a:font script="Laoo" typeface="DokChampa"/>
+        <a:font script="Sinh" typeface="Iskoola Pota"/>
+        <a:font script="Mong" typeface="Mongolian Baiti"/>
+        <a:font script="Viet" typeface="Arial"/>
+        <a:font script="Uigh" typeface="Microsoft Uighur"/>
+        <a:font script="Geor" typeface="Sylfaen"/>
+      </a:minorFont>
+    </a:fontScheme>
+    <a:fmtScheme name="Office">
+      <a:fillStyleLst>
+        <a:solidFill>
+          <a:schemeClr val="phClr"/>
+        </a:solidFill>
+        <a:gradFill rotWithShape="1">
+          <a:gsLst>
+            <a:gs pos="0">
+              <a:schemeClr val="phClr">
+                <a:tint val="50000"/>
+                <a:satMod val="300000"/>
+              </a:schemeClr>
+            </a:gs>
+            <a:gs pos="35000">
+              <a:schemeClr val="phClr">
+                <a:tint val="37000"/>
+                <a:satMod val="300000"/>
+              </a:schemeClr>
+            </a:gs>
+            <a:gs pos="100000">
+              <a:schemeClr val="phClr">
+                <a:tint val="15000"/>
+                <a:satMod val="350000"/>
+              </a:schemeClr>
+            </a:gs>
+          </a:gsLst>
+          <a:lin ang="16200000" scaled="1"/>
+        </a:gradFill>
+        <a:gradFill rotWithShape="1">
+          <a:gsLst>
+            <a:gs pos="0">
+              <a:schemeClr val="phClr">
+                <a:tint val="100000"/>
+                <a:shade val="100000"/>
+                <a:satMod val="130000"/>
+              </a:schemeClr>
+            </a:gs>
+            <a:gs pos="100000">
+              <a:schemeClr val="phClr">
+                <a:tint val="50000"/>
+                <a:shade val="100000"/>
+                <a:satMod val="350000"/>
+              </a:schemeClr>
+            </a:gs>
+          </a:gsLst>
+          <a:lin ang="16200000" scaled="0"/>
+        </a:gradFill>
+      </a:fillStyleLst>
+      <a:lnStyleLst>
+        <a:ln w="9525" cap="flat" cmpd="sng" algn="ctr">
+          <a:solidFill>
+            <a:schemeClr val="phClr">
+              <a:shade val="95000"/>
+              <a:satMod val="105000"/>
+            </a:schemeClr>
+          </a:solidFill>
+          <a:prstDash val="solid"/>
+        </a:ln>
+        <a:ln w="25400" cap="flat" cmpd="sng" algn="ctr">
+          <a:solidFill>
+            <a:schemeClr val="phClr"/>
+          </a:solidFill>
+          <a:prstDash val="solid"/>
+        </a:ln>
+        <a:ln w="38100" cap="flat" cmpd="sng" algn="ctr">
+          <a:solidFill>
+            <a:schemeClr val="phClr"/>
+          </a:solidFill>
+          <a:prstDash val="solid"/>
+        </a:ln>
+      </a:lnStyleLst>
+      <a:effectStyleLst>
+        <a:effectStyle>
+          <a:effectLst>
+            <a:outerShdw blurRad="40000" dist="20000" dir="5400000" rotWithShape="0">
+              <a:srgbClr val="000000">
+                <a:alpha val="38000"/>
+              </a:srgbClr>
+            </a:outerShdw>
+          </a:effectLst>
+        </a:effectStyle>
+        <a:effectStyle>
+          <a:effectLst>
+            <a:outerShdw blurRad="40000" dist="23000" dir="5400000" rotWithShape="0">
+              <a:srgbClr val="000000">
+                <a:alpha val="35000"/>
+              </a:srgbClr>
+            </a:outerShdw>
+          </a:effectLst>
+        </a:effectStyle>
+        <a:effectStyle>
+          <a:effectLst>
+            <a:outerShdw blurRad="40000" dist="23000" dir="5400000" rotWithShape="0">
+              <a:srgbClr val="000000">
+                <a:alpha val="35000"/>
+              </a:srgbClr>
+            </a:outerShdw>
+          </a:effectLst>
+          <a:scene3d>
+            <a:camera prst="orthographicFront">
+              <a:rot lat="0" lon="0" rev="0"/>
+            </a:camera>
+            <a:lightRig rig="threePt" dir="t">
+              <a:rot lat="0" lon="0" rev="1200000"/>
+            </a:lightRig>
+          </a:scene3d>
+          <a:sp3d>
+            <a:bevelT w="63500" h="25400"/>
+          </a:sp3d>
+        </a:effectStyle>
+      </a:effectStyleLst>
+      <a:bgFillStyleLst>
+        <a:solidFill>
+          <a:schemeClr val="phClr"/>
+        </a:solidFill>
+        <a:gradFill rotWithShape="1">
+          <a:gsLst>
+            <a:gs pos="0">
+              <a:schemeClr val="phClr">
+                <a:tint val="40000"/>
+                <a:satMod val="350000"/>
+              </a:schemeClr>
+            </a:gs>
+            <a:gs pos="40000">
+              <a:schemeClr val="phClr">
+                <a:tint val="45000"/>
+                <a:shade val="99000"/>
+                <a:satMod val="350000"/>
+              </a:schemeClr>
+            </a:gs>
+            <a:gs pos="100000">
+              <a:schemeClr val="phClr">
+                <a:shade val="20000"/>
+                <a:satMod val="255000"/>
+              </a:schemeClr>
+            </a:gs>
+          </a:gsLst>
+          <a:path path="circle">
+            <a:fillToRect l="50000" t="-80000" r="50000" b="180000"/>
+          </a:path>
+        </a:gradFill>
+        <a:gradFill rotWithShape="1">
+          <a:gsLst>
+            <a:gs pos="0">
+              <a:schemeClr val="phClr">
+                <a:tint val="80000"/>
+                <a:satMod val="300000"/>
+              </a:schemeClr>
+            </a:gs>
+            <a:gs pos="100000">
+              <a:schemeClr val="phClr">
+                <a:shade val="30000"/>
+                <a:satMod val="200000"/>
+              </a:schemeClr>
+            </a:gs>
+          </a:gsLst>
+          <a:path path="circle">
+            <a:fillToRect l="50000" t="50000" r="50000" b="50000"/>
+          </a:path>
+        </a:gradFill>
+      </a:bgFillStyleLst>
+    </a:fmtScheme>
+  </a:themeElements>
+  <a:objectDefaults>
+    <a:spDef>
+      <a:spPr/>
+      <a:bodyPr/>
+      <a:lstStyle/>
+      <a:style>
+        <a:lnRef idx="1">
+          <a:schemeClr val="accent1"/>
+        </a:lnRef>
+        <a:fillRef idx="3">
+          <a:schemeClr val="accent1"/>
+        </a:fillRef>
+        <a:effectRef idx="2">
+          <a:schemeClr val="accent1"/>
+        </a:effectRef>
+        <a:fontRef idx="minor">
+          <a:schemeClr val="lt1"/>
+        </a:fontRef>
+      </a:style>
+    </a:spDef>
+    <a:lnDef>
+      <a:spPr/>
+      <a:bodyPr/>
+      <a:lstStyle/>
+      <a:style>
+        <a:lnRef idx="2">
+          <a:schemeClr val="accent1"/>
+        </a:lnRef>
+        <a:fillRef idx="0">
+          <a:schemeClr val="accent1"/>
+        </a:fillRef>
+        <a:effectRef idx="1">
+          <a:schemeClr val="accent1"/>
+        </a:effectRef>
+        <a:fontRef idx="minor">
+          <a:schemeClr val="tx1"/>
+        </a:fontRef>
+      </a:style>
+    </a:lnDef>
+  </a:objectDefaults>
+  <a:extraClrSchemeLst/>
+</a:theme>
 </file>
--- a/slides/pptx/lecture14_agents.pptx
+++ b/slides/pptx/lecture14_agents.pptx
@@ -15,6 +15,10 @@
     <p:sldId id="263" r:id="rId15"/>
     <p:sldId id="264" r:id="rId16"/>
     <p:sldId id="265" r:id="rId17"/>
+    <p:sldId id="273" r:id="rId25"/>
+    <p:sldId id="274" r:id="rId26"/>
+    <p:sldId id="275" r:id="rId27"/>
+    <p:sldId id="276" r:id="rId28"/>
     <p:sldId id="266" r:id="rId18"/>
     <p:sldId id="267" r:id="rId19"/>
     <p:sldId id="268" r:id="rId20"/>
@@ -589,10 +593,9 @@
           <a:lstStyle/>
           <a:p>
             <a:r>
-              <a:t>Zoom in on the money beat so the class sees the reason→act with real numbers (the same QC-04 row the follow-along handout uses, so it's familiar). REASON: the agent notes QC-04 breaks all three limits at once — mass error +5.6 ppm (limit ±2), resolution 22,300 (limit &gt; 30,000), TIC 3.1 (limit 8–12) — while QC-01/02/03/05/06 pass. ACT: it drafts a short QC summary that names the failed run, cites each out-of-range value, gives a recommendation (recalibrate + re-run), and explicitly asks a human to verify before results are released. Two teaching points to say out loud: (1) every number in the draft is READ from the table — nothing invented, the hallucination guardrail working; (2) the draft ends by handing the decision back to a human — the agent proposes, a person disposes. That is exactly the posture we want in a lab, and it motivates the guardrails next.</a:t>
-            </a:r>
-          </a:p>
-          <a:p/>
+              <a:t>STAGE 1, ~3 minutes. Run 'python3 stage1_chatbot.py' and let it play. THE CODE, left: point at the one thing that matters — 'messages' is rebuilt INSIDE the loop, so each call carries only the system prompt and the current question. Nothing else. WHAT HAPPENS: Q1 is answered perfectly well, because it is a definition the model already knows and needs no context. Then Q2 lands and the assistant asks which run you mean — one turn after you told it. Let that sit for a beat; it always gets a reaction, because it looks broken in a way people do not expect from something that just answered a technical question fluently. THE POINT: the raw LLM is a stateless text function. It is not 'forgetting' in any human sense — the previous turn was simply never sent. Q3 is hopeless for the same reason, plus a second one we are about to make the whole of stage 2 about: it has never seen your data. Do not fix it yet; let the room feel the gap before the next script closes it.</a:t>
+            </a:r>
+          </a:p>
         </p:txBody>
       </p:sp>
       <p:sp>
@@ -1112,6 +1115,146 @@
 </p:notes>
 </file>
 
+<file path=ppt/notesSlides/notesSlide18.xml><?xml version="1.0" encoding="utf-8"?>
+<p:notes xmlns:a="http://schemas.openxmlformats.org/drawingml/2006/main" xmlns:p="http://schemas.openxmlformats.org/presentationml/2006/main" xmlns:r="http://schemas.openxmlformats.org/officeDocument/2006/relationships">
+  <p:cSld>
+    <p:spTree>
+      <p:nvGrpSpPr>
+        <p:cNvPr id="1" name=""/>
+        <p:cNvGrpSpPr/>
+        <p:nvPr/>
+      </p:nvGrpSpPr>
+      <p:grpSpPr>
+        <a:xfrm>
+          <a:off x="0" y="0"/>
+          <a:ext cx="0" cy="0"/>
+          <a:chOff x="0" y="0"/>
+          <a:chExt cx="0" cy="0"/>
+        </a:xfrm>
+      </p:grpSpPr>
+      <p:sp>
+        <p:nvSpPr>
+          <p:cNvPr id="2" name="Slide Image Placeholder 1"/>
+          <p:cNvSpPr>
+            <a:spLocks noGrp="1"/>
+          </p:cNvSpPr>
+          <p:nvPr>
+            <p:ph type="sldImg" idx="2"/>
+          </p:nvPr>
+        </p:nvSpPr>
+        <p:spPr/>
+      </p:sp>
+      <p:sp>
+        <p:nvSpPr>
+          <p:cNvPr id="3" name="Notes Placeholder 2"/>
+          <p:cNvSpPr>
+            <a:spLocks noGrp="1"/>
+          </p:cNvSpPr>
+          <p:nvPr>
+            <p:ph type="body" idx="3" sz="quarter"/>
+          </p:nvPr>
+        </p:nvSpPr>
+        <p:spPr/>
+        <p:txBody>
+          <a:bodyPr/>
+          <a:lstStyle/>
+          <a:p>
+            <a:r>
+              <a:t>STAGE 2, ~4 minutes, and the most important slide in the demo. Run 'python3 stage2_memory.py'. THE DIFF, left: diff it against stage 1 on screen if you can — the ONLY change is that 'messages' now lives outside the loop and we append each reply to it. No new model, no framework, no new machinery. That single change is what everyone means by 'memory'. Q2 now answers QC-04 correctly; take the small win. THEN THE 💬 PREDICT BEAT, and do not skip it: before you run Q3, ask the room to predict what the bot will say QC-04's mass error is. Someone will say it cannot know. They are right — and watch what it does anyway. It produces a specific, plausible, clean number (+0.8 ppm in the run I rehearsed; the exact value varies, which is itself worth pointing out) and concludes the run PASSES. WHY THIS IS WORSE THAN STAGE 1: stage 1's failure announced itself — the assistant said it did not know. Stage 2's failure is invisible. It is fluent, it is confident, it uses the right units and the right limit, and it is completely fabricated, because the model has no access to qc_runs.csv and is doing the only thing it can do — predicting plausible next tokens (straight back to Lecture 13). Say the lab consequence out loud: QC-04 fails ALL THREE limits, and this chatbot just released it. MEMORY IS NOT KNOWLEDGE — remembering what you SAID is not the same as knowing what is TRUE. That is the sentence to leave hanging before stage 3.</a:t>
+            </a:r>
+          </a:p>
+        </p:txBody>
+      </p:sp>
+      <p:sp>
+        <p:nvSpPr>
+          <p:cNvPr id="4" name="Slide Number Placeholder 3"/>
+          <p:cNvSpPr>
+            <a:spLocks noGrp="1"/>
+          </p:cNvSpPr>
+          <p:nvPr>
+            <p:ph type="sldNum" idx="5" sz="quarter"/>
+          </p:nvPr>
+        </p:nvSpPr>
+        <p:spPr/>
+      </p:sp>
+    </p:spTree>
+  </p:cSld>
+  <p:clrMapOvr>
+    <a:masterClrMapping/>
+  </p:clrMapOvr>
+</p:notes>
+</file>
+
+<file path=ppt/notesSlides/notesSlide19.xml><?xml version="1.0" encoding="utf-8"?>
+<p:notes xmlns:a="http://schemas.openxmlformats.org/drawingml/2006/main" xmlns:p="http://schemas.openxmlformats.org/presentationml/2006/main" xmlns:r="http://schemas.openxmlformats.org/officeDocument/2006/relationships">
+  <p:cSld>
+    <p:spTree>
+      <p:nvGrpSpPr>
+        <p:cNvPr id="1" name=""/>
+        <p:cNvGrpSpPr/>
+        <p:nvPr/>
+      </p:nvGrpSpPr>
+      <p:grpSpPr>
+        <a:xfrm>
+          <a:off x="0" y="0"/>
+          <a:ext cx="0" cy="0"/>
+          <a:chOff x="0" y="0"/>
+          <a:chExt cx="0" cy="0"/>
+        </a:xfrm>
+      </p:grpSpPr>
+      <p:sp>
+        <p:nvSpPr>
+          <p:cNvPr id="2" name="Slide Image Placeholder 1"/>
+          <p:cNvSpPr>
+            <a:spLocks noGrp="1"/>
+          </p:cNvSpPr>
+          <p:nvPr>
+            <p:ph type="sldImg" idx="2"/>
+          </p:nvPr>
+        </p:nvSpPr>
+        <p:spPr/>
+      </p:sp>
+      <p:sp>
+        <p:nvSpPr>
+          <p:cNvPr id="3" name="Notes Placeholder 2"/>
+          <p:cNvSpPr>
+            <a:spLocks noGrp="1"/>
+          </p:cNvSpPr>
+          <p:nvPr>
+            <p:ph type="body" idx="3" sz="quarter"/>
+          </p:nvPr>
+        </p:nvSpPr>
+        <p:spPr/>
+        <p:txBody>
+          <a:bodyPr/>
+          <a:lstStyle/>
+          <a:p>
+            <a:r>
+              <a:t>STAGE 3, ~4 minutes, the payoff. Run 'python3 stage3_react.py'. THE LOOP, left: five lines. While the model's reply contains an Action, parse it, run that tool, append the result as an 'Observation:', and ask again. That inner loop is ReAct — the same Thought/Action/Observation pattern annotated back on slide 4, now actually executing. WALK THE TRANSCRIPT, right, one chip at a time, and narrate what is happening: THINK, the model plans to read the table — it has not done anything yet. ACT, it writes 'Action: load_csv'. OBS, the script ran that function and here is what came back: 6 runs, these columns. THINK again, ACT check_limits, OBS the real comparison against the spec limits. Only then the answer — QC-04, +5.6 ppm, out of spec on all three. THE SENTENCE THAT MATTERS, and it is on the left panel: the model only ever writes TEXT. It cannot open a file. It emits the string 'Action: load_csv' and OUR Python decides whether to honour it. That is why 'restricted tools' in the guardrails section is a real, enforceable control and not a promise — the agent literally cannot do anything you did not write a function for. Contrast the two answers side by side if you can: stage 2 said +0.8 ppm and PASSES; stage 3 says +5.6 ppm and FAILS. Same model, same question. The only difference is that one of them looked.</a:t>
+            </a:r>
+          </a:p>
+        </p:txBody>
+      </p:sp>
+      <p:sp>
+        <p:nvSpPr>
+          <p:cNvPr id="4" name="Slide Number Placeholder 3"/>
+          <p:cNvSpPr>
+            <a:spLocks noGrp="1"/>
+          </p:cNvSpPr>
+          <p:nvPr>
+            <p:ph type="sldNum" idx="5" sz="quarter"/>
+          </p:nvPr>
+        </p:nvSpPr>
+        <p:spPr/>
+      </p:sp>
+    </p:spTree>
+  </p:cSld>
+  <p:clrMapOvr>
+    <a:masterClrMapping/>
+  </p:clrMapOvr>
+</p:notes>
+</file>
+
 <file path=ppt/notesSlides/notesSlide2.xml><?xml version="1.0" encoding="utf-8"?>
 <p:notes xmlns:a="http://schemas.openxmlformats.org/drawingml/2006/main" xmlns:p="http://schemas.openxmlformats.org/presentationml/2006/main" xmlns:r="http://schemas.openxmlformats.org/officeDocument/2006/relationships">
   <p:cSld>
@@ -1157,10 +1300,149 @@
           <a:lstStyle/>
           <a:p>
             <a:r>
-              <a:t>Signpost the four stops and set expectations: this hour has almost no new machinery — an agent is the LLM you already understand, wrapped in tools and a loop — so the work is TRACING and RUNNING that loop, not math. The single skill we assess all hour is reading a ReAct transcript and labelling each step reason vs act; the follow-along and the live demo are the same loop, first on your own bot, then on a real MS-analysis task. Aim for a hands-on beat every ~8–10 minutes: the ReAct you-do (Quiz 14 Q1), the follow-along do-it-together on the handout, the guardrail you-do (Q2), the human-review you-do (Q3), and the 💬 discussion. Keep the demo brisk and narrated — every panel is one reason→act step. Reassure the room the quiz is short.</a:t>
-            </a:r>
-          </a:p>
-          <a:p/>
+              <a:t>Signpost the four stops and set expectations: this hour has almost no new machinery — an agent is the LLM you already understand, wrapped in tools and a loop — so the work is TRACING and RUNNING that loop, not math. The single skill we assess all hour is reading a ReAct transcript and labelling each step reason vs act; the follow-along and the live demo are the same loop, first on your own bot, then on real code. Aim for a hands-on beat every ~8–10 minutes: the ReAct you-do (Quiz 14 Q1), the follow-along do-it-together on the handout, the demo's 💬 predict beat before stage 2's Q3, the guardrail you-do (Q2), the human-review you-do (Q3), and the closing 💬 discussion. THE DEMO STOP (restructured 2026-09-14): it is now a step-by-step walkthrough of the three scripts in demos/lecture14_agent/, six slides over ~18 minutes — the plan, then one slide per stage, the payoff, and the two lessons. Run the scripts live alongside the slides; the slide panels use the same terminal chips the scripts print. Reassure the room the quiz is short.</a:t>
+            </a:r>
+          </a:p>
+        </p:txBody>
+      </p:sp>
+      <p:sp>
+        <p:nvSpPr>
+          <p:cNvPr id="4" name="Slide Number Placeholder 3"/>
+          <p:cNvSpPr>
+            <a:spLocks noGrp="1"/>
+          </p:cNvSpPr>
+          <p:nvPr>
+            <p:ph type="sldNum" idx="5" sz="quarter"/>
+          </p:nvPr>
+        </p:nvSpPr>
+        <p:spPr/>
+      </p:sp>
+    </p:spTree>
+  </p:cSld>
+  <p:clrMapOvr>
+    <a:masterClrMapping/>
+  </p:clrMapOvr>
+</p:notes>
+</file>
+
+<file path=ppt/notesSlides/notesSlide20.xml><?xml version="1.0" encoding="utf-8"?>
+<p:notes xmlns:a="http://schemas.openxmlformats.org/drawingml/2006/main" xmlns:p="http://schemas.openxmlformats.org/presentationml/2006/main" xmlns:r="http://schemas.openxmlformats.org/officeDocument/2006/relationships">
+  <p:cSld>
+    <p:spTree>
+      <p:nvGrpSpPr>
+        <p:cNvPr id="1" name=""/>
+        <p:cNvGrpSpPr/>
+        <p:nvPr/>
+      </p:nvGrpSpPr>
+      <p:grpSpPr>
+        <a:xfrm>
+          <a:off x="0" y="0"/>
+          <a:ext cx="0" cy="0"/>
+          <a:chOff x="0" y="0"/>
+          <a:chExt cx="0" cy="0"/>
+        </a:xfrm>
+      </p:grpSpPr>
+      <p:sp>
+        <p:nvSpPr>
+          <p:cNvPr id="2" name="Slide Image Placeholder 1"/>
+          <p:cNvSpPr>
+            <a:spLocks noGrp="1"/>
+          </p:cNvSpPr>
+          <p:nvPr>
+            <p:ph type="sldImg" idx="2"/>
+          </p:nvPr>
+        </p:nvSpPr>
+        <p:spPr/>
+      </p:sp>
+      <p:sp>
+        <p:nvSpPr>
+          <p:cNvPr id="3" name="Notes Placeholder 2"/>
+          <p:cNvSpPr>
+            <a:spLocks noGrp="1"/>
+          </p:cNvSpPr>
+          <p:nvPr>
+            <p:ph type="body" idx="3" sz="quarter"/>
+          </p:nvPr>
+        </p:nvSpPr>
+        <p:spPr/>
+        <p:txBody>
+          <a:bodyPr/>
+          <a:lstStyle/>
+          <a:p>
+            <a:r>
+              <a:t>STAGE 3 CONTINUED, ~3 minutes — the third tool, and the hand-off to a human. Having flagged QC-04, the agent calls draft_summary and produces the QC note: the failed run named, each out-of-range value with the limit it broke, a recommendation to recalibrate and re-run, and the results held. Read the closing line of the draft out loud — 'please verify before releasing any results' — because it is the whole ethic of this lecture in one sentence, and it is written into the tool, not left to the model's goodwill (tools.py, draft_summary). THREE THINGS TO POINT AT. (1) Every number in that draft traces back to an Observation; nothing is the model's recollection. (2) The draft is a DRAFT — it is explicitly marked for human review, which is the human-review guardrail arriving on its own rather than being bolted on. (3) Compare with the follow-along earlier in the hour: some bots in the room invented a value from the pasted table. This one cannot, because it is reading the file. Then move to the two lessons and on to the guardrails section, which this demo has now motivated rather than asserted.</a:t>
+            </a:r>
+          </a:p>
+        </p:txBody>
+      </p:sp>
+      <p:sp>
+        <p:nvSpPr>
+          <p:cNvPr id="4" name="Slide Number Placeholder 3"/>
+          <p:cNvSpPr>
+            <a:spLocks noGrp="1"/>
+          </p:cNvSpPr>
+          <p:nvPr>
+            <p:ph type="sldNum" idx="5" sz="quarter"/>
+          </p:nvPr>
+        </p:nvSpPr>
+        <p:spPr/>
+      </p:sp>
+    </p:spTree>
+  </p:cSld>
+  <p:clrMapOvr>
+    <a:masterClrMapping/>
+  </p:clrMapOvr>
+</p:notes>
+</file>
+
+<file path=ppt/notesSlides/notesSlide21.xml><?xml version="1.0" encoding="utf-8"?>
+<p:notes xmlns:a="http://schemas.openxmlformats.org/drawingml/2006/main" xmlns:p="http://schemas.openxmlformats.org/presentationml/2006/main" xmlns:r="http://schemas.openxmlformats.org/officeDocument/2006/relationships">
+  <p:cSld>
+    <p:spTree>
+      <p:nvGrpSpPr>
+        <p:cNvPr id="1" name=""/>
+        <p:cNvGrpSpPr/>
+        <p:nvPr/>
+      </p:nvGrpSpPr>
+      <p:grpSpPr>
+        <a:xfrm>
+          <a:off x="0" y="0"/>
+          <a:ext cx="0" cy="0"/>
+          <a:chOff x="0" y="0"/>
+          <a:chExt cx="0" cy="0"/>
+        </a:xfrm>
+      </p:grpSpPr>
+      <p:sp>
+        <p:nvSpPr>
+          <p:cNvPr id="2" name="Slide Image Placeholder 1"/>
+          <p:cNvSpPr>
+            <a:spLocks noGrp="1"/>
+          </p:cNvSpPr>
+          <p:nvPr>
+            <p:ph type="sldImg" idx="2"/>
+          </p:nvPr>
+        </p:nvSpPr>
+        <p:spPr/>
+      </p:sp>
+      <p:sp>
+        <p:nvSpPr>
+          <p:cNvPr id="3" name="Notes Placeholder 2"/>
+          <p:cNvSpPr>
+            <a:spLocks noGrp="1"/>
+          </p:cNvSpPr>
+          <p:nvPr>
+            <p:ph type="body" idx="3" sz="quarter"/>
+          </p:nvPr>
+        </p:nvSpPr>
+        <p:spPr/>
+        <p:txBody>
+          <a:bodyPr/>
+          <a:lstStyle/>
+          <a:p>
+            <a:r>
+              <a:t>~3 minutes, and this slide is the bridge into the guardrails section — it turns the demo from a nice trick into two transferable rules. LESSON 1, the script owns the tools. Worth labouring because it is counter-intuitive: people assume an agent 'has access' to their files. It does not. It produces a string that looks like a function call, and a piece of ordinary Python you wrote decides whether to execute it. Everything the agent can do is the union of the functions in tools.py — three, in this demo, all read-only. So when the next section says 'restricted tools' is a guardrail, they have already watched the mechanism that makes it enforceable. LESSON 2, the context defines the world, and this one comes from a real bug in this very demo that is worth telling as a story. The first version's system prompt listed the three TOOLS but never named a single FILE. So when it was asked about QC-04, the model had nothing to put in 'Action Input' except the run id — and the script dutifully tried to open a file called 'QC-04' and crashed. The model was not being stupid; we never told it what existed. The fix was to put an inventory of the real data files into the system prompt, generated by reading the directory so it cannot drift. THE RULE: an agent that has to guess will guess. When you deploy one, the first question is not 'which model?' but 'does its context actually describe the world you want it to act in?'. Note for the curious: the demo now also survives a guessed filename, an unknown tool name and a runaway loop — belt and braces, so it cannot die mid-room — but the real fix was the context.</a:t>
+            </a:r>
+          </a:p>
         </p:txBody>
       </p:sp>
       <p:sp>
@@ -1583,10 +1865,9 @@
           <a:lstStyle/>
           <a:p>
             <a:r>
-              <a:t>The set piece of the hour: watch a REAL agent do the ReAct loop on real MS data, not a toy transcript. The assistant is pointed at a QC/spectra CSV derived from the course datasets (the same Lab 2/4 style data), and it reads the file, runs the analysis, plots, flags any anomaly, and drafts a QC summary — with the instructor narrating each reason→act step as it happens, tying every action back to the ReAct pattern the room just labelled. Tooling plan (state it briefly): PRIMARY is the instructor's Claude Code as a live agent; ALTERNATIVE is the Bedrock API if Claude Code is unavailable; FALLBACK is a pre-recorded run so the demo never fails live. Keep narrating the loop out loud — "here it REASONS, now it ACTS by running code, here's the OBSERVATION" — so the abstract pattern becomes concrete.</a:t>
-            </a:r>
-          </a:p>
-          <a:p/>
+              <a:t>PART THREE, ~18 minutes, and as of 2026-09-14 it is a STEP-BY-STEP WALKTHROUGH of the three scripts in demos/lecture14_agent/ rather than a storyboard of a single finished agent. The reason is that the teaching value is in the DIFF: each script adds exactly one idea, and each one fails in a NEW way until the last. Run them live in order — 'python3 stage1_chatbot.py', then stage2, then stage3 — with the deck slide for each stage on screen beside the terminal; the slide panels deliberately use the same YOU / BOT / OBS / THINK / ACT chips the scripts print, so the room can follow either. BEFORE YOU START: export your ANTHROPIC_API_KEY, and run all three once so you know what you will get — stages 1 and 2 hallucinate the Q3 number and the exact wording varies. Keep a saved transcript as the fallback ('python3 stage3_react.py | tee transcript.txt' with FORCE_COLOR=1 keeps the colour) so the demo never fails live. The whole arc in one sentence, worth saying before you run anything: a chatbot forgets, a chatbot with memory confidently makes things up, and only an agent with TOOLS answers from your actual file.</a:t>
+            </a:r>
+          </a:p>
         </p:txBody>
       </p:sp>
       <p:sp>
@@ -1654,10 +1935,9 @@
           <a:lstStyle/>
           <a:p>
             <a:r>
-              <a:t>The storyboard so the room knows what's coming and can map each step to the ReAct loop. Five beats: READ (open the CSV — an Action; the Thought before it: "I need the data first"), ANALYZE (run the limit checks and stats), PLOT (draw the spectra or QC trends), FLAG (mark the out-of-range run), and DRAFT (write a QC summary for a human to review). Narrate each as reason→act as the agent runs. Keep the room's hands in it: just before the FLAG beat, pause 30 seconds and have everyone PREDICT which run the agent will flag (they've already seen the QC-04 row on the follow-along handout), then run it and check the prediction — a quick hands-on beat inside the demo stretch. Emphasise two things the room should watch for: the agent shows its reasoning before each tool call (that's the ReAct transcript, live), and its final output is a DRAFT for review, never a released result — which sets up the guardrails stop. Restate the tooling plan: primary Claude Code, alternative Bedrock, fallback recording. Next slide, the flag→draft beat made concrete on the QC numbers. INSTRUCTOR NOTE — a ready-made, framework-free version of this demo lives in demos/lecture14_agent/, built as THREE small scripts run in order so the room sees why each piece matters: `python3 stage1_chatbot.py` (bare LLM — forgets the run we just named), `stage2_memory.py` (adds a running history — now it remembers, but INVENTS a QC number and passes a run that actually fails), and `stage3_react.py` (adds tools/ReAct — reads the file and correctly flags QC-04 OUT OF SPEC). Each file adds exactly one idea; open them side by side and diff. Uses the real Claude API (ANTHROPIC_API_KEY); the shared call is in llm.py and the tools in tools.py. An agent is just LLM + memory + tools + a loop, no magic.</a:t>
-            </a:r>
-          </a:p>
-          <a:p/>
+              <a:t>The map to keep in their heads for the next five slides — the README's own table, on screen. Read the three QUESTIONS out loud first, because they are identical in all three scripts and that is the whole experiment: Q1 asks for a CONCEPT ('what does out of spec mean?'), Q2 asks for MEMORY ('which run did I just say?'), Q3 asks for the DATA ('what is QC-04's mass error, and does it pass?'). Then the three rows. Stage 1 answers Q1 and falls over on Q2. Stage 2 fixes Q2 and falls over on Q3 — and note the failure got WORSE, not better: forgetting is obvious, inventing a number is not. Stage 3 answers all three. Point at the amber footer and say it plainly: the memory-only chatbot PASSES QC-04, the single run in the table that breaks all three limits. That is a released bad batch. Ask the room to predict, before you run anything, which stage they would have shipped.</a:t>
+            </a:r>
+          </a:p>
         </p:txBody>
       </p:sp>
       <p:sp>
@@ -2923,7 +3203,7 @@
                 </a:solidFill>
                 <a:latin typeface="Avenir Next"/>
               </a:rPr>
-              <a:t>from chatbot to agent · the ReAct reason→act loop, annotated on a transcript · a follow-along on your own bot · a live 'MS analysis assistant' · where agents fit in the lab, and the guardrails each needs</a:t>
+              <a:t>from chatbot to agent · the ReAct reason→act loop, annotated on a transcript · a follow-along on your own bot · a live build in three steps: memory, then tools · where agents fit in the lab, and the guardrails each needs</a:t>
             </a:r>
           </a:p>
         </p:txBody>
@@ -3063,7 +3343,7 @@
                 </a:solidFill>
                 <a:latin typeface="Menlo"/>
               </a:rPr>
-              <a:t>LIVE DEMO · FLAG → DRAFT, CONCRETE</a:t>
+              <a:t>LIVE DEMO · 2 OF 6 · STAGE 1</a:t>
             </a:r>
           </a:p>
         </p:txBody>
@@ -3097,29 +3377,29 @@
                 </a:solidFill>
                 <a:latin typeface="Avenir Next"/>
               </a:rPr>
-              <a:t>It finds the bad run, then drafts it up</a:t>
+              <a:t>A bare chatbot — no memory, no tools</a:t>
             </a:r>
           </a:p>
         </p:txBody>
       </p:sp>
       <p:pic>
         <p:nvPicPr>
-          <p:cNvPr id="5" name="Picture 4" descr="fig_demo_flag.png"/>
+          <p:cNvPr id="7" name="Picture 4" descr="fig_demo_stage1.png"/>
           <p:cNvPicPr>
             <a:picLocks noChangeAspect="1"/>
           </p:cNvPicPr>
           <p:nvPr/>
         </p:nvPicPr>
         <p:blipFill>
-          <a:blip r:embed="rId2"/>
+          <a:blip r:embed="rId4"/>
           <a:stretch>
             <a:fillRect/>
           </a:stretch>
         </p:blipFill>
         <p:spPr>
           <a:xfrm>
-            <a:off x="2075261" y="1828800"/>
-            <a:ext cx="8010997" cy="3358897"/>
+            <a:off x="1800098" y="1828800"/>
+            <a:ext cx="8591497" cy="3320000"/>
           </a:xfrm>
           <a:prstGeom prst="rect">
             <a:avLst/>
@@ -3185,7 +3465,7 @@
                 </a:solidFill>
                 <a:latin typeface="Avenir Next"/>
               </a:rPr>
-              <a:t>The FLAG→DRAFT beat on real numbers. REASON: QC-04 breaks all three limits (mass error +5.6 ppm vs ±2; resolution 22,300 vs &gt;30,000; TIC 3.1 vs 8–12). ACT: it drafts a summary naming the failed run, the exact out-of-range values, and a recommendation — and ends 'please verify before releasing results'. Every number is read from the table, none invented.</a:t>
+              <a:t>The message list is rebuilt from scratch every turn, so nothing carries over. Q1 answers fine. Then Q2 — 'which run did I just say?' — and it asks you which run you mean. It was told, one turn ago. A raw LLM is a stateless text function: every question starts from nothing.</a:t>
             </a:r>
           </a:p>
         </p:txBody>
@@ -3281,7 +3561,7 @@
                 </a:solidFill>
                 <a:latin typeface="Menlo"/>
               </a:rPr>
-              <a:t>WHERE AGENTS FIT · THE MAP · I-DO</a:t>
+              <a:t>LIVE DEMO · 3 OF 6 · STAGE 2 · 💬 PREDICT</a:t>
             </a:r>
           </a:p>
         </p:txBody>
@@ -3295,7 +3575,7 @@
         <p:spPr>
           <a:xfrm>
             <a:off x="548640" y="731520"/>
-            <a:ext cx="11064240" cy="1127760"/>
+            <a:ext cx="11064240" cy="1005840"/>
           </a:xfrm>
           <a:prstGeom prst="rect">
             <a:avLst/>
@@ -3315,14 +3595,14 @@
                 </a:solidFill>
                 <a:latin typeface="Avenir Next"/>
               </a:rPr>
-              <a:t>Where agents fit — and where they must not run alone</a:t>
+              <a:t>Add memory — and meet a worse failure</a:t>
             </a:r>
           </a:p>
         </p:txBody>
       </p:sp>
       <p:pic>
         <p:nvPicPr>
-          <p:cNvPr id="5" name="Picture 4" descr="fig_agents_fit.png"/>
+          <p:cNvPr id="7" name="Picture 4" descr="fig_demo_stage2.png"/>
           <p:cNvPicPr>
             <a:picLocks noChangeAspect="1"/>
           </p:cNvPicPr>
@@ -3336,8 +3616,8 @@
         </p:blipFill>
         <p:spPr>
           <a:xfrm>
-            <a:off x="2652843" y="1828800"/>
-            <a:ext cx="6855833" cy="3099816"/>
+            <a:off x="1800098" y="1828800"/>
+            <a:ext cx="8591497" cy="3320000"/>
           </a:xfrm>
           <a:prstGeom prst="rect">
             <a:avLst/>
@@ -3352,8 +3632,8 @@
         </p:nvSpPr>
         <p:spPr>
           <a:xfrm>
-            <a:off x="548640" y="5020056"/>
-            <a:ext cx="10515600" cy="1700784"/>
+            <a:off x="548640" y="5279137"/>
+            <a:ext cx="10515600" cy="1441703"/>
           </a:xfrm>
           <a:prstGeom prst="rect">
             <a:avLst/>
@@ -3403,7 +3683,7 @@
                 </a:solidFill>
                 <a:latin typeface="Avenir Next"/>
               </a:rPr>
-              <a:t>GOOD FIRST FITS (each with a check): triage (flag runs for a human), report drafting (human verifies every number), data wrangling (work on copies; spot-check + log), literature (verify each citation). MUST NOT run unsupervised: releasing a patient report, the final clinical call (R/S), deleting raw data, ordering reagents. Guardrails on every fit: human review · restricted tools · logging.</a:t>
+              <a:t>ONE change: `messages` persists and we append each reply. That single change IS memory, and Q2 now answers 'QC-04'. 💬 Before I run Q3, predict: what will it say QC-04's mass error is? It has never seen the file — so it invents a clean number (+0.8 ppm) and PASSES a run that fails all three limits. Fluent, confident, and wrong.</a:t>
             </a:r>
           </a:p>
         </p:txBody>
@@ -3499,7 +3779,7 @@
                 </a:solidFill>
                 <a:latin typeface="Menlo"/>
               </a:rPr>
-              <a:t>GUARDRAILS · FAILURE → GUARDRAIL · I-DO</a:t>
+              <a:t>LIVE DEMO · 4 OF 6 · STAGE 3</a:t>
             </a:r>
           </a:p>
         </p:txBody>
@@ -3533,14 +3813,14 @@
                 </a:solidFill>
                 <a:latin typeface="Avenir Next"/>
               </a:rPr>
-              <a:t>Each failure mode has a guardrail</a:t>
+              <a:t>Add tools — the ReAct loop closes the gap</a:t>
             </a:r>
           </a:p>
         </p:txBody>
       </p:sp>
       <p:pic>
         <p:nvPicPr>
-          <p:cNvPr id="5" name="Picture 4" descr="fig_guardrails_ido.png"/>
+          <p:cNvPr id="7" name="Picture 4" descr="fig_demo_stage3.png"/>
           <p:cNvPicPr>
             <a:picLocks noChangeAspect="1"/>
           </p:cNvPicPr>
@@ -3554,8 +3834,8 @@
         </p:blipFill>
         <p:spPr>
           <a:xfrm>
-            <a:off x="2175066" y="1828800"/>
-            <a:ext cx="7811388" cy="3358897"/>
+            <a:off x="1960616" y="1828800"/>
+            <a:ext cx="8270462" cy="3320000"/>
           </a:xfrm>
           <a:prstGeom prst="rect">
             <a:avLst/>
@@ -3621,7 +3901,7 @@
                 </a:solidFill>
                 <a:latin typeface="Avenir Next"/>
               </a:rPr>
-              <a:t>Three failures, three guardrails. FABRICATED number/citation in a summary → HUMAN REVIEW (a person verifies every number before release). Agent DELETES/overwrites raw data or orders reagents → RESTRICTED TOOLS (read-only; no write/delete/purchase without approval). A wrong result ships and no one can tell what happened → LOGGING (record every reason→act step so the run is auditable).</a:t>
+              <a:t>Now the loop: when the model writes `Action:`, OUR script runs that Python function and feeds the result back as an `Observation:`. Think → act → observe, until it can answer. Same question, grounded: load_csv → check_limits → 'QC-04 is +5.6 ppm, OUT OF SPEC on all three limits.' Every number now traces to an Observation.</a:t>
             </a:r>
           </a:p>
         </p:txBody>
@@ -3717,7 +3997,7 @@
                 </a:solidFill>
                 <a:latin typeface="Menlo"/>
               </a:rPr>
-              <a:t>GUARDRAILS · YOUR TURN (YOU-DO = Q2)</a:t>
+              <a:t>LIVE DEMO · 5 OF 6 · THE PAYOFF</a:t>
             </a:r>
           </a:p>
         </p:txBody>
@@ -3731,7 +4011,7 @@
         <p:spPr>
           <a:xfrm>
             <a:off x="548640" y="731520"/>
-            <a:ext cx="11064240" cy="1127760"/>
+            <a:ext cx="11064240" cy="1005840"/>
           </a:xfrm>
           <a:prstGeom prst="rect">
             <a:avLst/>
@@ -3751,14 +4031,14 @@
                 </a:solidFill>
                 <a:latin typeface="Avenir Next"/>
               </a:rPr>
-              <a:t>Your turn — which guardrail for which failure?</a:t>
+              <a:t>It finds the bad run, then drafts it up</a:t>
             </a:r>
           </a:p>
         </p:txBody>
       </p:sp>
       <p:pic>
         <p:nvPicPr>
-          <p:cNvPr id="5" name="Picture 4" descr="fig_guardrails_youdo.png"/>
+          <p:cNvPr id="7" name="Picture 4" descr="image.png"/>
           <p:cNvPicPr>
             <a:picLocks noChangeAspect="1"/>
           </p:cNvPicPr>
@@ -3772,8 +4052,8 @@
         </p:blipFill>
         <p:spPr>
           <a:xfrm>
-            <a:off x="2175066" y="1828800"/>
-            <a:ext cx="7811388" cy="3358897"/>
+            <a:off x="2136733" y="1828800"/>
+            <a:ext cx="7918228" cy="3320000"/>
           </a:xfrm>
           <a:prstGeom prst="rect">
             <a:avLst/>
@@ -3795,11 +4075,11 @@
             <a:avLst/>
           </a:prstGeom>
           <a:solidFill>
-            <a:srgbClr val="F1F1EC"/>
+            <a:srgbClr val="E3F0EF"/>
           </a:solidFill>
           <a:ln w="12700">
             <a:solidFill>
-              <a:srgbClr val="E09E2F"/>
+              <a:srgbClr val="0E7C7B"/>
             </a:solidFill>
           </a:ln>
           <a:effectLst/>
@@ -3826,11 +4106,11 @@
             <a:r>
               <a:rPr sz="1200" b="1" i="0">
                 <a:solidFill>
-                  <a:srgbClr val="E09E2F"/>
+                  <a:srgbClr val="0E7C7B"/>
                 </a:solidFill>
                 <a:latin typeface="Menlo"/>
               </a:rPr>
-              <a:t>CHECKPOINT · </a:t>
+              <a:t>MASS SPEC · </a:t>
             </a:r>
             <a:r>
               <a:rPr sz="1700" b="0" i="0">
@@ -3839,7 +4119,7 @@
                 </a:solidFill>
                 <a:latin typeface="Avenir Next"/>
               </a:rPr>
-              <a:t>Your turn → Quiz 14, Q2. Three NEW failures — different wording from the chart above. Match each to the ONE guardrail that prevents it (word bank: HUMAN REVIEW · RESTRICTED TOOLS · LOGGING). Then Q2(d): human review CATCHES a fabricated citation — what would make such fabrications RARER in the first place? Worked answer in the notes.</a:t>
+              <a:t>The FLAG→DRAFT beat on real numbers. QC-04 breaks all three limits: mass error +5.6 ppm (vs ±2), resolution 22,300 (vs &gt;30,000), TIC 3.1 (vs 8–12). The agent drafts a summary naming the failed run, the exact out-of-range values and a recommendation — and ends 'please verify before releasing results'. Every number read from the table, none invented.</a:t>
             </a:r>
           </a:p>
         </p:txBody>
@@ -3935,7 +4215,7 @@
                 </a:solidFill>
                 <a:latin typeface="Menlo"/>
               </a:rPr>
-              <a:t>CLINICAL REVIEW · YOUR TURN (YOU-DO = Q3)</a:t>
+              <a:t>LIVE DEMO · 6 OF 6 · WHAT MADE IT WORK</a:t>
             </a:r>
           </a:p>
         </p:txBody>
@@ -3969,14 +4249,14 @@
                 </a:solidFill>
                 <a:latin typeface="Avenir Next"/>
               </a:rPr>
-              <a:t>Your turn — what must stay human-reviewed?</a:t>
+              <a:t>Two lessons to carry into the guardrails</a:t>
             </a:r>
           </a:p>
         </p:txBody>
       </p:sp>
       <p:pic>
         <p:nvPicPr>
-          <p:cNvPr id="5" name="Picture 4" descr="fig_human_review.png"/>
+          <p:cNvPr id="7" name="Picture 4" descr="fig_demo_why.png"/>
           <p:cNvPicPr>
             <a:picLocks noChangeAspect="1"/>
           </p:cNvPicPr>
@@ -3990,8 +4270,8 @@
         </p:blipFill>
         <p:spPr>
           <a:xfrm>
-            <a:off x="1782354" y="1828800"/>
-            <a:ext cx="8596811" cy="3358897"/>
+            <a:off x="1719199" y="1828800"/>
+            <a:ext cx="8753295" cy="3320000"/>
           </a:xfrm>
           <a:prstGeom prst="rect">
             <a:avLst/>
@@ -4013,11 +4293,11 @@
             <a:avLst/>
           </a:prstGeom>
           <a:solidFill>
-            <a:srgbClr val="F1F1EC"/>
+            <a:srgbClr val="E3F0EF"/>
           </a:solidFill>
           <a:ln w="12700">
             <a:solidFill>
-              <a:srgbClr val="E09E2F"/>
+              <a:srgbClr val="0E7C7B"/>
             </a:solidFill>
           </a:ln>
           <a:effectLst/>
@@ -4044,11 +4324,11 @@
             <a:r>
               <a:rPr sz="1200" b="1" i="0">
                 <a:solidFill>
-                  <a:srgbClr val="E09E2F"/>
+                  <a:srgbClr val="0E7C7B"/>
                 </a:solidFill>
                 <a:latin typeface="Menlo"/>
               </a:rPr>
-              <a:t>CHECKPOINT · </a:t>
+              <a:t>MASS SPEC · </a:t>
             </a:r>
             <a:r>
               <a:rPr sz="1700" b="0" i="0">
@@ -4057,7 +4337,7 @@
                 </a:solidFill>
                 <a:latin typeface="Avenir Next"/>
               </a:rPr>
-              <a:t>Your turn → Quiz 14, Q3. Five steps an agent could help with — some look alike but differ. Circle the ones a qualified human must review and sign before they affect a patient: (a) HOLD a suspect run for review (b) AUTO-RELEASE runs it judges in-range (c) file the final R/S call (d) reformat the QC table (e) draft a note explaining a result. Then state the rule you used. Worked answer in the notes.</a:t>
+              <a:t>(1) The SCRIPT owns the tools. The model writes `Action: check_limits`; the Python decides whether to run it — so restricted tools is enforceable. (2) An agent only knows what its CONTEXT says exists. The system prompt lists the data files; without that, asked about QC-04 the model had nothing to pass but the run id — and the demo crashed opening a file called 'QC-04'.</a:t>
             </a:r>
           </a:p>
         </p:txBody>
@@ -4153,7 +4433,7 @@
                 </a:solidFill>
                 <a:latin typeface="Menlo"/>
               </a:rPr>
-              <a:t>WHERE AGENTS FIT · 💬 DISCUSS</a:t>
+              <a:t>WHERE AGENTS FIT · THE MAP · I-DO</a:t>
             </a:r>
           </a:p>
         </p:txBody>
@@ -4167,7 +4447,7 @@
         <p:spPr>
           <a:xfrm>
             <a:off x="548640" y="731520"/>
-            <a:ext cx="11064240" cy="1005840"/>
+            <a:ext cx="11064240" cy="1127760"/>
           </a:xfrm>
           <a:prstGeom prst="rect">
             <a:avLst/>
@@ -4187,109 +4467,35 @@
                 </a:solidFill>
                 <a:latin typeface="Avenir Next"/>
               </a:rPr>
-              <a:t>💬 Which task would you hand an agent first?</a:t>
-            </a:r>
-          </a:p>
-        </p:txBody>
-      </p:sp>
-      <p:sp>
-        <p:nvSpPr>
-          <p:cNvPr id="5" name="TextBox 4"/>
-          <p:cNvSpPr txBox="1"/>
-          <p:nvPr/>
-        </p:nvSpPr>
-        <p:spPr>
-          <a:xfrm>
-            <a:off x="548640" y="1920240"/>
-            <a:ext cx="10789920" cy="3444240"/>
-          </a:xfrm>
-          <a:prstGeom prst="rect">
-            <a:avLst/>
-          </a:prstGeom>
-          <a:noFill/>
-        </p:spPr>
-        <p:txBody>
-          <a:bodyPr wrap="square" anchor="t">
-            <a:spAutoFit/>
-          </a:bodyPr>
-          <a:lstStyle/>
-          <a:p>
-            <a:pPr>
-              <a:spcAft>
-                <a:spcPts val="1800"/>
-              </a:spcAft>
-            </a:pPr>
-            <a:r>
-              <a:rPr sz="2500" b="1" i="0">
-                <a:solidFill>
-                  <a:srgbClr val="0E7C7B"/>
-                </a:solidFill>
-                <a:latin typeface="Avenir Next"/>
-              </a:rPr>
-              <a:t>•  </a:t>
-            </a:r>
-            <a:r>
-              <a:rPr sz="2500" b="0" i="0">
-                <a:solidFill>
-                  <a:srgbClr val="1B2025"/>
-                </a:solidFill>
-                <a:latin typeface="Avenir Next"/>
-              </a:rPr>
-              <a:t>Pick ONE task from your own week you'd hand an agent first — triage, report drafting, data wrangling, or a literature scan</a:t>
-            </a:r>
-          </a:p>
-          <a:p>
-            <a:pPr>
-              <a:spcAft>
-                <a:spcPts val="1800"/>
-              </a:spcAft>
-            </a:pPr>
-            <a:r>
-              <a:rPr sz="2500" b="1" i="0">
-                <a:solidFill>
-                  <a:srgbClr val="0E7C7B"/>
-                </a:solidFill>
-                <a:latin typeface="Avenir Next"/>
-              </a:rPr>
-              <a:t>•  </a:t>
-            </a:r>
-            <a:r>
-              <a:rPr sz="2500" b="0" i="0">
-                <a:solidFill>
-                  <a:srgbClr val="1B2025"/>
-                </a:solidFill>
-                <a:latin typeface="Avenir Next"/>
-              </a:rPr>
-              <a:t>Name the ONE check that keeps it honest — a human review, a restricted (read-only) toolset, or a log you can audit</a:t>
-            </a:r>
-          </a:p>
-          <a:p>
-            <a:pPr>
-              <a:spcAft>
-                <a:spcPts val="1800"/>
-              </a:spcAft>
-            </a:pPr>
-            <a:r>
-              <a:rPr sz="2500" b="1" i="0">
-                <a:solidFill>
-                  <a:srgbClr val="0E7C7B"/>
-                </a:solidFill>
-                <a:latin typeface="Avenir Next"/>
-              </a:rPr>
-              <a:t>•  </a:t>
-            </a:r>
-            <a:r>
-              <a:rPr sz="2500" b="0" i="0">
-                <a:solidFill>
-                  <a:srgbClr val="1B2025"/>
-                </a:solidFill>
-                <a:latin typeface="Avenir Next"/>
-              </a:rPr>
-              <a:t>Say where it must stop — the point at which a human must review and sign before anything reaches a patient</a:t>
-            </a:r>
-          </a:p>
-        </p:txBody>
-      </p:sp>
+              <a:t>Where agents fit — and where they must not run alone</a:t>
+            </a:r>
+          </a:p>
+        </p:txBody>
+      </p:sp>
+      <p:pic>
+        <p:nvPicPr>
+          <p:cNvPr id="5" name="Picture 4" descr="fig_agents_fit.png"/>
+          <p:cNvPicPr>
+            <a:picLocks noChangeAspect="1"/>
+          </p:cNvPicPr>
+          <p:nvPr/>
+        </p:nvPicPr>
+        <p:blipFill>
+          <a:blip r:embed="rId2"/>
+          <a:stretch>
+            <a:fillRect/>
+          </a:stretch>
+        </p:blipFill>
+        <p:spPr>
+          <a:xfrm>
+            <a:off x="2652843" y="1828800"/>
+            <a:ext cx="6855833" cy="3099816"/>
+          </a:xfrm>
+          <a:prstGeom prst="rect">
+            <a:avLst/>
+          </a:prstGeom>
+        </p:spPr>
+      </p:pic>
       <p:sp>
         <p:nvSpPr>
           <p:cNvPr id="6" name="Rectangle 5"/>
@@ -4298,18 +4504,18 @@
         </p:nvSpPr>
         <p:spPr>
           <a:xfrm>
-            <a:off x="548640" y="5501640"/>
-            <a:ext cx="10515600" cy="923544"/>
+            <a:off x="548640" y="5020056"/>
+            <a:ext cx="10515600" cy="1700784"/>
           </a:xfrm>
           <a:prstGeom prst="rect">
             <a:avLst/>
           </a:prstGeom>
           <a:solidFill>
-            <a:srgbClr val="F1F1EC"/>
+            <a:srgbClr val="E3F0EF"/>
           </a:solidFill>
           <a:ln w="12700">
             <a:solidFill>
-              <a:srgbClr val="E09E2F"/>
+              <a:srgbClr val="0E7C7B"/>
             </a:solidFill>
           </a:ln>
           <a:effectLst/>
@@ -4336,11 +4542,11 @@
             <a:r>
               <a:rPr sz="1200" b="1" i="0">
                 <a:solidFill>
-                  <a:srgbClr val="E09E2F"/>
+                  <a:srgbClr val="0E7C7B"/>
                 </a:solidFill>
                 <a:latin typeface="Menlo"/>
               </a:rPr>
-              <a:t>PAIR · </a:t>
+              <a:t>MASS SPEC · </a:t>
             </a:r>
             <a:r>
               <a:rPr sz="1700" b="0" i="0">
@@ -4349,7 +4555,7 @@
                 </a:solidFill>
                 <a:latin typeface="Avenir Next"/>
               </a:rPr>
-              <a:t>💬 2 minutes with your neighbour: which task would you hand an agent first — and what ONE check keeps it honest? Be specific about where the agent stops and the human signs. Share-outs in the notes.</a:t>
+              <a:t>GOOD FIRST FITS (each with a check): triage (flag runs for a human), report drafting (human verifies every number), data wrangling (work on copies; spot-check + log), literature (verify each citation). MUST NOT run unsupervised: releasing a patient report, the final clinical call (R/S), deleting raw data, ordering reagents. Guardrails on every fit: human review · restricted tools · logging.</a:t>
             </a:r>
           </a:p>
         </p:txBody>
@@ -4445,7 +4651,7 @@
                 </a:solidFill>
                 <a:latin typeface="Menlo"/>
               </a:rPr>
-              <a:t>LECTURE 14 · WHAT YOU CAN DO NOW</a:t>
+              <a:t>GUARDRAILS · FAILURE → GUARDRAIL · I-DO</a:t>
             </a:r>
           </a:p>
         </p:txBody>
@@ -4479,134 +4685,35 @@
                 </a:solidFill>
                 <a:latin typeface="Avenir Next"/>
               </a:rPr>
-              <a:t>You can now…</a:t>
-            </a:r>
-          </a:p>
-        </p:txBody>
-      </p:sp>
-      <p:sp>
-        <p:nvSpPr>
-          <p:cNvPr id="5" name="TextBox 4"/>
-          <p:cNvSpPr txBox="1"/>
-          <p:nvPr/>
-        </p:nvSpPr>
-        <p:spPr>
-          <a:xfrm>
-            <a:off x="548640" y="1920240"/>
-            <a:ext cx="10789920" cy="3566159"/>
-          </a:xfrm>
-          <a:prstGeom prst="rect">
-            <a:avLst/>
-          </a:prstGeom>
-          <a:noFill/>
-        </p:spPr>
-        <p:txBody>
-          <a:bodyPr wrap="square" anchor="t">
-            <a:spAutoFit/>
-          </a:bodyPr>
-          <a:lstStyle/>
-          <a:p>
-            <a:pPr>
-              <a:spcAft>
-                <a:spcPts val="1800"/>
-              </a:spcAft>
-            </a:pPr>
-            <a:r>
-              <a:rPr sz="2100" b="1" i="0">
-                <a:solidFill>
-                  <a:srgbClr val="0E7C7B"/>
-                </a:solidFill>
-                <a:latin typeface="Avenir Next"/>
-              </a:rPr>
-              <a:t>•  </a:t>
-            </a:r>
-            <a:r>
-              <a:rPr sz="2100" b="0" i="0">
-                <a:solidFill>
-                  <a:srgbClr val="1B2025"/>
-                </a:solidFill>
-                <a:latin typeface="Avenir Next"/>
-              </a:rPr>
-              <a:t>Define an agent as LLM + tools + a reason→act loop (ReAct), and label the reasoning vs acting steps on a transcript (Quiz 14 Q1)</a:t>
-            </a:r>
-          </a:p>
-          <a:p>
-            <a:pPr>
-              <a:spcAft>
-                <a:spcPts val="1800"/>
-              </a:spcAft>
-            </a:pPr>
-            <a:r>
-              <a:rPr sz="2100" b="1" i="0">
-                <a:solidFill>
-                  <a:srgbClr val="0E7C7B"/>
-                </a:solidFill>
-                <a:latin typeface="Avenir Next"/>
-              </a:rPr>
-              <a:t>•  </a:t>
-            </a:r>
-            <a:r>
-              <a:rPr sz="2100" b="0" i="0">
-                <a:solidFill>
-                  <a:srgbClr val="1B2025"/>
-                </a:solidFill>
-                <a:latin typeface="Avenir Next"/>
-              </a:rPr>
-              <a:t>Run a simple agentic interaction yourself on a free-tier bot — a structured reason → act → check prompt (the follow-along)</a:t>
-            </a:r>
-          </a:p>
-          <a:p>
-            <a:pPr>
-              <a:spcAft>
-                <a:spcPts val="1800"/>
-              </a:spcAft>
-            </a:pPr>
-            <a:r>
-              <a:rPr sz="2100" b="1" i="0">
-                <a:solidFill>
-                  <a:srgbClr val="0E7C7B"/>
-                </a:solidFill>
-                <a:latin typeface="Avenir Next"/>
-              </a:rPr>
-              <a:t>•  </a:t>
-            </a:r>
-            <a:r>
-              <a:rPr sz="2100" b="0" i="0">
-                <a:solidFill>
-                  <a:srgbClr val="1B2025"/>
-                </a:solidFill>
-                <a:latin typeface="Avenir Next"/>
-              </a:rPr>
-              <a:t>Name where agents fit in lab workflows and the guardrail each needs — human review, restricted tools, logging (Quiz 14 Q2)</a:t>
-            </a:r>
-          </a:p>
-          <a:p>
-            <a:pPr>
-              <a:spcAft>
-                <a:spcPts val="1800"/>
-              </a:spcAft>
-            </a:pPr>
-            <a:r>
-              <a:rPr sz="2100" b="1" i="0">
-                <a:solidFill>
-                  <a:srgbClr val="0E7C7B"/>
-                </a:solidFill>
-                <a:latin typeface="Avenir Next"/>
-              </a:rPr>
-              <a:t>•  </a:t>
-            </a:r>
-            <a:r>
-              <a:rPr sz="2100" b="0" i="0">
-                <a:solidFill>
-                  <a:srgbClr val="1B2025"/>
-                </a:solidFill>
-                <a:latin typeface="Avenir Next"/>
-              </a:rPr>
-              <a:t>Say what must stay human-reviewed in a clinical workflow — anything that becomes a released result or a patient decision (Quiz 14 Q3)</a:t>
-            </a:r>
-          </a:p>
-        </p:txBody>
-      </p:sp>
+              <a:t>Each failure mode has a guardrail</a:t>
+            </a:r>
+          </a:p>
+        </p:txBody>
+      </p:sp>
+      <p:pic>
+        <p:nvPicPr>
+          <p:cNvPr id="5" name="Picture 4" descr="fig_guardrails_ido.png"/>
+          <p:cNvPicPr>
+            <a:picLocks noChangeAspect="1"/>
+          </p:cNvPicPr>
+          <p:nvPr/>
+        </p:nvPicPr>
+        <p:blipFill>
+          <a:blip r:embed="rId2"/>
+          <a:stretch>
+            <a:fillRect/>
+          </a:stretch>
+        </p:blipFill>
+        <p:spPr>
+          <a:xfrm>
+            <a:off x="2175066" y="1828800"/>
+            <a:ext cx="7811388" cy="3358897"/>
+          </a:xfrm>
+          <a:prstGeom prst="rect">
+            <a:avLst/>
+          </a:prstGeom>
+        </p:spPr>
+      </p:pic>
       <p:sp>
         <p:nvSpPr>
           <p:cNvPr id="6" name="Rectangle 5"/>
@@ -4615,18 +4722,18 @@
         </p:nvSpPr>
         <p:spPr>
           <a:xfrm>
-            <a:off x="548640" y="5623559"/>
-            <a:ext cx="10515600" cy="923544"/>
+            <a:off x="548640" y="5279137"/>
+            <a:ext cx="10515600" cy="1441703"/>
           </a:xfrm>
           <a:prstGeom prst="rect">
             <a:avLst/>
           </a:prstGeom>
           <a:solidFill>
-            <a:srgbClr val="F1F1EC"/>
+            <a:srgbClr val="E3F0EF"/>
           </a:solidFill>
           <a:ln w="12700">
             <a:solidFill>
-              <a:srgbClr val="3D444C"/>
+              <a:srgbClr val="0E7C7B"/>
             </a:solidFill>
           </a:ln>
           <a:effectLst/>
@@ -4651,13 +4758,22 @@
           <a:p>
             <a:pPr algn="ctr"/>
             <a:r>
+              <a:rPr sz="1200" b="1" i="0">
+                <a:solidFill>
+                  <a:srgbClr val="0E7C7B"/>
+                </a:solidFill>
+                <a:latin typeface="Menlo"/>
+              </a:rPr>
+              <a:t>MASS SPEC · </a:t>
+            </a:r>
+            <a:r>
               <a:rPr sz="1700" b="0" i="0">
                 <a:solidFill>
                   <a:srgbClr val="3D444C"/>
                 </a:solidFill>
                 <a:latin typeface="Avenir Next"/>
               </a:rPr>
-              <a:t>You've now worked every item on Quiz 14 live — labelling reason vs act on a transcript (Q1), matching guardrail to failure (Q2), and what stays human-reviewed (Q3) — plus a follow-along on your own bot and a live demo. Keep the sheet.</a:t>
+              <a:t>Three failures, three guardrails. FABRICATED number/citation in a summary → HUMAN REVIEW (a person verifies every number before release). Agent DELETES/overwrites raw data or orders reagents → RESTRICTED TOOLS (read-only; no write/delete/purchase without approval). A wrong result ships and no one can tell what happened → LOGGING (record every reason→act step so the run is auditable).</a:t>
             </a:r>
           </a:p>
         </p:txBody>
@@ -4753,7 +4869,7 @@
                 </a:solidFill>
                 <a:latin typeface="Menlo"/>
               </a:rPr>
-              <a:t>LECTURE 14 · NEXT — LAB 5 CAPSTONE</a:t>
+              <a:t>GUARDRAILS · YOUR TURN (YOU-DO = Q2)</a:t>
             </a:r>
           </a:p>
         </p:txBody>
@@ -4767,7 +4883,7 @@
         <p:spPr>
           <a:xfrm>
             <a:off x="548640" y="731520"/>
-            <a:ext cx="11064240" cy="1005840"/>
+            <a:ext cx="11064240" cy="1127760"/>
           </a:xfrm>
           <a:prstGeom prst="rect">
             <a:avLst/>
@@ -4787,134 +4903,35 @@
                 </a:solidFill>
                 <a:latin typeface="Avenir Next"/>
               </a:rPr>
-              <a:t>Next — the Lab 5 capstone</a:t>
-            </a:r>
-          </a:p>
-        </p:txBody>
-      </p:sp>
-      <p:sp>
-        <p:nvSpPr>
-          <p:cNvPr id="5" name="TextBox 4"/>
-          <p:cNvSpPr txBox="1"/>
-          <p:nvPr/>
-        </p:nvSpPr>
-        <p:spPr>
-          <a:xfrm>
-            <a:off x="548640" y="1920240"/>
-            <a:ext cx="10789920" cy="3749039"/>
-          </a:xfrm>
-          <a:prstGeom prst="rect">
-            <a:avLst/>
-          </a:prstGeom>
-          <a:noFill/>
-        </p:spPr>
-        <p:txBody>
-          <a:bodyPr wrap="square" anchor="t">
-            <a:spAutoFit/>
-          </a:bodyPr>
-          <a:lstStyle/>
-          <a:p>
-            <a:pPr>
-              <a:spcAft>
-                <a:spcPts val="1800"/>
-              </a:spcAft>
-            </a:pPr>
-            <a:r>
-              <a:rPr sz="2000" b="1" i="0">
-                <a:solidFill>
-                  <a:srgbClr val="0E7C7B"/>
-                </a:solidFill>
-                <a:latin typeface="Avenir Next"/>
-              </a:rPr>
-              <a:t>•  </a:t>
-            </a:r>
-            <a:r>
-              <a:rPr sz="2000" b="0" i="0">
-                <a:solidFill>
-                  <a:srgbClr val="1B2025"/>
-                </a:solidFill>
-                <a:latin typeface="Avenir Next"/>
-              </a:rPr>
-              <a:t>Pick ONE guided track: A — beat the Lab 2 spectra baseline · B — peak QC (good/bad integrations) · C — new question, same spectra (transfer learning)</a:t>
-            </a:r>
-          </a:p>
-          <a:p>
-            <a:pPr>
-              <a:spcAft>
-                <a:spcPts val="1800"/>
-              </a:spcAft>
-            </a:pPr>
-            <a:r>
-              <a:rPr sz="2000" b="1" i="0">
-                <a:solidFill>
-                  <a:srgbClr val="0E7C7B"/>
-                </a:solidFill>
-                <a:latin typeface="Avenir Next"/>
-              </a:rPr>
-              <a:t>•  </a:t>
-            </a:r>
-            <a:r>
-              <a:rPr sz="2000" b="0" i="0">
-                <a:solidFill>
-                  <a:srgbClr val="1B2025"/>
-                </a:solidFill>
-                <a:latin typeface="Avenir Next"/>
-              </a:rPr>
-              <a:t>Adapt a working pipeline, evaluate it PROPERLY — split, metrics, honest error analysis (Lectures 4 &amp; 10) — all rubric-scored</a:t>
-            </a:r>
-          </a:p>
-          <a:p>
-            <a:pPr>
-              <a:spcAft>
-                <a:spcPts val="1800"/>
-              </a:spcAft>
-            </a:pPr>
-            <a:r>
-              <a:rPr sz="2000" b="1" i="0">
-                <a:solidFill>
-                  <a:srgbClr val="0E7C7B"/>
-                </a:solidFill>
-                <a:latin typeface="Avenir Next"/>
-              </a:rPr>
-              <a:t>•  </a:t>
-            </a:r>
-            <a:r>
-              <a:rPr sz="2000" b="0" i="0">
-                <a:solidFill>
-                  <a:srgbClr val="1B2025"/>
-                </a:solidFill>
-                <a:latin typeface="Avenir Next"/>
-              </a:rPr>
-              <a:t>Complete your project one-pager: problem → data &amp; representation → architecture → validation plan → 'why not a simpler model?'</a:t>
-            </a:r>
-          </a:p>
-          <a:p>
-            <a:pPr>
-              <a:spcAft>
-                <a:spcPts val="1800"/>
-              </a:spcAft>
-            </a:pPr>
-            <a:r>
-              <a:rPr sz="2000" b="1" i="0">
-                <a:solidFill>
-                  <a:srgbClr val="0E7C7B"/>
-                </a:solidFill>
-                <a:latin typeface="Avenir Next"/>
-              </a:rPr>
-              <a:t>•  </a:t>
-            </a:r>
-            <a:r>
-              <a:rPr sz="2000" b="0" i="0">
-                <a:solidFill>
-                  <a:srgbClr val="1B2025"/>
-                </a:solidFill>
-                <a:latin typeface="Avenir Next"/>
-              </a:rPr>
-              <a:t>Closing discussion D5: share your one-pager in pairs, a few 60-second share-outs, then resources to keep learning</a:t>
-            </a:r>
-          </a:p>
-        </p:txBody>
-      </p:sp>
+              <a:t>Your turn — which guardrail for which failure?</a:t>
+            </a:r>
+          </a:p>
+        </p:txBody>
+      </p:sp>
+      <p:pic>
+        <p:nvPicPr>
+          <p:cNvPr id="5" name="Picture 4" descr="fig_guardrails_youdo.png"/>
+          <p:cNvPicPr>
+            <a:picLocks noChangeAspect="1"/>
+          </p:cNvPicPr>
+          <p:nvPr/>
+        </p:nvPicPr>
+        <p:blipFill>
+          <a:blip r:embed="rId2"/>
+          <a:stretch>
+            <a:fillRect/>
+          </a:stretch>
+        </p:blipFill>
+        <p:spPr>
+          <a:xfrm>
+            <a:off x="2175066" y="1828800"/>
+            <a:ext cx="7811388" cy="3358897"/>
+          </a:xfrm>
+          <a:prstGeom prst="rect">
+            <a:avLst/>
+          </a:prstGeom>
+        </p:spPr>
+      </p:pic>
       <p:sp>
         <p:nvSpPr>
           <p:cNvPr id="6" name="Rectangle 5"/>
@@ -4923,8 +4940,8 @@
         </p:nvSpPr>
         <p:spPr>
           <a:xfrm>
-            <a:off x="548640" y="5806439"/>
-            <a:ext cx="10515600" cy="923544"/>
+            <a:off x="548640" y="5279137"/>
+            <a:ext cx="10515600" cy="1441703"/>
           </a:xfrm>
           <a:prstGeom prst="rect">
             <a:avLst/>
@@ -4974,7 +4991,517 @@
                 </a:solidFill>
                 <a:latin typeface="Avenir Next"/>
               </a:rPr>
-              <a:t>2 minutes to finish Quiz 14 solo → we mark it together as Lab 5 opens. Then choose your capstone track and open the Colab. Bring everything: representation (Lec 10), the right architecture (Lec 5/8/11), and honest metrics (Lec 4/10).</a:t>
+              <a:t>Your turn → Quiz 14, Q2. Three NEW failures — different wording from the chart above. Match each to the ONE guardrail that prevents it (word bank: HUMAN REVIEW · RESTRICTED TOOLS · LOGGING). Then Q2(d): human review CATCHES a fabricated citation — what would make such fabrications RARER in the first place? Worked answer in the notes.</a:t>
+            </a:r>
+          </a:p>
+        </p:txBody>
+      </p:sp>
+    </p:spTree>
+  </p:cSld>
+  <p:clrMapOvr>
+    <a:masterClrMapping/>
+  </p:clrMapOvr>
+</p:sld>
+</file>
+
+<file path=ppt/slides/slide18.xml><?xml version="1.0" encoding="utf-8"?>
+<p:sld xmlns:a="http://schemas.openxmlformats.org/drawingml/2006/main" xmlns:p="http://schemas.openxmlformats.org/presentationml/2006/main" xmlns:r="http://schemas.openxmlformats.org/officeDocument/2006/relationships">
+  <p:cSld>
+    <p:spTree>
+      <p:nvGrpSpPr>
+        <p:cNvPr id="1" name=""/>
+        <p:cNvGrpSpPr/>
+        <p:nvPr/>
+      </p:nvGrpSpPr>
+      <p:grpSpPr/>
+      <p:sp>
+        <p:nvSpPr>
+          <p:cNvPr id="2" name="Rectangle 1"/>
+          <p:cNvSpPr/>
+          <p:nvPr/>
+        </p:nvSpPr>
+        <p:spPr>
+          <a:xfrm>
+            <a:off x="0" y="0"/>
+            <a:ext cx="12191695" cy="6858000"/>
+          </a:xfrm>
+          <a:prstGeom prst="rect">
+            <a:avLst/>
+          </a:prstGeom>
+          <a:solidFill>
+            <a:srgbClr val="FBFBF8"/>
+          </a:solidFill>
+          <a:ln>
+            <a:noFill/>
+          </a:ln>
+          <a:effectLst/>
+        </p:spPr>
+        <p:style>
+          <a:lnRef idx="1">
+            <a:schemeClr val="accent1"/>
+          </a:lnRef>
+          <a:fillRef idx="3">
+            <a:schemeClr val="accent1"/>
+          </a:fillRef>
+          <a:effectRef idx="2">
+            <a:schemeClr val="accent1"/>
+          </a:effectRef>
+          <a:fontRef idx="minor">
+            <a:schemeClr val="lt1"/>
+          </a:fontRef>
+        </p:style>
+        <p:txBody>
+          <a:bodyPr rtlCol="0" anchor="ctr"/>
+          <a:lstStyle/>
+          <a:p>
+            <a:pPr algn="ctr"/>
+          </a:p>
+        </p:txBody>
+      </p:sp>
+      <p:sp>
+        <p:nvSpPr>
+          <p:cNvPr id="3" name="TextBox 2"/>
+          <p:cNvSpPr txBox="1"/>
+          <p:nvPr/>
+        </p:nvSpPr>
+        <p:spPr>
+          <a:xfrm>
+            <a:off x="548640" y="320040"/>
+            <a:ext cx="10972800" cy="365760"/>
+          </a:xfrm>
+          <a:prstGeom prst="rect">
+            <a:avLst/>
+          </a:prstGeom>
+          <a:noFill/>
+        </p:spPr>
+        <p:txBody>
+          <a:bodyPr wrap="square" anchor="t">
+            <a:spAutoFit/>
+          </a:bodyPr>
+          <a:lstStyle/>
+          <a:p>
+            <a:r>
+              <a:rPr sz="1300" b="1" i="0">
+                <a:solidFill>
+                  <a:srgbClr val="8A9099"/>
+                </a:solidFill>
+                <a:latin typeface="Menlo"/>
+              </a:rPr>
+              <a:t>CLINICAL REVIEW · YOUR TURN (YOU-DO = Q3)</a:t>
+            </a:r>
+          </a:p>
+        </p:txBody>
+      </p:sp>
+      <p:sp>
+        <p:nvSpPr>
+          <p:cNvPr id="4" name="TextBox 3"/>
+          <p:cNvSpPr txBox="1"/>
+          <p:nvPr/>
+        </p:nvSpPr>
+        <p:spPr>
+          <a:xfrm>
+            <a:off x="548640" y="731520"/>
+            <a:ext cx="11064240" cy="1005840"/>
+          </a:xfrm>
+          <a:prstGeom prst="rect">
+            <a:avLst/>
+          </a:prstGeom>
+          <a:noFill/>
+        </p:spPr>
+        <p:txBody>
+          <a:bodyPr wrap="square" anchor="t">
+            <a:spAutoFit/>
+          </a:bodyPr>
+          <a:lstStyle/>
+          <a:p>
+            <a:r>
+              <a:rPr sz="3400" b="1" i="0">
+                <a:solidFill>
+                  <a:srgbClr val="1B2025"/>
+                </a:solidFill>
+                <a:latin typeface="Avenir Next"/>
+              </a:rPr>
+              <a:t>Your turn — what must stay human-reviewed?</a:t>
+            </a:r>
+          </a:p>
+        </p:txBody>
+      </p:sp>
+      <p:pic>
+        <p:nvPicPr>
+          <p:cNvPr id="5" name="Picture 4" descr="fig_human_review.png"/>
+          <p:cNvPicPr>
+            <a:picLocks noChangeAspect="1"/>
+          </p:cNvPicPr>
+          <p:nvPr/>
+        </p:nvPicPr>
+        <p:blipFill>
+          <a:blip r:embed="rId2"/>
+          <a:stretch>
+            <a:fillRect/>
+          </a:stretch>
+        </p:blipFill>
+        <p:spPr>
+          <a:xfrm>
+            <a:off x="1782354" y="1828800"/>
+            <a:ext cx="8596811" cy="3358897"/>
+          </a:xfrm>
+          <a:prstGeom prst="rect">
+            <a:avLst/>
+          </a:prstGeom>
+        </p:spPr>
+      </p:pic>
+      <p:sp>
+        <p:nvSpPr>
+          <p:cNvPr id="6" name="Rectangle 5"/>
+          <p:cNvSpPr/>
+          <p:nvPr/>
+        </p:nvSpPr>
+        <p:spPr>
+          <a:xfrm>
+            <a:off x="548640" y="5279137"/>
+            <a:ext cx="10515600" cy="1441703"/>
+          </a:xfrm>
+          <a:prstGeom prst="rect">
+            <a:avLst/>
+          </a:prstGeom>
+          <a:solidFill>
+            <a:srgbClr val="F1F1EC"/>
+          </a:solidFill>
+          <a:ln w="12700">
+            <a:solidFill>
+              <a:srgbClr val="E09E2F"/>
+            </a:solidFill>
+          </a:ln>
+          <a:effectLst/>
+        </p:spPr>
+        <p:style>
+          <a:lnRef idx="1">
+            <a:schemeClr val="accent1"/>
+          </a:lnRef>
+          <a:fillRef idx="3">
+            <a:schemeClr val="accent1"/>
+          </a:fillRef>
+          <a:effectRef idx="2">
+            <a:schemeClr val="accent1"/>
+          </a:effectRef>
+          <a:fontRef idx="minor">
+            <a:schemeClr val="lt1"/>
+          </a:fontRef>
+        </p:style>
+        <p:txBody>
+          <a:bodyPr rtlCol="0" anchor="ctr" wrap="square" lIns="182880" rIns="182880"/>
+          <a:lstStyle/>
+          <a:p>
+            <a:pPr algn="ctr"/>
+            <a:r>
+              <a:rPr sz="1200" b="1" i="0">
+                <a:solidFill>
+                  <a:srgbClr val="E09E2F"/>
+                </a:solidFill>
+                <a:latin typeface="Menlo"/>
+              </a:rPr>
+              <a:t>CHECKPOINT · </a:t>
+            </a:r>
+            <a:r>
+              <a:rPr sz="1700" b="0" i="0">
+                <a:solidFill>
+                  <a:srgbClr val="3D444C"/>
+                </a:solidFill>
+                <a:latin typeface="Avenir Next"/>
+              </a:rPr>
+              <a:t>Your turn → Quiz 14, Q3. Five steps an agent could help with — some look alike but differ. Circle the ones a qualified human must review and sign before they affect a patient: (a) HOLD a suspect run for review (b) AUTO-RELEASE runs it judges in-range (c) file the final R/S call (d) reformat the QC table (e) draft a note explaining a result. Then state the rule you used. Worked answer in the notes.</a:t>
+            </a:r>
+          </a:p>
+        </p:txBody>
+      </p:sp>
+    </p:spTree>
+  </p:cSld>
+  <p:clrMapOvr>
+    <a:masterClrMapping/>
+  </p:clrMapOvr>
+</p:sld>
+</file>
+
+<file path=ppt/slides/slide19.xml><?xml version="1.0" encoding="utf-8"?>
+<p:sld xmlns:a="http://schemas.openxmlformats.org/drawingml/2006/main" xmlns:p="http://schemas.openxmlformats.org/presentationml/2006/main" xmlns:r="http://schemas.openxmlformats.org/officeDocument/2006/relationships">
+  <p:cSld>
+    <p:spTree>
+      <p:nvGrpSpPr>
+        <p:cNvPr id="1" name=""/>
+        <p:cNvGrpSpPr/>
+        <p:nvPr/>
+      </p:nvGrpSpPr>
+      <p:grpSpPr/>
+      <p:sp>
+        <p:nvSpPr>
+          <p:cNvPr id="2" name="Rectangle 1"/>
+          <p:cNvSpPr/>
+          <p:nvPr/>
+        </p:nvSpPr>
+        <p:spPr>
+          <a:xfrm>
+            <a:off x="0" y="0"/>
+            <a:ext cx="12191695" cy="6858000"/>
+          </a:xfrm>
+          <a:prstGeom prst="rect">
+            <a:avLst/>
+          </a:prstGeom>
+          <a:solidFill>
+            <a:srgbClr val="FBFBF8"/>
+          </a:solidFill>
+          <a:ln>
+            <a:noFill/>
+          </a:ln>
+          <a:effectLst/>
+        </p:spPr>
+        <p:style>
+          <a:lnRef idx="1">
+            <a:schemeClr val="accent1"/>
+          </a:lnRef>
+          <a:fillRef idx="3">
+            <a:schemeClr val="accent1"/>
+          </a:fillRef>
+          <a:effectRef idx="2">
+            <a:schemeClr val="accent1"/>
+          </a:effectRef>
+          <a:fontRef idx="minor">
+            <a:schemeClr val="lt1"/>
+          </a:fontRef>
+        </p:style>
+        <p:txBody>
+          <a:bodyPr rtlCol="0" anchor="ctr"/>
+          <a:lstStyle/>
+          <a:p>
+            <a:pPr algn="ctr"/>
+          </a:p>
+        </p:txBody>
+      </p:sp>
+      <p:sp>
+        <p:nvSpPr>
+          <p:cNvPr id="3" name="TextBox 2"/>
+          <p:cNvSpPr txBox="1"/>
+          <p:nvPr/>
+        </p:nvSpPr>
+        <p:spPr>
+          <a:xfrm>
+            <a:off x="548640" y="320040"/>
+            <a:ext cx="10972800" cy="365760"/>
+          </a:xfrm>
+          <a:prstGeom prst="rect">
+            <a:avLst/>
+          </a:prstGeom>
+          <a:noFill/>
+        </p:spPr>
+        <p:txBody>
+          <a:bodyPr wrap="square" anchor="t">
+            <a:spAutoFit/>
+          </a:bodyPr>
+          <a:lstStyle/>
+          <a:p>
+            <a:r>
+              <a:rPr sz="1300" b="1" i="0">
+                <a:solidFill>
+                  <a:srgbClr val="8A9099"/>
+                </a:solidFill>
+                <a:latin typeface="Menlo"/>
+              </a:rPr>
+              <a:t>WHERE AGENTS FIT · 💬 DISCUSS</a:t>
+            </a:r>
+          </a:p>
+        </p:txBody>
+      </p:sp>
+      <p:sp>
+        <p:nvSpPr>
+          <p:cNvPr id="4" name="TextBox 3"/>
+          <p:cNvSpPr txBox="1"/>
+          <p:nvPr/>
+        </p:nvSpPr>
+        <p:spPr>
+          <a:xfrm>
+            <a:off x="548640" y="731520"/>
+            <a:ext cx="11064240" cy="1005840"/>
+          </a:xfrm>
+          <a:prstGeom prst="rect">
+            <a:avLst/>
+          </a:prstGeom>
+          <a:noFill/>
+        </p:spPr>
+        <p:txBody>
+          <a:bodyPr wrap="square" anchor="t">
+            <a:spAutoFit/>
+          </a:bodyPr>
+          <a:lstStyle/>
+          <a:p>
+            <a:r>
+              <a:rPr sz="3400" b="1" i="0">
+                <a:solidFill>
+                  <a:srgbClr val="1B2025"/>
+                </a:solidFill>
+                <a:latin typeface="Avenir Next"/>
+              </a:rPr>
+              <a:t>💬 Which task would you hand an agent first?</a:t>
+            </a:r>
+          </a:p>
+        </p:txBody>
+      </p:sp>
+      <p:sp>
+        <p:nvSpPr>
+          <p:cNvPr id="5" name="TextBox 4"/>
+          <p:cNvSpPr txBox="1"/>
+          <p:nvPr/>
+        </p:nvSpPr>
+        <p:spPr>
+          <a:xfrm>
+            <a:off x="548640" y="1920240"/>
+            <a:ext cx="10789920" cy="3444240"/>
+          </a:xfrm>
+          <a:prstGeom prst="rect">
+            <a:avLst/>
+          </a:prstGeom>
+          <a:noFill/>
+        </p:spPr>
+        <p:txBody>
+          <a:bodyPr wrap="square" anchor="t">
+            <a:spAutoFit/>
+          </a:bodyPr>
+          <a:lstStyle/>
+          <a:p>
+            <a:pPr>
+              <a:spcAft>
+                <a:spcPts val="1800"/>
+              </a:spcAft>
+            </a:pPr>
+            <a:r>
+              <a:rPr sz="2500" b="1" i="0">
+                <a:solidFill>
+                  <a:srgbClr val="0E7C7B"/>
+                </a:solidFill>
+                <a:latin typeface="Avenir Next"/>
+              </a:rPr>
+              <a:t>•  </a:t>
+            </a:r>
+            <a:r>
+              <a:rPr sz="2500" b="0" i="0">
+                <a:solidFill>
+                  <a:srgbClr val="1B2025"/>
+                </a:solidFill>
+                <a:latin typeface="Avenir Next"/>
+              </a:rPr>
+              <a:t>Pick ONE task from your own week you'd hand an agent first — triage, report drafting, data wrangling, or a literature scan</a:t>
+            </a:r>
+          </a:p>
+          <a:p>
+            <a:pPr>
+              <a:spcAft>
+                <a:spcPts val="1800"/>
+              </a:spcAft>
+            </a:pPr>
+            <a:r>
+              <a:rPr sz="2500" b="1" i="0">
+                <a:solidFill>
+                  <a:srgbClr val="0E7C7B"/>
+                </a:solidFill>
+                <a:latin typeface="Avenir Next"/>
+              </a:rPr>
+              <a:t>•  </a:t>
+            </a:r>
+            <a:r>
+              <a:rPr sz="2500" b="0" i="0">
+                <a:solidFill>
+                  <a:srgbClr val="1B2025"/>
+                </a:solidFill>
+                <a:latin typeface="Avenir Next"/>
+              </a:rPr>
+              <a:t>Name the ONE check that keeps it honest — a human review, a restricted (read-only) toolset, or a log you can audit</a:t>
+            </a:r>
+          </a:p>
+          <a:p>
+            <a:pPr>
+              <a:spcAft>
+                <a:spcPts val="1800"/>
+              </a:spcAft>
+            </a:pPr>
+            <a:r>
+              <a:rPr sz="2500" b="1" i="0">
+                <a:solidFill>
+                  <a:srgbClr val="0E7C7B"/>
+                </a:solidFill>
+                <a:latin typeface="Avenir Next"/>
+              </a:rPr>
+              <a:t>•  </a:t>
+            </a:r>
+            <a:r>
+              <a:rPr sz="2500" b="0" i="0">
+                <a:solidFill>
+                  <a:srgbClr val="1B2025"/>
+                </a:solidFill>
+                <a:latin typeface="Avenir Next"/>
+              </a:rPr>
+              <a:t>Say where it must stop — the point at which a human must review and sign before anything reaches a patient</a:t>
+            </a:r>
+          </a:p>
+        </p:txBody>
+      </p:sp>
+      <p:sp>
+        <p:nvSpPr>
+          <p:cNvPr id="6" name="Rectangle 5"/>
+          <p:cNvSpPr/>
+          <p:nvPr/>
+        </p:nvSpPr>
+        <p:spPr>
+          <a:xfrm>
+            <a:off x="548640" y="5501640"/>
+            <a:ext cx="10515600" cy="923544"/>
+          </a:xfrm>
+          <a:prstGeom prst="rect">
+            <a:avLst/>
+          </a:prstGeom>
+          <a:solidFill>
+            <a:srgbClr val="F1F1EC"/>
+          </a:solidFill>
+          <a:ln w="12700">
+            <a:solidFill>
+              <a:srgbClr val="E09E2F"/>
+            </a:solidFill>
+          </a:ln>
+          <a:effectLst/>
+        </p:spPr>
+        <p:style>
+          <a:lnRef idx="1">
+            <a:schemeClr val="accent1"/>
+          </a:lnRef>
+          <a:fillRef idx="3">
+            <a:schemeClr val="accent1"/>
+          </a:fillRef>
+          <a:effectRef idx="2">
+            <a:schemeClr val="accent1"/>
+          </a:effectRef>
+          <a:fontRef idx="minor">
+            <a:schemeClr val="lt1"/>
+          </a:fontRef>
+        </p:style>
+        <p:txBody>
+          <a:bodyPr rtlCol="0" anchor="ctr" wrap="square" lIns="182880" rIns="182880"/>
+          <a:lstStyle/>
+          <a:p>
+            <a:pPr algn="ctr"/>
+            <a:r>
+              <a:rPr sz="1200" b="1" i="0">
+                <a:solidFill>
+                  <a:srgbClr val="E09E2F"/>
+                </a:solidFill>
+                <a:latin typeface="Menlo"/>
+              </a:rPr>
+              <a:t>PAIR · </a:t>
+            </a:r>
+            <a:r>
+              <a:rPr sz="1700" b="0" i="0">
+                <a:solidFill>
+                  <a:srgbClr val="3D444C"/>
+                </a:solidFill>
+                <a:latin typeface="Avenir Next"/>
+              </a:rPr>
+              <a:t>💬 2 minutes with your neighbour: which task would you hand an agent first — and what ONE check keeps it honest? Be specific about where the agent stops and the human signs. Share-outs in the notes.</a:t>
             </a:r>
           </a:p>
         </p:txBody>
@@ -5220,7 +5747,7 @@
                 </a:solidFill>
                 <a:latin typeface="Avenir Next"/>
               </a:rPr>
-              <a:t>Instructor live demo — an 'MS analysis assistant' reads, analyses, plots, flags, drafts</a:t>
+              <a:t>Instructor live demo — build an agent in three steps: no memory → memory → tools</a:t>
             </a:r>
             <a:r>
               <a:rPr sz="2100" b="0" i="0">
@@ -5264,6 +5791,631 @@
                 <a:latin typeface="Menlo"/>
               </a:rPr>
               <a:t>   · 12 min</a:t>
+            </a:r>
+          </a:p>
+        </p:txBody>
+      </p:sp>
+    </p:spTree>
+  </p:cSld>
+  <p:clrMapOvr>
+    <a:masterClrMapping/>
+  </p:clrMapOvr>
+</p:sld>
+</file>
+
+<file path=ppt/slides/slide20.xml><?xml version="1.0" encoding="utf-8"?>
+<p:sld xmlns:a="http://schemas.openxmlformats.org/drawingml/2006/main" xmlns:p="http://schemas.openxmlformats.org/presentationml/2006/main" xmlns:r="http://schemas.openxmlformats.org/officeDocument/2006/relationships">
+  <p:cSld>
+    <p:spTree>
+      <p:nvGrpSpPr>
+        <p:cNvPr id="1" name=""/>
+        <p:cNvGrpSpPr/>
+        <p:nvPr/>
+      </p:nvGrpSpPr>
+      <p:grpSpPr/>
+      <p:sp>
+        <p:nvSpPr>
+          <p:cNvPr id="2" name="Rectangle 1"/>
+          <p:cNvSpPr/>
+          <p:nvPr/>
+        </p:nvSpPr>
+        <p:spPr>
+          <a:xfrm>
+            <a:off x="0" y="0"/>
+            <a:ext cx="12191695" cy="6858000"/>
+          </a:xfrm>
+          <a:prstGeom prst="rect">
+            <a:avLst/>
+          </a:prstGeom>
+          <a:solidFill>
+            <a:srgbClr val="FBFBF8"/>
+          </a:solidFill>
+          <a:ln>
+            <a:noFill/>
+          </a:ln>
+          <a:effectLst/>
+        </p:spPr>
+        <p:style>
+          <a:lnRef idx="1">
+            <a:schemeClr val="accent1"/>
+          </a:lnRef>
+          <a:fillRef idx="3">
+            <a:schemeClr val="accent1"/>
+          </a:fillRef>
+          <a:effectRef idx="2">
+            <a:schemeClr val="accent1"/>
+          </a:effectRef>
+          <a:fontRef idx="minor">
+            <a:schemeClr val="lt1"/>
+          </a:fontRef>
+        </p:style>
+        <p:txBody>
+          <a:bodyPr rtlCol="0" anchor="ctr"/>
+          <a:lstStyle/>
+          <a:p>
+            <a:pPr algn="ctr"/>
+          </a:p>
+        </p:txBody>
+      </p:sp>
+      <p:sp>
+        <p:nvSpPr>
+          <p:cNvPr id="3" name="TextBox 2"/>
+          <p:cNvSpPr txBox="1"/>
+          <p:nvPr/>
+        </p:nvSpPr>
+        <p:spPr>
+          <a:xfrm>
+            <a:off x="548640" y="320040"/>
+            <a:ext cx="10972800" cy="365760"/>
+          </a:xfrm>
+          <a:prstGeom prst="rect">
+            <a:avLst/>
+          </a:prstGeom>
+          <a:noFill/>
+        </p:spPr>
+        <p:txBody>
+          <a:bodyPr wrap="square" anchor="t">
+            <a:spAutoFit/>
+          </a:bodyPr>
+          <a:lstStyle/>
+          <a:p>
+            <a:r>
+              <a:rPr sz="1300" b="1" i="0">
+                <a:solidFill>
+                  <a:srgbClr val="8A9099"/>
+                </a:solidFill>
+                <a:latin typeface="Menlo"/>
+              </a:rPr>
+              <a:t>LECTURE 14 · WHAT YOU CAN DO NOW</a:t>
+            </a:r>
+          </a:p>
+        </p:txBody>
+      </p:sp>
+      <p:sp>
+        <p:nvSpPr>
+          <p:cNvPr id="4" name="TextBox 3"/>
+          <p:cNvSpPr txBox="1"/>
+          <p:nvPr/>
+        </p:nvSpPr>
+        <p:spPr>
+          <a:xfrm>
+            <a:off x="548640" y="731520"/>
+            <a:ext cx="11064240" cy="1005840"/>
+          </a:xfrm>
+          <a:prstGeom prst="rect">
+            <a:avLst/>
+          </a:prstGeom>
+          <a:noFill/>
+        </p:spPr>
+        <p:txBody>
+          <a:bodyPr wrap="square" anchor="t">
+            <a:spAutoFit/>
+          </a:bodyPr>
+          <a:lstStyle/>
+          <a:p>
+            <a:r>
+              <a:rPr sz="3400" b="1" i="0">
+                <a:solidFill>
+                  <a:srgbClr val="1B2025"/>
+                </a:solidFill>
+                <a:latin typeface="Avenir Next"/>
+              </a:rPr>
+              <a:t>You can now…</a:t>
+            </a:r>
+          </a:p>
+        </p:txBody>
+      </p:sp>
+      <p:sp>
+        <p:nvSpPr>
+          <p:cNvPr id="5" name="TextBox 4"/>
+          <p:cNvSpPr txBox="1"/>
+          <p:nvPr/>
+        </p:nvSpPr>
+        <p:spPr>
+          <a:xfrm>
+            <a:off x="548640" y="1920240"/>
+            <a:ext cx="10789920" cy="3566159"/>
+          </a:xfrm>
+          <a:prstGeom prst="rect">
+            <a:avLst/>
+          </a:prstGeom>
+          <a:noFill/>
+        </p:spPr>
+        <p:txBody>
+          <a:bodyPr wrap="square" anchor="t">
+            <a:spAutoFit/>
+          </a:bodyPr>
+          <a:lstStyle/>
+          <a:p>
+            <a:pPr>
+              <a:spcAft>
+                <a:spcPts val="1800"/>
+              </a:spcAft>
+            </a:pPr>
+            <a:r>
+              <a:rPr sz="2100" b="1" i="0">
+                <a:solidFill>
+                  <a:srgbClr val="0E7C7B"/>
+                </a:solidFill>
+                <a:latin typeface="Avenir Next"/>
+              </a:rPr>
+              <a:t>•  </a:t>
+            </a:r>
+            <a:r>
+              <a:rPr sz="2100" b="0" i="0">
+                <a:solidFill>
+                  <a:srgbClr val="1B2025"/>
+                </a:solidFill>
+                <a:latin typeface="Avenir Next"/>
+              </a:rPr>
+              <a:t>Define an agent as LLM + tools + a reason→act loop (ReAct), and label the reasoning vs acting steps on a transcript (Quiz 14 Q1)</a:t>
+            </a:r>
+          </a:p>
+          <a:p>
+            <a:pPr>
+              <a:spcAft>
+                <a:spcPts val="1800"/>
+              </a:spcAft>
+            </a:pPr>
+            <a:r>
+              <a:rPr sz="2100" b="1" i="0">
+                <a:solidFill>
+                  <a:srgbClr val="0E7C7B"/>
+                </a:solidFill>
+                <a:latin typeface="Avenir Next"/>
+              </a:rPr>
+              <a:t>•  </a:t>
+            </a:r>
+            <a:r>
+              <a:rPr sz="2100" b="0" i="0">
+                <a:solidFill>
+                  <a:srgbClr val="1B2025"/>
+                </a:solidFill>
+                <a:latin typeface="Avenir Next"/>
+              </a:rPr>
+              <a:t>Say why a chatbot with memory still invents data, and what tools change — memory is not knowledge (the three-stage demo)</a:t>
+            </a:r>
+          </a:p>
+          <a:p>
+            <a:pPr>
+              <a:spcAft>
+                <a:spcPts val="1800"/>
+              </a:spcAft>
+            </a:pPr>
+            <a:r>
+              <a:rPr sz="2100" b="1" i="0">
+                <a:solidFill>
+                  <a:srgbClr val="0E7C7B"/>
+                </a:solidFill>
+                <a:latin typeface="Avenir Next"/>
+              </a:rPr>
+              <a:t>•  </a:t>
+            </a:r>
+            <a:r>
+              <a:rPr sz="2100" b="0" i="0">
+                <a:solidFill>
+                  <a:srgbClr val="1B2025"/>
+                </a:solidFill>
+                <a:latin typeface="Avenir Next"/>
+              </a:rPr>
+              <a:t>Name where agents fit in lab workflows and the guardrail each needs — human review, restricted tools, logging (Quiz 14 Q2)</a:t>
+            </a:r>
+          </a:p>
+          <a:p>
+            <a:pPr>
+              <a:spcAft>
+                <a:spcPts val="1800"/>
+              </a:spcAft>
+            </a:pPr>
+            <a:r>
+              <a:rPr sz="2100" b="1" i="0">
+                <a:solidFill>
+                  <a:srgbClr val="0E7C7B"/>
+                </a:solidFill>
+                <a:latin typeface="Avenir Next"/>
+              </a:rPr>
+              <a:t>•  </a:t>
+            </a:r>
+            <a:r>
+              <a:rPr sz="2100" b="0" i="0">
+                <a:solidFill>
+                  <a:srgbClr val="1B2025"/>
+                </a:solidFill>
+                <a:latin typeface="Avenir Next"/>
+              </a:rPr>
+              <a:t>Say what must stay human-reviewed in a clinical workflow — anything that becomes a released result or a patient decision (Quiz 14 Q3)</a:t>
+            </a:r>
+          </a:p>
+        </p:txBody>
+      </p:sp>
+      <p:sp>
+        <p:nvSpPr>
+          <p:cNvPr id="6" name="Rectangle 5"/>
+          <p:cNvSpPr/>
+          <p:nvPr/>
+        </p:nvSpPr>
+        <p:spPr>
+          <a:xfrm>
+            <a:off x="548640" y="5623559"/>
+            <a:ext cx="10515600" cy="923544"/>
+          </a:xfrm>
+          <a:prstGeom prst="rect">
+            <a:avLst/>
+          </a:prstGeom>
+          <a:solidFill>
+            <a:srgbClr val="F1F1EC"/>
+          </a:solidFill>
+          <a:ln w="12700">
+            <a:solidFill>
+              <a:srgbClr val="3D444C"/>
+            </a:solidFill>
+          </a:ln>
+          <a:effectLst/>
+        </p:spPr>
+        <p:style>
+          <a:lnRef idx="1">
+            <a:schemeClr val="accent1"/>
+          </a:lnRef>
+          <a:fillRef idx="3">
+            <a:schemeClr val="accent1"/>
+          </a:fillRef>
+          <a:effectRef idx="2">
+            <a:schemeClr val="accent1"/>
+          </a:effectRef>
+          <a:fontRef idx="minor">
+            <a:schemeClr val="lt1"/>
+          </a:fontRef>
+        </p:style>
+        <p:txBody>
+          <a:bodyPr rtlCol="0" anchor="ctr" wrap="square" lIns="182880" rIns="182880"/>
+          <a:lstStyle/>
+          <a:p>
+            <a:pPr algn="ctr"/>
+            <a:r>
+              <a:rPr sz="1700" b="0" i="0">
+                <a:solidFill>
+                  <a:srgbClr val="3D444C"/>
+                </a:solidFill>
+                <a:latin typeface="Avenir Next"/>
+              </a:rPr>
+              <a:t>You've now worked every item on Quiz 14 live — labelling reason vs act on a transcript (Q1), matching guardrail to failure (Q2), and what stays human-reviewed (Q3) — plus a follow-along on your own bot and a live demo. Keep the sheet.</a:t>
+            </a:r>
+          </a:p>
+        </p:txBody>
+      </p:sp>
+    </p:spTree>
+  </p:cSld>
+  <p:clrMapOvr>
+    <a:masterClrMapping/>
+  </p:clrMapOvr>
+</p:sld>
+</file>
+
+<file path=ppt/slides/slide21.xml><?xml version="1.0" encoding="utf-8"?>
+<p:sld xmlns:a="http://schemas.openxmlformats.org/drawingml/2006/main" xmlns:p="http://schemas.openxmlformats.org/presentationml/2006/main" xmlns:r="http://schemas.openxmlformats.org/officeDocument/2006/relationships">
+  <p:cSld>
+    <p:spTree>
+      <p:nvGrpSpPr>
+        <p:cNvPr id="1" name=""/>
+        <p:cNvGrpSpPr/>
+        <p:nvPr/>
+      </p:nvGrpSpPr>
+      <p:grpSpPr/>
+      <p:sp>
+        <p:nvSpPr>
+          <p:cNvPr id="2" name="Rectangle 1"/>
+          <p:cNvSpPr/>
+          <p:nvPr/>
+        </p:nvSpPr>
+        <p:spPr>
+          <a:xfrm>
+            <a:off x="0" y="0"/>
+            <a:ext cx="12191695" cy="6858000"/>
+          </a:xfrm>
+          <a:prstGeom prst="rect">
+            <a:avLst/>
+          </a:prstGeom>
+          <a:solidFill>
+            <a:srgbClr val="FBFBF8"/>
+          </a:solidFill>
+          <a:ln>
+            <a:noFill/>
+          </a:ln>
+          <a:effectLst/>
+        </p:spPr>
+        <p:style>
+          <a:lnRef idx="1">
+            <a:schemeClr val="accent1"/>
+          </a:lnRef>
+          <a:fillRef idx="3">
+            <a:schemeClr val="accent1"/>
+          </a:fillRef>
+          <a:effectRef idx="2">
+            <a:schemeClr val="accent1"/>
+          </a:effectRef>
+          <a:fontRef idx="minor">
+            <a:schemeClr val="lt1"/>
+          </a:fontRef>
+        </p:style>
+        <p:txBody>
+          <a:bodyPr rtlCol="0" anchor="ctr"/>
+          <a:lstStyle/>
+          <a:p>
+            <a:pPr algn="ctr"/>
+          </a:p>
+        </p:txBody>
+      </p:sp>
+      <p:sp>
+        <p:nvSpPr>
+          <p:cNvPr id="3" name="TextBox 2"/>
+          <p:cNvSpPr txBox="1"/>
+          <p:nvPr/>
+        </p:nvSpPr>
+        <p:spPr>
+          <a:xfrm>
+            <a:off x="548640" y="320040"/>
+            <a:ext cx="10972800" cy="365760"/>
+          </a:xfrm>
+          <a:prstGeom prst="rect">
+            <a:avLst/>
+          </a:prstGeom>
+          <a:noFill/>
+        </p:spPr>
+        <p:txBody>
+          <a:bodyPr wrap="square" anchor="t">
+            <a:spAutoFit/>
+          </a:bodyPr>
+          <a:lstStyle/>
+          <a:p>
+            <a:r>
+              <a:rPr sz="1300" b="1" i="0">
+                <a:solidFill>
+                  <a:srgbClr val="8A9099"/>
+                </a:solidFill>
+                <a:latin typeface="Menlo"/>
+              </a:rPr>
+              <a:t>LECTURE 14 · NEXT — LAB 5 CAPSTONE</a:t>
+            </a:r>
+          </a:p>
+        </p:txBody>
+      </p:sp>
+      <p:sp>
+        <p:nvSpPr>
+          <p:cNvPr id="4" name="TextBox 3"/>
+          <p:cNvSpPr txBox="1"/>
+          <p:nvPr/>
+        </p:nvSpPr>
+        <p:spPr>
+          <a:xfrm>
+            <a:off x="548640" y="731520"/>
+            <a:ext cx="11064240" cy="1005840"/>
+          </a:xfrm>
+          <a:prstGeom prst="rect">
+            <a:avLst/>
+          </a:prstGeom>
+          <a:noFill/>
+        </p:spPr>
+        <p:txBody>
+          <a:bodyPr wrap="square" anchor="t">
+            <a:spAutoFit/>
+          </a:bodyPr>
+          <a:lstStyle/>
+          <a:p>
+            <a:r>
+              <a:rPr sz="3400" b="1" i="0">
+                <a:solidFill>
+                  <a:srgbClr val="1B2025"/>
+                </a:solidFill>
+                <a:latin typeface="Avenir Next"/>
+              </a:rPr>
+              <a:t>Next — the Lab 5 capstone</a:t>
+            </a:r>
+          </a:p>
+        </p:txBody>
+      </p:sp>
+      <p:sp>
+        <p:nvSpPr>
+          <p:cNvPr id="5" name="TextBox 4"/>
+          <p:cNvSpPr txBox="1"/>
+          <p:nvPr/>
+        </p:nvSpPr>
+        <p:spPr>
+          <a:xfrm>
+            <a:off x="548640" y="1920240"/>
+            <a:ext cx="10789920" cy="3749039"/>
+          </a:xfrm>
+          <a:prstGeom prst="rect">
+            <a:avLst/>
+          </a:prstGeom>
+          <a:noFill/>
+        </p:spPr>
+        <p:txBody>
+          <a:bodyPr wrap="square" anchor="t">
+            <a:spAutoFit/>
+          </a:bodyPr>
+          <a:lstStyle/>
+          <a:p>
+            <a:pPr>
+              <a:spcAft>
+                <a:spcPts val="1800"/>
+              </a:spcAft>
+            </a:pPr>
+            <a:r>
+              <a:rPr sz="2000" b="1" i="0">
+                <a:solidFill>
+                  <a:srgbClr val="0E7C7B"/>
+                </a:solidFill>
+                <a:latin typeface="Avenir Next"/>
+              </a:rPr>
+              <a:t>•  </a:t>
+            </a:r>
+            <a:r>
+              <a:rPr sz="2000" b="0" i="0">
+                <a:solidFill>
+                  <a:srgbClr val="1B2025"/>
+                </a:solidFill>
+                <a:latin typeface="Avenir Next"/>
+              </a:rPr>
+              <a:t>Pick ONE guided track: A — beat the Lab 2 spectra baseline · B — peak QC (good/bad integrations) · C — new question, same spectra (transfer learning)</a:t>
+            </a:r>
+          </a:p>
+          <a:p>
+            <a:pPr>
+              <a:spcAft>
+                <a:spcPts val="1800"/>
+              </a:spcAft>
+            </a:pPr>
+            <a:r>
+              <a:rPr sz="2000" b="1" i="0">
+                <a:solidFill>
+                  <a:srgbClr val="0E7C7B"/>
+                </a:solidFill>
+                <a:latin typeface="Avenir Next"/>
+              </a:rPr>
+              <a:t>•  </a:t>
+            </a:r>
+            <a:r>
+              <a:rPr sz="2000" b="0" i="0">
+                <a:solidFill>
+                  <a:srgbClr val="1B2025"/>
+                </a:solidFill>
+                <a:latin typeface="Avenir Next"/>
+              </a:rPr>
+              <a:t>Adapt a working pipeline, evaluate it PROPERLY — split, metrics, honest error analysis (Lectures 4 &amp; 10) — all rubric-scored</a:t>
+            </a:r>
+          </a:p>
+          <a:p>
+            <a:pPr>
+              <a:spcAft>
+                <a:spcPts val="1800"/>
+              </a:spcAft>
+            </a:pPr>
+            <a:r>
+              <a:rPr sz="2000" b="1" i="0">
+                <a:solidFill>
+                  <a:srgbClr val="0E7C7B"/>
+                </a:solidFill>
+                <a:latin typeface="Avenir Next"/>
+              </a:rPr>
+              <a:t>•  </a:t>
+            </a:r>
+            <a:r>
+              <a:rPr sz="2000" b="0" i="0">
+                <a:solidFill>
+                  <a:srgbClr val="1B2025"/>
+                </a:solidFill>
+                <a:latin typeface="Avenir Next"/>
+              </a:rPr>
+              <a:t>Complete your project one-pager: problem → data &amp; representation → architecture → validation plan → 'why not a simpler model?'</a:t>
+            </a:r>
+          </a:p>
+          <a:p>
+            <a:pPr>
+              <a:spcAft>
+                <a:spcPts val="1800"/>
+              </a:spcAft>
+            </a:pPr>
+            <a:r>
+              <a:rPr sz="2000" b="1" i="0">
+                <a:solidFill>
+                  <a:srgbClr val="0E7C7B"/>
+                </a:solidFill>
+                <a:latin typeface="Avenir Next"/>
+              </a:rPr>
+              <a:t>•  </a:t>
+            </a:r>
+            <a:r>
+              <a:rPr sz="2000" b="0" i="0">
+                <a:solidFill>
+                  <a:srgbClr val="1B2025"/>
+                </a:solidFill>
+                <a:latin typeface="Avenir Next"/>
+              </a:rPr>
+              <a:t>Closing discussion D5: share your one-pager in pairs, a few 60-second share-outs, then resources to keep learning</a:t>
+            </a:r>
+          </a:p>
+        </p:txBody>
+      </p:sp>
+      <p:sp>
+        <p:nvSpPr>
+          <p:cNvPr id="6" name="Rectangle 5"/>
+          <p:cNvSpPr/>
+          <p:nvPr/>
+        </p:nvSpPr>
+        <p:spPr>
+          <a:xfrm>
+            <a:off x="548640" y="5806439"/>
+            <a:ext cx="10515600" cy="923544"/>
+          </a:xfrm>
+          <a:prstGeom prst="rect">
+            <a:avLst/>
+          </a:prstGeom>
+          <a:solidFill>
+            <a:srgbClr val="F1F1EC"/>
+          </a:solidFill>
+          <a:ln w="12700">
+            <a:solidFill>
+              <a:srgbClr val="E09E2F"/>
+            </a:solidFill>
+          </a:ln>
+          <a:effectLst/>
+        </p:spPr>
+        <p:style>
+          <a:lnRef idx="1">
+            <a:schemeClr val="accent1"/>
+          </a:lnRef>
+          <a:fillRef idx="3">
+            <a:schemeClr val="accent1"/>
+          </a:fillRef>
+          <a:effectRef idx="2">
+            <a:schemeClr val="accent1"/>
+          </a:effectRef>
+          <a:fontRef idx="minor">
+            <a:schemeClr val="lt1"/>
+          </a:fontRef>
+        </p:style>
+        <p:txBody>
+          <a:bodyPr rtlCol="0" anchor="ctr" wrap="square" lIns="182880" rIns="182880"/>
+          <a:lstStyle/>
+          <a:p>
+            <a:pPr algn="ctr"/>
+            <a:r>
+              <a:rPr sz="1200" b="1" i="0">
+                <a:solidFill>
+                  <a:srgbClr val="E09E2F"/>
+                </a:solidFill>
+                <a:latin typeface="Menlo"/>
+              </a:rPr>
+              <a:t>CHECKPOINT · </a:t>
+            </a:r>
+            <a:r>
+              <a:rPr sz="1700" b="0" i="0">
+                <a:solidFill>
+                  <a:srgbClr val="3D444C"/>
+                </a:solidFill>
+                <a:latin typeface="Avenir Next"/>
+              </a:rPr>
+              <a:t>2 minutes to finish Quiz 14 solo → we mark it together as Lab 5 opens. Then choose your capstone track and open the Colab. Bring everything: representation (Lec 10), the right architecture (Lec 5/8/11), and honest metrics (Lec 4/10).</a:t>
             </a:r>
           </a:p>
         </p:txBody>
@@ -6483,7 +7635,7 @@
                 </a:solidFill>
                 <a:latin typeface="Avenir Next"/>
               </a:rPr>
-              <a:t>Instructor live demo — the 'MS analysis assistant'</a:t>
+              <a:t>Live demo — building an agent in three steps</a:t>
             </a:r>
           </a:p>
           <a:p>
@@ -6499,7 +7651,7 @@
                 </a:solidFill>
                 <a:latin typeface="Avenir Next"/>
               </a:rPr>
-              <a:t>a real agent on a spectra/QC CSV: reads files → runs analysis → plots → flags anomalies → drafts a summary, each reason→act step narrated</a:t>
+              <a:t>three scripts under demos/lecture14_agent/, each adding exactly ONE idea — watch where each one breaks on the same three questions</a:t>
             </a:r>
           </a:p>
         </p:txBody>
@@ -6639,7 +7791,7 @@
                 </a:solidFill>
                 <a:latin typeface="Menlo"/>
               </a:rPr>
-              <a:t>LIVE DEMO · THE STORYBOARD</a:t>
+              <a:t>LIVE DEMO · 1 OF 6 · THE PLAN</a:t>
             </a:r>
           </a:p>
         </p:txBody>
@@ -6673,29 +7825,29 @@
                 </a:solidFill>
                 <a:latin typeface="Avenir Next"/>
               </a:rPr>
-              <a:t>The demo, five reason→act beats</a:t>
+              <a:t>Three scripts, one new idea each</a:t>
             </a:r>
           </a:p>
         </p:txBody>
       </p:sp>
       <p:pic>
         <p:nvPicPr>
-          <p:cNvPr id="5" name="Picture 4" descr="fig_demo_storyboard.png"/>
+          <p:cNvPr id="7" name="Picture 4" descr="fig_demo_plan.png"/>
           <p:cNvPicPr>
             <a:picLocks noChangeAspect="1"/>
           </p:cNvPicPr>
           <p:nvPr/>
         </p:nvPicPr>
         <p:blipFill>
-          <a:blip r:embed="rId2"/>
+          <a:blip r:embed="rId4"/>
           <a:stretch>
             <a:fillRect/>
           </a:stretch>
         </p:blipFill>
         <p:spPr>
           <a:xfrm>
-            <a:off x="1340381" y="1828800"/>
-            <a:ext cx="9480757" cy="3358897"/>
+            <a:off x="2032910" y="1828800"/>
+            <a:ext cx="8125874" cy="3320000"/>
           </a:xfrm>
           <a:prstGeom prst="rect">
             <a:avLst/>
@@ -6761,7 +7913,7 @@
                 </a:solidFill>
                 <a:latin typeface="Avenir Next"/>
               </a:rPr>
-              <a:t>The demo as five beats, each one reason→act: READ the QC/spectra CSV → ANALYZE (limits, stats) → PLOT the spectra/trends → FLAG the out-of-range run → DRAFT the QC summary for review. 💬 Before the FLAG beat, take 30 s: predict which run the agent will flag. Primary: instructor's Claude Code (or demos/lecture14_agent/, run stage1→stage2→stage3) · fallback: a saved transcript — the demo never fails live.</a:t>
+              <a:t>Three scripts, asked the SAME three questions. STAGE 1, a bare LLM call: forgets which run we named. STAGE 2, keep the conversation: remembers QC-04, then INVENTS a mass error and passes it. STAGE 3, let it call tools: reads the file and flags QC-04 OUT OF SPEC. The punchline — the memory-only chatbot passes the one run that fails all three limits.</a:t>
             </a:r>
           </a:p>
         </p:txBody>

--- a/slides/pptx/lecture14_agents.pptx
+++ b/slides/pptx/lecture14_agents.pptx
@@ -8,6 +8,7 @@
     <p:sldId id="256" r:id="rId7"/>
     <p:sldId id="257" r:id="rId9"/>
     <p:sldId id="258" r:id="rId10"/>
+    <p:sldId id="277" r:id="rId29"/>
     <p:sldId id="259" r:id="rId11"/>
     <p:sldId id="260" r:id="rId12"/>
     <p:sldId id="261" r:id="rId13"/>
@@ -1465,6 +1466,76 @@
 </p:notes>
 </file>
 
+<file path=ppt/notesSlides/notesSlide22.xml><?xml version="1.0" encoding="utf-8"?>
+<p:notes xmlns:a="http://schemas.openxmlformats.org/drawingml/2006/main" xmlns:p="http://schemas.openxmlformats.org/presentationml/2006/main" xmlns:r="http://schemas.openxmlformats.org/officeDocument/2006/relationships">
+  <p:cSld>
+    <p:spTree>
+      <p:nvGrpSpPr>
+        <p:cNvPr id="1" name=""/>
+        <p:cNvGrpSpPr/>
+        <p:nvPr/>
+      </p:nvGrpSpPr>
+      <p:grpSpPr>
+        <a:xfrm>
+          <a:off x="0" y="0"/>
+          <a:ext cx="0" cy="0"/>
+          <a:chOff x="0" y="0"/>
+          <a:chExt cx="0" cy="0"/>
+        </a:xfrm>
+      </p:grpSpPr>
+      <p:sp>
+        <p:nvSpPr>
+          <p:cNvPr id="2" name="Slide Image Placeholder 1"/>
+          <p:cNvSpPr>
+            <a:spLocks noGrp="1"/>
+          </p:cNvSpPr>
+          <p:nvPr>
+            <p:ph type="sldImg" idx="2"/>
+          </p:nvPr>
+        </p:nvSpPr>
+        <p:spPr/>
+      </p:sp>
+      <p:sp>
+        <p:nvSpPr>
+          <p:cNvPr id="3" name="Notes Placeholder 2"/>
+          <p:cNvSpPr>
+            <a:spLocks noGrp="1"/>
+          </p:cNvSpPr>
+          <p:nvPr>
+            <p:ph type="body" idx="3" sz="quarter"/>
+          </p:nvPr>
+        </p:nvSpPr>
+        <p:spPr/>
+        <p:txBody>
+          <a:bodyPr/>
+          <a:lstStyle/>
+          <a:p>
+            <a:r>
+              <a:t>ADDED 2026-10-06 (instructor): chain of thought, the idea ReAct is built on — about 3 minutes, no quiz item. CHAIN OF THOUGHT (Wei et al., NeurIPS 2022) means prompting the model to write out its intermediate reasoning before it gives the answer — 'show your working', 'think step by step'. WALK THE EXAMPLE: theoretical m/z 524.2652, observed 524.2681, limit ±2 ppm. Asked to answer straight away, a model can be swayed by how small the gap looks (0.003 m/z) and wave it through. Asked to show its working: step 1, difference = 524.2681 − 524.2652 = 0.0029; step 2, ppm = 0.0029 ÷ 524.2652 × 10⁶ = 5.5 ppm (exactly 5.53); step 3, 5.5 &gt; 2, so it is OUT of spec. Why it helps: the model produces its answer one token at a time (Lecture 13), so writing the steps out gives it room to compute intermediate results instead of jumping to a conclusion — the same reason we ask students to show their working. Honest framing: today's strong models often get this one right even when answering directly, and reasoning models do this internally; the left panel shows the failure the technique was invented to fix. THE BRIDGE, bottom line of the figure: every step here used only numbers that were in the prompt. Ask 'does QC-04 pass?' when QC-04 lives in a file, and a chain of thought can only reason its way to an invented number — stage 2 of the live demo shows exactly that. ReAct, next slide, keeps these Thoughts and interleaves them with ACTIONS that fetch the real data: ReAct = chain-of-thought reasoning + tool calls.</a:t>
+            </a:r>
+          </a:p>
+        </p:txBody>
+      </p:sp>
+      <p:sp>
+        <p:nvSpPr>
+          <p:cNvPr id="4" name="Slide Number Placeholder 3"/>
+          <p:cNvSpPr>
+            <a:spLocks noGrp="1"/>
+          </p:cNvSpPr>
+          <p:nvPr>
+            <p:ph type="sldNum" idx="5" sz="quarter"/>
+          </p:nvPr>
+        </p:nvSpPr>
+        <p:spPr/>
+      </p:sp>
+    </p:spTree>
+  </p:cSld>
+  <p:clrMapOvr>
+    <a:masterClrMapping/>
+  </p:clrMapOvr>
+</p:notes>
+</file>
+
 <file path=ppt/notesSlides/notesSlide3.xml><?xml version="1.0" encoding="utf-8"?>
 <p:notes xmlns:a="http://schemas.openxmlformats.org/drawingml/2006/main" xmlns:p="http://schemas.openxmlformats.org/presentationml/2006/main" xmlns:r="http://schemas.openxmlformats.org/officeDocument/2006/relationships">
   <p:cSld>
@@ -1510,7 +1581,7 @@
           <a:lstStyle/>
           <a:p>
             <a:r>
-              <a:t>Demystify 'agent' in one picture. On the left, a plain chatbot: prompt in, reply out, answering only from what the model already learned — it cannot touch your files or run anything. On the right, an AGENT: the SAME LLM, now given a set of TOOLS (read a file, run code, make a plot, search) and run in a LOOP — it reasons about the next step, acts by calling a tool, observes what came back, and goes around again, keeping a memory of the run. That is the whole idea; there is no new neural architecture here — an agent is a wiring pattern around an LLM. One-line callback to Lecture 13 (say it out loud): reinforcement-style feedback and reward is how these reason→act behaviours get TRAINED — the model was tuned (RLHF and related) to plan, call tools, and use their results well. Next slide we watch the loop turn, step by step, on a real-looking MS-analysis transcript.</a:t>
+              <a:t>Demystify 'agent' in one picture. On the left, a plain chatbot: prompt in, reply out, answering only from what the model already learned — it cannot touch your files or run anything. On the right, an AGENT: the SAME LLM, now given a set of TOOLS (read a file, run code, make a plot, search) and run in a LOOP — it reasons about the next step, acts by calling a tool, observes what came back, and goes around again, keeping a memory of the run. That is the whole idea; there is no new neural architecture here — an agent is a wiring pattern around an LLM. One-line callback to Lecture 13 (say it out loud): reinforcement-style feedback and reward is how these reason→act behaviours get TRAINED — the model was tuned (RLHF and related) to plan, call tools, and use their results well. Next slide: chain of thought, the reasoning half of that loop; then we watch the loop turn, step by step, on a real-looking MS-analysis transcript.</a:t>
             </a:r>
           </a:p>
           <a:p/>
@@ -1581,7 +1652,7 @@
           <a:lstStyle/>
           <a:p>
             <a:r>
-              <a:t>The centrepiece (rule 6/9): the ReAct loop annotated on a real-looking transcript of the 'MS analysis assistant' asked to flag QC anomalies. Walk it top to bottom, naming each colour. THOUGHT (teal) = the agent REASONING: "I first need to open the QC table and see its columns" — a plan, no tool used yet. ACTION (amber) = the agent ACTING by calling a tool: read_csv("qc_runs.csv"). OBSERVATION (grey) = what the tool returned: 8 runs, columns run_id/mass_error_ppm/resolution/TIC. Then it loops again: THOUGHT — mass error must stay within ±2 ppm, check each run; ACTION — filter |mass_error_ppm| &gt; 2; OBSERVATION — R-07 = 5.3 ppm. Once more: THOUGHT — R-07 is far outside ±2 ppm, so it's the anomaly; ACTION — draft_summary(flag="R-07"); then the final ANSWER. The single distinction the room must carry to the quiz: a step is REASON if it's a Thought (planning/interpreting) and ACT if it's an Action (invoking a tool: read, run/compute, filter, plot, write/draft — so "compute the mean" is an act, because it runs a tool). Observations are the environment's replies, not the agent's steps. Note the qc_runs.csv here is a short standalone demo table, separate from the six-run QC-04 table on the follow-along handout — say so if anyone asks. One-line RL callback again: this reason-then-act behaviour is exactly what preference tuning (Lecture 13) shapes. Next slide the room labels a fresh transcript themselves (Quiz 14 Q1).</a:t>
+              <a:t>The centrepiece (rule 6/9). Open with the link to the previous slide: the THOUGHT lines are the chain of thought, and the ACTION lines are what plain chain of thought could not do. the ReAct loop annotated on a real-looking transcript of the 'MS analysis assistant' asked to flag QC anomalies. Walk it top to bottom, naming each colour. THOUGHT (teal) = the agent REASONING: "I first need to open the QC table and see its columns" — a plan, no tool used yet. ACTION (amber) = the agent ACTING by calling a tool: read_csv("qc_runs.csv"). OBSERVATION (grey) = what the tool returned: 8 runs, columns run_id/mass_error_ppm/resolution/TIC. Then it loops again: THOUGHT — mass error must stay within ±2 ppm, check each run; ACTION — filter |mass_error_ppm| &gt; 2; OBSERVATION — R-07 = 5.3 ppm. Once more: THOUGHT — R-07 is far outside ±2 ppm, so it's the anomaly; ACTION — draft_summary(flag="R-07"); then the final ANSWER. The single distinction the room must carry to the quiz: a step is REASON if it's a Thought (planning/interpreting) and ACT if it's an Action (invoking a tool: read, run/compute, filter, plot, write/draft — so "compute the mean" is an act, because it runs a tool). Observations are the environment's replies, not the agent's steps. Note the qc_runs.csv here is a short standalone demo table, separate from the six-run QC-04 table on the follow-along handout — say so if anyone asks. One-line RL callback again: this reason-then-act behaviour is exactly what preference tuning (Lecture 13) shapes. Next slide the room labels a fresh transcript themselves (Quiz 14 Q1).</a:t>
             </a:r>
           </a:p>
           <a:p/>
@@ -6428,6 +6499,224 @@
 </p:sld>
 </file>
 
+<file path=ppt/slides/slide22.xml><?xml version="1.0" encoding="utf-8"?>
+<p:sld xmlns:a="http://schemas.openxmlformats.org/drawingml/2006/main" xmlns:p="http://schemas.openxmlformats.org/presentationml/2006/main" xmlns:r="http://schemas.openxmlformats.org/officeDocument/2006/relationships">
+  <p:cSld>
+    <p:spTree>
+      <p:nvGrpSpPr>
+        <p:cNvPr id="1" name=""/>
+        <p:cNvGrpSpPr/>
+        <p:nvPr/>
+      </p:nvGrpSpPr>
+      <p:grpSpPr/>
+      <p:sp>
+        <p:nvSpPr>
+          <p:cNvPr id="2" name="Rectangle 1"/>
+          <p:cNvSpPr/>
+          <p:nvPr/>
+        </p:nvSpPr>
+        <p:spPr>
+          <a:xfrm>
+            <a:off x="0" y="0"/>
+            <a:ext cx="12191695" cy="6858000"/>
+          </a:xfrm>
+          <a:prstGeom prst="rect">
+            <a:avLst/>
+          </a:prstGeom>
+          <a:solidFill>
+            <a:srgbClr val="FBFBF8"/>
+          </a:solidFill>
+          <a:ln>
+            <a:noFill/>
+          </a:ln>
+          <a:effectLst/>
+        </p:spPr>
+        <p:style>
+          <a:lnRef idx="1">
+            <a:schemeClr val="accent1"/>
+          </a:lnRef>
+          <a:fillRef idx="3">
+            <a:schemeClr val="accent1"/>
+          </a:fillRef>
+          <a:effectRef idx="2">
+            <a:schemeClr val="accent1"/>
+          </a:effectRef>
+          <a:fontRef idx="minor">
+            <a:schemeClr val="lt1"/>
+          </a:fontRef>
+        </p:style>
+        <p:txBody>
+          <a:bodyPr rtlCol="0" anchor="ctr"/>
+          <a:lstStyle/>
+          <a:p>
+            <a:pPr algn="ctr"/>
+          </a:p>
+        </p:txBody>
+      </p:sp>
+      <p:sp>
+        <p:nvSpPr>
+          <p:cNvPr id="3" name="TextBox 2"/>
+          <p:cNvSpPr txBox="1"/>
+          <p:nvPr/>
+        </p:nvSpPr>
+        <p:spPr>
+          <a:xfrm>
+            <a:off x="548640" y="320040"/>
+            <a:ext cx="10972800" cy="365760"/>
+          </a:xfrm>
+          <a:prstGeom prst="rect">
+            <a:avLst/>
+          </a:prstGeom>
+          <a:noFill/>
+        </p:spPr>
+        <p:txBody>
+          <a:bodyPr wrap="square" anchor="t">
+            <a:spAutoFit/>
+          </a:bodyPr>
+          <a:lstStyle/>
+          <a:p>
+            <a:r>
+              <a:rPr sz="1300" b="1" i="0">
+                <a:solidFill>
+                  <a:srgbClr val="8A9099"/>
+                </a:solidFill>
+                <a:latin typeface="Menlo"/>
+              </a:rPr>
+              <a:t>CHATBOT → AGENT · 2 OF 4 · CHAIN OF THOUGHT · I-DO</a:t>
+            </a:r>
+          </a:p>
+        </p:txBody>
+      </p:sp>
+      <p:sp>
+        <p:nvSpPr>
+          <p:cNvPr id="4" name="TextBox 3"/>
+          <p:cNvSpPr txBox="1"/>
+          <p:nvPr/>
+        </p:nvSpPr>
+        <p:spPr>
+          <a:xfrm>
+            <a:off x="548640" y="731520"/>
+            <a:ext cx="11064240" cy="1005840"/>
+          </a:xfrm>
+          <a:prstGeom prst="rect">
+            <a:avLst/>
+          </a:prstGeom>
+          <a:noFill/>
+        </p:spPr>
+        <p:txBody>
+          <a:bodyPr wrap="square" anchor="t">
+            <a:spAutoFit/>
+          </a:bodyPr>
+          <a:lstStyle/>
+          <a:p>
+            <a:r>
+              <a:rPr sz="3400" b="1" i="0">
+                <a:solidFill>
+                  <a:srgbClr val="1B2025"/>
+                </a:solidFill>
+                <a:latin typeface="Avenir Next"/>
+              </a:rPr>
+              <a:t>Chain of thought: show the working first</a:t>
+            </a:r>
+          </a:p>
+        </p:txBody>
+      </p:sp>
+      <p:sp>
+        <p:nvSpPr>
+          <p:cNvPr id="6" name="Rectangle 5"/>
+          <p:cNvSpPr/>
+          <p:nvPr/>
+        </p:nvSpPr>
+        <p:spPr>
+          <a:xfrm>
+            <a:off x="548640" y="5538216"/>
+            <a:ext cx="10515600" cy="1182624"/>
+          </a:xfrm>
+          <a:prstGeom prst="rect">
+            <a:avLst/>
+          </a:prstGeom>
+          <a:solidFill>
+            <a:srgbClr val="E3F0EF"/>
+          </a:solidFill>
+          <a:ln w="12700">
+            <a:solidFill>
+              <a:srgbClr val="0E7C7B"/>
+            </a:solidFill>
+          </a:ln>
+          <a:effectLst/>
+        </p:spPr>
+        <p:style>
+          <a:lnRef idx="1">
+            <a:schemeClr val="accent1"/>
+          </a:lnRef>
+          <a:fillRef idx="3">
+            <a:schemeClr val="accent1"/>
+          </a:fillRef>
+          <a:effectRef idx="2">
+            <a:schemeClr val="accent1"/>
+          </a:effectRef>
+          <a:fontRef idx="minor">
+            <a:schemeClr val="lt1"/>
+          </a:fontRef>
+        </p:style>
+        <p:txBody>
+          <a:bodyPr rtlCol="0" anchor="ctr" wrap="square" lIns="182880" rIns="182880"/>
+          <a:lstStyle/>
+          <a:p>
+            <a:pPr algn="ctr"/>
+            <a:r>
+              <a:rPr sz="1200" b="1" i="0">
+                <a:solidFill>
+                  <a:srgbClr val="0E7C7B"/>
+                </a:solidFill>
+                <a:latin typeface="Menlo"/>
+              </a:rPr>
+              <a:t>MASS SPEC · </a:t>
+            </a:r>
+            <a:r>
+              <a:rPr sz="1700" b="0" i="0">
+                <a:solidFill>
+                  <a:srgbClr val="3D444C"/>
+                </a:solidFill>
+                <a:latin typeface="Avenir Next"/>
+              </a:rPr>
+              <a:t>CHAIN OF THOUGHT = asking the model to write its reasoning steps BEFORE the answer. Same question, same model: worked step by step (0.0029 → 5.5 ppm) it catches what a one-shot answer waves through. But it can only reason over numbers already in the prompt.</a:t>
+            </a:r>
+          </a:p>
+        </p:txBody>
+      </p:sp>
+      <p:pic>
+        <p:nvPicPr>
+          <p:cNvPr id="7" name="Picture 6" descr="fig_chain_of_thought.png"/>
+          <p:cNvPicPr>
+            <a:picLocks noChangeAspect="1"/>
+          </p:cNvPicPr>
+          <p:nvPr/>
+        </p:nvPicPr>
+        <p:blipFill>
+          <a:blip r:embed="rId3"/>
+          <a:stretch>
+            <a:fillRect/>
+          </a:stretch>
+        </p:blipFill>
+        <p:spPr>
+          <a:xfrm>
+            <a:off x="2122922" y="1828800"/>
+            <a:ext cx="7945851" cy="3649416"/>
+          </a:xfrm>
+          <a:prstGeom prst="rect">
+            <a:avLst/>
+          </a:prstGeom>
+        </p:spPr>
+      </p:pic>
+    </p:spTree>
+  </p:cSld>
+  <p:clrMapOvr>
+    <a:masterClrMapping/>
+  </p:clrMapOvr>
+</p:sld>
+</file>
+
 <file path=ppt/slides/slide3.xml><?xml version="1.0" encoding="utf-8"?>
 <p:sld xmlns:a="http://schemas.openxmlformats.org/drawingml/2006/main" xmlns:p="http://schemas.openxmlformats.org/presentationml/2006/main" xmlns:r="http://schemas.openxmlformats.org/officeDocument/2006/relationships">
   <p:cSld>
@@ -6511,7 +6800,7 @@
                 </a:solidFill>
                 <a:latin typeface="Menlo"/>
               </a:rPr>
-              <a:t>CHATBOT → AGENT · 1 OF 3 · THE DEFINITION · I-DO</a:t>
+              <a:t>CHATBOT → AGENT · 1 OF 4 · THE DEFINITION · I-DO</a:t>
             </a:r>
           </a:p>
         </p:txBody>
@@ -6729,7 +7018,7 @@
                 </a:solidFill>
                 <a:latin typeface="Menlo"/>
               </a:rPr>
-              <a:t>CHATBOT → AGENT · 2 OF 3 · THE REACT PATTERN · I-DO</a:t>
+              <a:t>CHATBOT → AGENT · 3 OF 4 · THE REACT PATTERN · I-DO</a:t>
             </a:r>
           </a:p>
         </p:txBody>
@@ -6947,7 +7236,7 @@
                 </a:solidFill>
                 <a:latin typeface="Menlo"/>
               </a:rPr>
-              <a:t>CHATBOT → AGENT · 3 OF 3 · YOUR TURN (YOU-DO = Q1)</a:t>
+              <a:t>CHATBOT → AGENT · 4 OF 4 · YOUR TURN (YOU-DO = Q1)</a:t>
             </a:r>
           </a:p>
         </p:txBody>
